--- a/forntend-next.js/frontend_deployment.pptx
+++ b/forntend-next.js/frontend_deployment.pptx
@@ -5,18 +5,21 @@
     <p:sldMasterId id="2147483648" r:id="rId1"/>
   </p:sldMasterIdLst>
   <p:sldIdLst>
-    <p:sldId id="256" r:id="rId7"/>
-    <p:sldId id="257" r:id="rId8"/>
-    <p:sldId id="258" r:id="rId9"/>
-    <p:sldId id="259" r:id="rId10"/>
-    <p:sldId id="260" r:id="rId11"/>
-    <p:sldId id="261" r:id="rId12"/>
-    <p:sldId id="262" r:id="rId13"/>
-    <p:sldId id="263" r:id="rId14"/>
-    <p:sldId id="264" r:id="rId15"/>
-    <p:sldId id="265" r:id="rId16"/>
+    <p:sldId id="256" r:id="rId2"/>
+    <p:sldId id="257" r:id="rId3"/>
+    <p:sldId id="258" r:id="rId4"/>
+    <p:sldId id="259" r:id="rId5"/>
+    <p:sldId id="260" r:id="rId6"/>
+    <p:sldId id="261" r:id="rId7"/>
+    <p:sldId id="262" r:id="rId8"/>
+    <p:sldId id="263" r:id="rId9"/>
+    <p:sldId id="266" r:id="rId10"/>
+    <p:sldId id="264" r:id="rId11"/>
+    <p:sldId id="265" r:id="rId12"/>
+    <p:sldId id="267" r:id="rId13"/>
+    <p:sldId id="268" r:id="rId14"/>
   </p:sldIdLst>
-  <p:sldSz cx="12191695" cy="6858000" type="screen4x3"/>
+  <p:sldSz cx="12192000" cy="9144000"/>
   <p:notesSz cx="6858000" cy="9144000"/>
   <p:defaultTextStyle>
     <a:defPPr>
@@ -113,6 +116,22 @@
       </a:defRPr>
     </a:lvl9pPr>
   </p:defaultTextStyle>
+  <p:extLst>
+    <p:ext uri="{EFAFB233-063F-42B5-8137-9DF3F51BA10A}">
+      <p15:sldGuideLst xmlns:p15="http://schemas.microsoft.com/office/powerpoint/2012/main">
+        <p15:guide id="1" orient="horz" pos="2880" userDrawn="1">
+          <p15:clr>
+            <a:srgbClr val="A4A3A4"/>
+          </p15:clr>
+        </p15:guide>
+        <p15:guide id="2" pos="2880" userDrawn="1">
+          <p15:clr>
+            <a:srgbClr val="A4A3A4"/>
+          </p15:clr>
+        </p15:guide>
+      </p15:sldGuideLst>
+    </p:ext>
+  </p:extLst>
 </p:presentation>
 </file>
 
@@ -145,8 +164,8 @@
         </p:nvSpPr>
         <p:spPr>
           <a:xfrm>
-            <a:off x="685800" y="2130425"/>
-            <a:ext cx="7772400" cy="1470025"/>
+            <a:off x="685802" y="2840569"/>
+            <a:ext cx="7772400" cy="1960033"/>
           </a:xfrm>
         </p:spPr>
         <p:txBody>
@@ -154,10 +173,9 @@
           <a:lstStyle/>
           <a:p>
             <a:r>
-              <a:rPr lang="en-US" smtClean="0"/>
+              <a:rPr lang="en-US"/>
               <a:t>Click to edit Master title style</a:t>
             </a:r>
-            <a:endParaRPr lang="en-US"/>
           </a:p>
         </p:txBody>
       </p:sp>
@@ -173,8 +191,8 @@
         </p:nvSpPr>
         <p:spPr>
           <a:xfrm>
-            <a:off x="1371600" y="3886200"/>
-            <a:ext cx="6400800" cy="1752600"/>
+            <a:off x="1371600" y="5181600"/>
+            <a:ext cx="6400800" cy="2336800"/>
           </a:xfrm>
         </p:spPr>
         <p:txBody>
@@ -190,7 +208,7 @@
                 </a:solidFill>
               </a:defRPr>
             </a:lvl1pPr>
-            <a:lvl2pPr marL="457200" indent="0" algn="ctr">
+            <a:lvl2pPr marL="457206" indent="0" algn="ctr">
               <a:buNone/>
               <a:defRPr>
                 <a:solidFill>
@@ -200,7 +218,7 @@
                 </a:solidFill>
               </a:defRPr>
             </a:lvl2pPr>
-            <a:lvl3pPr marL="914400" indent="0" algn="ctr">
+            <a:lvl3pPr marL="914411" indent="0" algn="ctr">
               <a:buNone/>
               <a:defRPr>
                 <a:solidFill>
@@ -210,7 +228,7 @@
                 </a:solidFill>
               </a:defRPr>
             </a:lvl3pPr>
-            <a:lvl4pPr marL="1371600" indent="0" algn="ctr">
+            <a:lvl4pPr marL="1371617" indent="0" algn="ctr">
               <a:buNone/>
               <a:defRPr>
                 <a:solidFill>
@@ -220,7 +238,7 @@
                 </a:solidFill>
               </a:defRPr>
             </a:lvl4pPr>
-            <a:lvl5pPr marL="1828800" indent="0" algn="ctr">
+            <a:lvl5pPr marL="1828823" indent="0" algn="ctr">
               <a:buNone/>
               <a:defRPr>
                 <a:solidFill>
@@ -230,7 +248,7 @@
                 </a:solidFill>
               </a:defRPr>
             </a:lvl5pPr>
-            <a:lvl6pPr marL="2286000" indent="0" algn="ctr">
+            <a:lvl6pPr marL="2286029" indent="0" algn="ctr">
               <a:buNone/>
               <a:defRPr>
                 <a:solidFill>
@@ -240,7 +258,7 @@
                 </a:solidFill>
               </a:defRPr>
             </a:lvl6pPr>
-            <a:lvl7pPr marL="2743200" indent="0" algn="ctr">
+            <a:lvl7pPr marL="2743234" indent="0" algn="ctr">
               <a:buNone/>
               <a:defRPr>
                 <a:solidFill>
@@ -250,7 +268,7 @@
                 </a:solidFill>
               </a:defRPr>
             </a:lvl7pPr>
-            <a:lvl8pPr marL="3200400" indent="0" algn="ctr">
+            <a:lvl8pPr marL="3200440" indent="0" algn="ctr">
               <a:buNone/>
               <a:defRPr>
                 <a:solidFill>
@@ -260,7 +278,7 @@
                 </a:solidFill>
               </a:defRPr>
             </a:lvl8pPr>
-            <a:lvl9pPr marL="3657600" indent="0" algn="ctr">
+            <a:lvl9pPr marL="3657646" indent="0" algn="ctr">
               <a:buNone/>
               <a:defRPr>
                 <a:solidFill>
@@ -273,10 +291,9 @@
           </a:lstStyle>
           <a:p>
             <a:r>
-              <a:rPr lang="en-US" smtClean="0"/>
+              <a:rPr lang="en-US"/>
               <a:t>Click to edit Master subtitle style</a:t>
             </a:r>
-            <a:endParaRPr lang="en-US"/>
           </a:p>
         </p:txBody>
       </p:sp>
@@ -297,7 +314,7 @@
           <a:p>
             <a:fld id="{5BCAD085-E8A6-8845-BD4E-CB4CCA059FC4}" type="datetimeFigureOut">
               <a:rPr lang="en-US" smtClean="0"/>
-              <a:t>1/27/13</a:t>
+              <a:t>6/17/2026</a:t>
             </a:fld>
             <a:endParaRPr lang="en-US"/>
           </a:p>
@@ -391,10 +408,9 @@
           <a:lstStyle/>
           <a:p>
             <a:r>
-              <a:rPr lang="en-US" smtClean="0"/>
+              <a:rPr lang="en-US"/>
               <a:t>Click to edit Master title style</a:t>
             </a:r>
-            <a:endParaRPr lang="en-US"/>
           </a:p>
         </p:txBody>
       </p:sp>
@@ -415,38 +431,37 @@
           <a:p>
             <a:pPr lvl="0"/>
             <a:r>
-              <a:rPr lang="en-US" smtClean="0"/>
+              <a:rPr lang="en-US"/>
               <a:t>Click to edit Master text styles</a:t>
             </a:r>
           </a:p>
           <a:p>
             <a:pPr lvl="1"/>
             <a:r>
-              <a:rPr lang="en-US" smtClean="0"/>
+              <a:rPr lang="en-US"/>
               <a:t>Second level</a:t>
             </a:r>
           </a:p>
           <a:p>
             <a:pPr lvl="2"/>
             <a:r>
-              <a:rPr lang="en-US" smtClean="0"/>
+              <a:rPr lang="en-US"/>
               <a:t>Third level</a:t>
             </a:r>
           </a:p>
           <a:p>
             <a:pPr lvl="3"/>
             <a:r>
-              <a:rPr lang="en-US" smtClean="0"/>
+              <a:rPr lang="en-US"/>
               <a:t>Fourth level</a:t>
             </a:r>
           </a:p>
           <a:p>
             <a:pPr lvl="4"/>
             <a:r>
-              <a:rPr lang="en-US" smtClean="0"/>
+              <a:rPr lang="en-US"/>
               <a:t>Fifth level</a:t>
             </a:r>
-            <a:endParaRPr lang="en-US"/>
           </a:p>
         </p:txBody>
       </p:sp>
@@ -467,7 +482,7 @@
           <a:p>
             <a:fld id="{5BCAD085-E8A6-8845-BD4E-CB4CCA059FC4}" type="datetimeFigureOut">
               <a:rPr lang="en-US" smtClean="0"/>
-              <a:t>1/27/13</a:t>
+              <a:t>6/17/2026</a:t>
             </a:fld>
             <a:endParaRPr lang="en-US"/>
           </a:p>
@@ -557,8 +572,8 @@
         </p:nvSpPr>
         <p:spPr>
           <a:xfrm>
-            <a:off x="6629400" y="274638"/>
-            <a:ext cx="2057400" cy="5851525"/>
+            <a:off x="6629401" y="366186"/>
+            <a:ext cx="2057401" cy="7802033"/>
           </a:xfrm>
         </p:spPr>
         <p:txBody>
@@ -566,10 +581,9 @@
           <a:lstStyle/>
           <a:p>
             <a:r>
-              <a:rPr lang="en-US" smtClean="0"/>
+              <a:rPr lang="en-US"/>
               <a:t>Click to edit Master title style</a:t>
             </a:r>
-            <a:endParaRPr lang="en-US"/>
           </a:p>
         </p:txBody>
       </p:sp>
@@ -585,8 +599,8 @@
         </p:nvSpPr>
         <p:spPr>
           <a:xfrm>
-            <a:off x="457200" y="274638"/>
-            <a:ext cx="6019800" cy="5851525"/>
+            <a:off x="457202" y="366186"/>
+            <a:ext cx="6019801" cy="7802033"/>
           </a:xfrm>
         </p:spPr>
         <p:txBody>
@@ -595,38 +609,37 @@
           <a:p>
             <a:pPr lvl="0"/>
             <a:r>
-              <a:rPr lang="en-US" smtClean="0"/>
+              <a:rPr lang="en-US"/>
               <a:t>Click to edit Master text styles</a:t>
             </a:r>
           </a:p>
           <a:p>
             <a:pPr lvl="1"/>
             <a:r>
-              <a:rPr lang="en-US" smtClean="0"/>
+              <a:rPr lang="en-US"/>
               <a:t>Second level</a:t>
             </a:r>
           </a:p>
           <a:p>
             <a:pPr lvl="2"/>
             <a:r>
-              <a:rPr lang="en-US" smtClean="0"/>
+              <a:rPr lang="en-US"/>
               <a:t>Third level</a:t>
             </a:r>
           </a:p>
           <a:p>
             <a:pPr lvl="3"/>
             <a:r>
-              <a:rPr lang="en-US" smtClean="0"/>
+              <a:rPr lang="en-US"/>
               <a:t>Fourth level</a:t>
             </a:r>
           </a:p>
           <a:p>
             <a:pPr lvl="4"/>
             <a:r>
-              <a:rPr lang="en-US" smtClean="0"/>
+              <a:rPr lang="en-US"/>
               <a:t>Fifth level</a:t>
             </a:r>
-            <a:endParaRPr lang="en-US"/>
           </a:p>
         </p:txBody>
       </p:sp>
@@ -647,7 +660,7 @@
           <a:p>
             <a:fld id="{5BCAD085-E8A6-8845-BD4E-CB4CCA059FC4}" type="datetimeFigureOut">
               <a:rPr lang="en-US" smtClean="0"/>
-              <a:t>1/27/13</a:t>
+              <a:t>6/17/2026</a:t>
             </a:fld>
             <a:endParaRPr lang="en-US"/>
           </a:p>
@@ -741,10 +754,9 @@
           <a:lstStyle/>
           <a:p>
             <a:r>
-              <a:rPr lang="en-US" smtClean="0"/>
+              <a:rPr lang="en-US"/>
               <a:t>Click to edit Master title style</a:t>
             </a:r>
-            <a:endParaRPr lang="en-US"/>
           </a:p>
         </p:txBody>
       </p:sp>
@@ -765,38 +777,37 @@
           <a:p>
             <a:pPr lvl="0"/>
             <a:r>
-              <a:rPr lang="en-US" smtClean="0"/>
+              <a:rPr lang="en-US"/>
               <a:t>Click to edit Master text styles</a:t>
             </a:r>
           </a:p>
           <a:p>
             <a:pPr lvl="1"/>
             <a:r>
-              <a:rPr lang="en-US" smtClean="0"/>
+              <a:rPr lang="en-US"/>
               <a:t>Second level</a:t>
             </a:r>
           </a:p>
           <a:p>
             <a:pPr lvl="2"/>
             <a:r>
-              <a:rPr lang="en-US" smtClean="0"/>
+              <a:rPr lang="en-US"/>
               <a:t>Third level</a:t>
             </a:r>
           </a:p>
           <a:p>
             <a:pPr lvl="3"/>
             <a:r>
-              <a:rPr lang="en-US" smtClean="0"/>
+              <a:rPr lang="en-US"/>
               <a:t>Fourth level</a:t>
             </a:r>
           </a:p>
           <a:p>
             <a:pPr lvl="4"/>
             <a:r>
-              <a:rPr lang="en-US" smtClean="0"/>
+              <a:rPr lang="en-US"/>
               <a:t>Fifth level</a:t>
             </a:r>
-            <a:endParaRPr lang="en-US"/>
           </a:p>
         </p:txBody>
       </p:sp>
@@ -817,7 +828,7 @@
           <a:p>
             <a:fld id="{5BCAD085-E8A6-8845-BD4E-CB4CCA059FC4}" type="datetimeFigureOut">
               <a:rPr lang="en-US" smtClean="0"/>
-              <a:t>1/27/13</a:t>
+              <a:t>6/17/2026</a:t>
             </a:fld>
             <a:endParaRPr lang="en-US"/>
           </a:p>
@@ -907,8 +918,8 @@
         </p:nvSpPr>
         <p:spPr>
           <a:xfrm>
-            <a:off x="722313" y="4406900"/>
-            <a:ext cx="7772400" cy="1362075"/>
+            <a:off x="722314" y="5875869"/>
+            <a:ext cx="7772400" cy="1816100"/>
           </a:xfrm>
         </p:spPr>
         <p:txBody>
@@ -920,10 +931,9 @@
           </a:lstStyle>
           <a:p>
             <a:r>
-              <a:rPr lang="en-US" smtClean="0"/>
+              <a:rPr lang="en-US"/>
               <a:t>Click to edit Master title style</a:t>
             </a:r>
-            <a:endParaRPr lang="en-US"/>
           </a:p>
         </p:txBody>
       </p:sp>
@@ -939,8 +949,8 @@
         </p:nvSpPr>
         <p:spPr>
           <a:xfrm>
-            <a:off x="722313" y="2906713"/>
-            <a:ext cx="7772400" cy="1500187"/>
+            <a:off x="722314" y="3875620"/>
+            <a:ext cx="7772400" cy="2000249"/>
           </a:xfrm>
         </p:spPr>
         <p:txBody>
@@ -956,9 +966,9 @@
                 </a:solidFill>
               </a:defRPr>
             </a:lvl1pPr>
-            <a:lvl2pPr marL="457200" indent="0">
+            <a:lvl2pPr marL="457206" indent="0">
               <a:buNone/>
-              <a:defRPr sz="1800">
+              <a:defRPr sz="1801">
                 <a:solidFill>
                   <a:schemeClr val="tx1">
                     <a:tint val="75000"/>
@@ -966,7 +976,7 @@
                 </a:solidFill>
               </a:defRPr>
             </a:lvl2pPr>
-            <a:lvl3pPr marL="914400" indent="0">
+            <a:lvl3pPr marL="914411" indent="0">
               <a:buNone/>
               <a:defRPr sz="1600">
                 <a:solidFill>
@@ -976,9 +986,9 @@
                 </a:solidFill>
               </a:defRPr>
             </a:lvl3pPr>
-            <a:lvl4pPr marL="1371600" indent="0">
+            <a:lvl4pPr marL="1371617" indent="0">
               <a:buNone/>
-              <a:defRPr sz="1400">
+              <a:defRPr sz="1401">
                 <a:solidFill>
                   <a:schemeClr val="tx1">
                     <a:tint val="75000"/>
@@ -986,9 +996,9 @@
                 </a:solidFill>
               </a:defRPr>
             </a:lvl4pPr>
-            <a:lvl5pPr marL="1828800" indent="0">
+            <a:lvl5pPr marL="1828823" indent="0">
               <a:buNone/>
-              <a:defRPr sz="1400">
+              <a:defRPr sz="1401">
                 <a:solidFill>
                   <a:schemeClr val="tx1">
                     <a:tint val="75000"/>
@@ -996,9 +1006,9 @@
                 </a:solidFill>
               </a:defRPr>
             </a:lvl5pPr>
-            <a:lvl6pPr marL="2286000" indent="0">
+            <a:lvl6pPr marL="2286029" indent="0">
               <a:buNone/>
-              <a:defRPr sz="1400">
+              <a:defRPr sz="1401">
                 <a:solidFill>
                   <a:schemeClr val="tx1">
                     <a:tint val="75000"/>
@@ -1006,9 +1016,9 @@
                 </a:solidFill>
               </a:defRPr>
             </a:lvl6pPr>
-            <a:lvl7pPr marL="2743200" indent="0">
+            <a:lvl7pPr marL="2743234" indent="0">
               <a:buNone/>
-              <a:defRPr sz="1400">
+              <a:defRPr sz="1401">
                 <a:solidFill>
                   <a:schemeClr val="tx1">
                     <a:tint val="75000"/>
@@ -1016,9 +1026,9 @@
                 </a:solidFill>
               </a:defRPr>
             </a:lvl7pPr>
-            <a:lvl8pPr marL="3200400" indent="0">
+            <a:lvl8pPr marL="3200440" indent="0">
               <a:buNone/>
-              <a:defRPr sz="1400">
+              <a:defRPr sz="1401">
                 <a:solidFill>
                   <a:schemeClr val="tx1">
                     <a:tint val="75000"/>
@@ -1026,9 +1036,9 @@
                 </a:solidFill>
               </a:defRPr>
             </a:lvl8pPr>
-            <a:lvl9pPr marL="3657600" indent="0">
+            <a:lvl9pPr marL="3657646" indent="0">
               <a:buNone/>
-              <a:defRPr sz="1400">
+              <a:defRPr sz="1401">
                 <a:solidFill>
                   <a:schemeClr val="tx1">
                     <a:tint val="75000"/>
@@ -1040,7 +1050,7 @@
           <a:p>
             <a:pPr lvl="0"/>
             <a:r>
-              <a:rPr lang="en-US" smtClean="0"/>
+              <a:rPr lang="en-US"/>
               <a:t>Click to edit Master text styles</a:t>
             </a:r>
           </a:p>
@@ -1063,7 +1073,7 @@
           <a:p>
             <a:fld id="{5BCAD085-E8A6-8845-BD4E-CB4CCA059FC4}" type="datetimeFigureOut">
               <a:rPr lang="en-US" smtClean="0"/>
-              <a:t>1/27/13</a:t>
+              <a:t>6/17/2026</a:t>
             </a:fld>
             <a:endParaRPr lang="en-US"/>
           </a:p>
@@ -1157,10 +1167,9 @@
           <a:lstStyle/>
           <a:p>
             <a:r>
-              <a:rPr lang="en-US" smtClean="0"/>
+              <a:rPr lang="en-US"/>
               <a:t>Click to edit Master title style</a:t>
             </a:r>
-            <a:endParaRPr lang="en-US"/>
           </a:p>
         </p:txBody>
       </p:sp>
@@ -1176,8 +1185,8 @@
         </p:nvSpPr>
         <p:spPr>
           <a:xfrm>
-            <a:off x="457200" y="1600200"/>
-            <a:ext cx="4038600" cy="4525963"/>
+            <a:off x="457203" y="2133602"/>
+            <a:ext cx="4038601" cy="6034618"/>
           </a:xfrm>
         </p:spPr>
         <p:txBody>
@@ -1193,59 +1202,58 @@
               <a:defRPr sz="2000"/>
             </a:lvl3pPr>
             <a:lvl4pPr>
-              <a:defRPr sz="1800"/>
+              <a:defRPr sz="1801"/>
             </a:lvl4pPr>
             <a:lvl5pPr>
-              <a:defRPr sz="1800"/>
+              <a:defRPr sz="1801"/>
             </a:lvl5pPr>
             <a:lvl6pPr>
-              <a:defRPr sz="1800"/>
+              <a:defRPr sz="1801"/>
             </a:lvl6pPr>
             <a:lvl7pPr>
-              <a:defRPr sz="1800"/>
+              <a:defRPr sz="1801"/>
             </a:lvl7pPr>
             <a:lvl8pPr>
-              <a:defRPr sz="1800"/>
+              <a:defRPr sz="1801"/>
             </a:lvl8pPr>
             <a:lvl9pPr>
-              <a:defRPr sz="1800"/>
+              <a:defRPr sz="1801"/>
             </a:lvl9pPr>
           </a:lstStyle>
           <a:p>
             <a:pPr lvl="0"/>
             <a:r>
-              <a:rPr lang="en-US" smtClean="0"/>
+              <a:rPr lang="en-US"/>
               <a:t>Click to edit Master text styles</a:t>
             </a:r>
           </a:p>
           <a:p>
             <a:pPr lvl="1"/>
             <a:r>
-              <a:rPr lang="en-US" smtClean="0"/>
+              <a:rPr lang="en-US"/>
               <a:t>Second level</a:t>
             </a:r>
           </a:p>
           <a:p>
             <a:pPr lvl="2"/>
             <a:r>
-              <a:rPr lang="en-US" smtClean="0"/>
+              <a:rPr lang="en-US"/>
               <a:t>Third level</a:t>
             </a:r>
           </a:p>
           <a:p>
             <a:pPr lvl="3"/>
             <a:r>
-              <a:rPr lang="en-US" smtClean="0"/>
+              <a:rPr lang="en-US"/>
               <a:t>Fourth level</a:t>
             </a:r>
           </a:p>
           <a:p>
             <a:pPr lvl="4"/>
             <a:r>
-              <a:rPr lang="en-US" smtClean="0"/>
+              <a:rPr lang="en-US"/>
               <a:t>Fifth level</a:t>
             </a:r>
-            <a:endParaRPr lang="en-US"/>
           </a:p>
         </p:txBody>
       </p:sp>
@@ -1261,8 +1269,8 @@
         </p:nvSpPr>
         <p:spPr>
           <a:xfrm>
-            <a:off x="4648200" y="1600200"/>
-            <a:ext cx="4038600" cy="4525963"/>
+            <a:off x="4648200" y="2133602"/>
+            <a:ext cx="4038601" cy="6034618"/>
           </a:xfrm>
         </p:spPr>
         <p:txBody>
@@ -1278,59 +1286,58 @@
               <a:defRPr sz="2000"/>
             </a:lvl3pPr>
             <a:lvl4pPr>
-              <a:defRPr sz="1800"/>
+              <a:defRPr sz="1801"/>
             </a:lvl4pPr>
             <a:lvl5pPr>
-              <a:defRPr sz="1800"/>
+              <a:defRPr sz="1801"/>
             </a:lvl5pPr>
             <a:lvl6pPr>
-              <a:defRPr sz="1800"/>
+              <a:defRPr sz="1801"/>
             </a:lvl6pPr>
             <a:lvl7pPr>
-              <a:defRPr sz="1800"/>
+              <a:defRPr sz="1801"/>
             </a:lvl7pPr>
             <a:lvl8pPr>
-              <a:defRPr sz="1800"/>
+              <a:defRPr sz="1801"/>
             </a:lvl8pPr>
             <a:lvl9pPr>
-              <a:defRPr sz="1800"/>
+              <a:defRPr sz="1801"/>
             </a:lvl9pPr>
           </a:lstStyle>
           <a:p>
             <a:pPr lvl="0"/>
             <a:r>
-              <a:rPr lang="en-US" smtClean="0"/>
+              <a:rPr lang="en-US"/>
               <a:t>Click to edit Master text styles</a:t>
             </a:r>
           </a:p>
           <a:p>
             <a:pPr lvl="1"/>
             <a:r>
-              <a:rPr lang="en-US" smtClean="0"/>
+              <a:rPr lang="en-US"/>
               <a:t>Second level</a:t>
             </a:r>
           </a:p>
           <a:p>
             <a:pPr lvl="2"/>
             <a:r>
-              <a:rPr lang="en-US" smtClean="0"/>
+              <a:rPr lang="en-US"/>
               <a:t>Third level</a:t>
             </a:r>
           </a:p>
           <a:p>
             <a:pPr lvl="3"/>
             <a:r>
-              <a:rPr lang="en-US" smtClean="0"/>
+              <a:rPr lang="en-US"/>
               <a:t>Fourth level</a:t>
             </a:r>
           </a:p>
           <a:p>
             <a:pPr lvl="4"/>
             <a:r>
-              <a:rPr lang="en-US" smtClean="0"/>
+              <a:rPr lang="en-US"/>
               <a:t>Fifth level</a:t>
             </a:r>
-            <a:endParaRPr lang="en-US"/>
           </a:p>
         </p:txBody>
       </p:sp>
@@ -1351,7 +1358,7 @@
           <a:p>
             <a:fld id="{5BCAD085-E8A6-8845-BD4E-CB4CCA059FC4}" type="datetimeFigureOut">
               <a:rPr lang="en-US" smtClean="0"/>
-              <a:t>1/27/13</a:t>
+              <a:t>6/17/2026</a:t>
             </a:fld>
             <a:endParaRPr lang="en-US"/>
           </a:p>
@@ -1449,10 +1456,9 @@
           </a:lstStyle>
           <a:p>
             <a:r>
-              <a:rPr lang="en-US" smtClean="0"/>
+              <a:rPr lang="en-US"/>
               <a:t>Click to edit Master title style</a:t>
             </a:r>
-            <a:endParaRPr lang="en-US"/>
           </a:p>
         </p:txBody>
       </p:sp>
@@ -1468,8 +1474,8 @@
         </p:nvSpPr>
         <p:spPr>
           <a:xfrm>
-            <a:off x="457200" y="1535113"/>
-            <a:ext cx="4040188" cy="639762"/>
+            <a:off x="457200" y="2046818"/>
+            <a:ext cx="4040188" cy="853016"/>
           </a:xfrm>
         </p:spPr>
         <p:txBody>
@@ -1479,35 +1485,35 @@
               <a:buNone/>
               <a:defRPr sz="2400" b="1"/>
             </a:lvl1pPr>
-            <a:lvl2pPr marL="457200" indent="0">
+            <a:lvl2pPr marL="457206" indent="0">
               <a:buNone/>
               <a:defRPr sz="2000" b="1"/>
             </a:lvl2pPr>
-            <a:lvl3pPr marL="914400" indent="0">
+            <a:lvl3pPr marL="914411" indent="0">
               <a:buNone/>
-              <a:defRPr sz="1800" b="1"/>
+              <a:defRPr sz="1801" b="1"/>
             </a:lvl3pPr>
-            <a:lvl4pPr marL="1371600" indent="0">
+            <a:lvl4pPr marL="1371617" indent="0">
               <a:buNone/>
               <a:defRPr sz="1600" b="1"/>
             </a:lvl4pPr>
-            <a:lvl5pPr marL="1828800" indent="0">
+            <a:lvl5pPr marL="1828823" indent="0">
               <a:buNone/>
               <a:defRPr sz="1600" b="1"/>
             </a:lvl5pPr>
-            <a:lvl6pPr marL="2286000" indent="0">
+            <a:lvl6pPr marL="2286029" indent="0">
               <a:buNone/>
               <a:defRPr sz="1600" b="1"/>
             </a:lvl6pPr>
-            <a:lvl7pPr marL="2743200" indent="0">
+            <a:lvl7pPr marL="2743234" indent="0">
               <a:buNone/>
               <a:defRPr sz="1600" b="1"/>
             </a:lvl7pPr>
-            <a:lvl8pPr marL="3200400" indent="0">
+            <a:lvl8pPr marL="3200440" indent="0">
               <a:buNone/>
               <a:defRPr sz="1600" b="1"/>
             </a:lvl8pPr>
-            <a:lvl9pPr marL="3657600" indent="0">
+            <a:lvl9pPr marL="3657646" indent="0">
               <a:buNone/>
               <a:defRPr sz="1600" b="1"/>
             </a:lvl9pPr>
@@ -1515,7 +1521,7 @@
           <a:p>
             <a:pPr lvl="0"/>
             <a:r>
-              <a:rPr lang="en-US" smtClean="0"/>
+              <a:rPr lang="en-US"/>
               <a:t>Click to edit Master text styles</a:t>
             </a:r>
           </a:p>
@@ -1533,8 +1539,8 @@
         </p:nvSpPr>
         <p:spPr>
           <a:xfrm>
-            <a:off x="457200" y="2174875"/>
-            <a:ext cx="4040188" cy="3951288"/>
+            <a:off x="457200" y="2899834"/>
+            <a:ext cx="4040188" cy="5268384"/>
           </a:xfrm>
         </p:spPr>
         <p:txBody>
@@ -1547,7 +1553,7 @@
               <a:defRPr sz="2000"/>
             </a:lvl2pPr>
             <a:lvl3pPr>
-              <a:defRPr sz="1800"/>
+              <a:defRPr sz="1801"/>
             </a:lvl3pPr>
             <a:lvl4pPr>
               <a:defRPr sz="1600"/>
@@ -1571,38 +1577,37 @@
           <a:p>
             <a:pPr lvl="0"/>
             <a:r>
-              <a:rPr lang="en-US" smtClean="0"/>
+              <a:rPr lang="en-US"/>
               <a:t>Click to edit Master text styles</a:t>
             </a:r>
           </a:p>
           <a:p>
             <a:pPr lvl="1"/>
             <a:r>
-              <a:rPr lang="en-US" smtClean="0"/>
+              <a:rPr lang="en-US"/>
               <a:t>Second level</a:t>
             </a:r>
           </a:p>
           <a:p>
             <a:pPr lvl="2"/>
             <a:r>
-              <a:rPr lang="en-US" smtClean="0"/>
+              <a:rPr lang="en-US"/>
               <a:t>Third level</a:t>
             </a:r>
           </a:p>
           <a:p>
             <a:pPr lvl="3"/>
             <a:r>
-              <a:rPr lang="en-US" smtClean="0"/>
+              <a:rPr lang="en-US"/>
               <a:t>Fourth level</a:t>
             </a:r>
           </a:p>
           <a:p>
             <a:pPr lvl="4"/>
             <a:r>
-              <a:rPr lang="en-US" smtClean="0"/>
+              <a:rPr lang="en-US"/>
               <a:t>Fifth level</a:t>
             </a:r>
-            <a:endParaRPr lang="en-US"/>
           </a:p>
         </p:txBody>
       </p:sp>
@@ -1618,8 +1623,8 @@
         </p:nvSpPr>
         <p:spPr>
           <a:xfrm>
-            <a:off x="4645025" y="1535113"/>
-            <a:ext cx="4041775" cy="639762"/>
+            <a:off x="4645026" y="2046818"/>
+            <a:ext cx="4041774" cy="853016"/>
           </a:xfrm>
         </p:spPr>
         <p:txBody>
@@ -1629,35 +1634,35 @@
               <a:buNone/>
               <a:defRPr sz="2400" b="1"/>
             </a:lvl1pPr>
-            <a:lvl2pPr marL="457200" indent="0">
+            <a:lvl2pPr marL="457206" indent="0">
               <a:buNone/>
               <a:defRPr sz="2000" b="1"/>
             </a:lvl2pPr>
-            <a:lvl3pPr marL="914400" indent="0">
+            <a:lvl3pPr marL="914411" indent="0">
               <a:buNone/>
-              <a:defRPr sz="1800" b="1"/>
+              <a:defRPr sz="1801" b="1"/>
             </a:lvl3pPr>
-            <a:lvl4pPr marL="1371600" indent="0">
+            <a:lvl4pPr marL="1371617" indent="0">
               <a:buNone/>
               <a:defRPr sz="1600" b="1"/>
             </a:lvl4pPr>
-            <a:lvl5pPr marL="1828800" indent="0">
+            <a:lvl5pPr marL="1828823" indent="0">
               <a:buNone/>
               <a:defRPr sz="1600" b="1"/>
             </a:lvl5pPr>
-            <a:lvl6pPr marL="2286000" indent="0">
+            <a:lvl6pPr marL="2286029" indent="0">
               <a:buNone/>
               <a:defRPr sz="1600" b="1"/>
             </a:lvl6pPr>
-            <a:lvl7pPr marL="2743200" indent="0">
+            <a:lvl7pPr marL="2743234" indent="0">
               <a:buNone/>
               <a:defRPr sz="1600" b="1"/>
             </a:lvl7pPr>
-            <a:lvl8pPr marL="3200400" indent="0">
+            <a:lvl8pPr marL="3200440" indent="0">
               <a:buNone/>
               <a:defRPr sz="1600" b="1"/>
             </a:lvl8pPr>
-            <a:lvl9pPr marL="3657600" indent="0">
+            <a:lvl9pPr marL="3657646" indent="0">
               <a:buNone/>
               <a:defRPr sz="1600" b="1"/>
             </a:lvl9pPr>
@@ -1665,7 +1670,7 @@
           <a:p>
             <a:pPr lvl="0"/>
             <a:r>
-              <a:rPr lang="en-US" smtClean="0"/>
+              <a:rPr lang="en-US"/>
               <a:t>Click to edit Master text styles</a:t>
             </a:r>
           </a:p>
@@ -1683,8 +1688,8 @@
         </p:nvSpPr>
         <p:spPr>
           <a:xfrm>
-            <a:off x="4645025" y="2174875"/>
-            <a:ext cx="4041775" cy="3951288"/>
+            <a:off x="4645026" y="2899834"/>
+            <a:ext cx="4041774" cy="5268384"/>
           </a:xfrm>
         </p:spPr>
         <p:txBody>
@@ -1697,7 +1702,7 @@
               <a:defRPr sz="2000"/>
             </a:lvl2pPr>
             <a:lvl3pPr>
-              <a:defRPr sz="1800"/>
+              <a:defRPr sz="1801"/>
             </a:lvl3pPr>
             <a:lvl4pPr>
               <a:defRPr sz="1600"/>
@@ -1721,38 +1726,37 @@
           <a:p>
             <a:pPr lvl="0"/>
             <a:r>
-              <a:rPr lang="en-US" smtClean="0"/>
+              <a:rPr lang="en-US"/>
               <a:t>Click to edit Master text styles</a:t>
             </a:r>
           </a:p>
           <a:p>
             <a:pPr lvl="1"/>
             <a:r>
-              <a:rPr lang="en-US" smtClean="0"/>
+              <a:rPr lang="en-US"/>
               <a:t>Second level</a:t>
             </a:r>
           </a:p>
           <a:p>
             <a:pPr lvl="2"/>
             <a:r>
-              <a:rPr lang="en-US" smtClean="0"/>
+              <a:rPr lang="en-US"/>
               <a:t>Third level</a:t>
             </a:r>
           </a:p>
           <a:p>
             <a:pPr lvl="3"/>
             <a:r>
-              <a:rPr lang="en-US" smtClean="0"/>
+              <a:rPr lang="en-US"/>
               <a:t>Fourth level</a:t>
             </a:r>
           </a:p>
           <a:p>
             <a:pPr lvl="4"/>
             <a:r>
-              <a:rPr lang="en-US" smtClean="0"/>
+              <a:rPr lang="en-US"/>
               <a:t>Fifth level</a:t>
             </a:r>
-            <a:endParaRPr lang="en-US"/>
           </a:p>
         </p:txBody>
       </p:sp>
@@ -1773,7 +1777,7 @@
           <a:p>
             <a:fld id="{5BCAD085-E8A6-8845-BD4E-CB4CCA059FC4}" type="datetimeFigureOut">
               <a:rPr lang="en-US" smtClean="0"/>
-              <a:t>1/27/13</a:t>
+              <a:t>6/17/2026</a:t>
             </a:fld>
             <a:endParaRPr lang="en-US"/>
           </a:p>
@@ -1867,10 +1871,9 @@
           <a:lstStyle/>
           <a:p>
             <a:r>
-              <a:rPr lang="en-US" smtClean="0"/>
+              <a:rPr lang="en-US"/>
               <a:t>Click to edit Master title style</a:t>
             </a:r>
-            <a:endParaRPr lang="en-US"/>
           </a:p>
         </p:txBody>
       </p:sp>
@@ -1891,7 +1894,7 @@
           <a:p>
             <a:fld id="{5BCAD085-E8A6-8845-BD4E-CB4CCA059FC4}" type="datetimeFigureOut">
               <a:rPr lang="en-US" smtClean="0"/>
-              <a:t>1/27/13</a:t>
+              <a:t>6/17/2026</a:t>
             </a:fld>
             <a:endParaRPr lang="en-US"/>
           </a:p>
@@ -1986,7 +1989,7 @@
           <a:p>
             <a:fld id="{5BCAD085-E8A6-8845-BD4E-CB4CCA059FC4}" type="datetimeFigureOut">
               <a:rPr lang="en-US" smtClean="0"/>
-              <a:t>1/27/13</a:t>
+              <a:t>6/17/2026</a:t>
             </a:fld>
             <a:endParaRPr lang="en-US"/>
           </a:p>
@@ -2076,8 +2079,8 @@
         </p:nvSpPr>
         <p:spPr>
           <a:xfrm>
-            <a:off x="457200" y="273050"/>
-            <a:ext cx="3008313" cy="1162050"/>
+            <a:off x="457201" y="364067"/>
+            <a:ext cx="3008313" cy="1549400"/>
           </a:xfrm>
         </p:spPr>
         <p:txBody>
@@ -2089,10 +2092,9 @@
           </a:lstStyle>
           <a:p>
             <a:r>
-              <a:rPr lang="en-US" smtClean="0"/>
+              <a:rPr lang="en-US"/>
               <a:t>Click to edit Master title style</a:t>
             </a:r>
-            <a:endParaRPr lang="en-US"/>
           </a:p>
         </p:txBody>
       </p:sp>
@@ -2108,8 +2110,8 @@
         </p:nvSpPr>
         <p:spPr>
           <a:xfrm>
-            <a:off x="3575050" y="273050"/>
-            <a:ext cx="5111750" cy="5853113"/>
+            <a:off x="3575054" y="364069"/>
+            <a:ext cx="5111749" cy="7804151"/>
           </a:xfrm>
         </p:spPr>
         <p:txBody>
@@ -2146,38 +2148,37 @@
           <a:p>
             <a:pPr lvl="0"/>
             <a:r>
-              <a:rPr lang="en-US" smtClean="0"/>
+              <a:rPr lang="en-US"/>
               <a:t>Click to edit Master text styles</a:t>
             </a:r>
           </a:p>
           <a:p>
             <a:pPr lvl="1"/>
             <a:r>
-              <a:rPr lang="en-US" smtClean="0"/>
+              <a:rPr lang="en-US"/>
               <a:t>Second level</a:t>
             </a:r>
           </a:p>
           <a:p>
             <a:pPr lvl="2"/>
             <a:r>
-              <a:rPr lang="en-US" smtClean="0"/>
+              <a:rPr lang="en-US"/>
               <a:t>Third level</a:t>
             </a:r>
           </a:p>
           <a:p>
             <a:pPr lvl="3"/>
             <a:r>
-              <a:rPr lang="en-US" smtClean="0"/>
+              <a:rPr lang="en-US"/>
               <a:t>Fourth level</a:t>
             </a:r>
           </a:p>
           <a:p>
             <a:pPr lvl="4"/>
             <a:r>
-              <a:rPr lang="en-US" smtClean="0"/>
+              <a:rPr lang="en-US"/>
               <a:t>Fifth level</a:t>
             </a:r>
-            <a:endParaRPr lang="en-US"/>
           </a:p>
         </p:txBody>
       </p:sp>
@@ -2193,8 +2194,8 @@
         </p:nvSpPr>
         <p:spPr>
           <a:xfrm>
-            <a:off x="457200" y="1435100"/>
-            <a:ext cx="3008313" cy="4691063"/>
+            <a:off x="457201" y="1913469"/>
+            <a:ext cx="3008313" cy="6254751"/>
           </a:xfrm>
         </p:spPr>
         <p:txBody>
@@ -2202,37 +2203,37 @@
           <a:lstStyle>
             <a:lvl1pPr marL="0" indent="0">
               <a:buNone/>
-              <a:defRPr sz="1400"/>
+              <a:defRPr sz="1401"/>
             </a:lvl1pPr>
-            <a:lvl2pPr marL="457200" indent="0">
+            <a:lvl2pPr marL="457206" indent="0">
               <a:buNone/>
               <a:defRPr sz="1200"/>
             </a:lvl2pPr>
-            <a:lvl3pPr marL="914400" indent="0">
+            <a:lvl3pPr marL="914411" indent="0">
               <a:buNone/>
-              <a:defRPr sz="1000"/>
+              <a:defRPr sz="1001"/>
             </a:lvl3pPr>
-            <a:lvl4pPr marL="1371600" indent="0">
+            <a:lvl4pPr marL="1371617" indent="0">
               <a:buNone/>
               <a:defRPr sz="900"/>
             </a:lvl4pPr>
-            <a:lvl5pPr marL="1828800" indent="0">
+            <a:lvl5pPr marL="1828823" indent="0">
               <a:buNone/>
               <a:defRPr sz="900"/>
             </a:lvl5pPr>
-            <a:lvl6pPr marL="2286000" indent="0">
+            <a:lvl6pPr marL="2286029" indent="0">
               <a:buNone/>
               <a:defRPr sz="900"/>
             </a:lvl6pPr>
-            <a:lvl7pPr marL="2743200" indent="0">
+            <a:lvl7pPr marL="2743234" indent="0">
               <a:buNone/>
               <a:defRPr sz="900"/>
             </a:lvl7pPr>
-            <a:lvl8pPr marL="3200400" indent="0">
+            <a:lvl8pPr marL="3200440" indent="0">
               <a:buNone/>
               <a:defRPr sz="900"/>
             </a:lvl8pPr>
-            <a:lvl9pPr marL="3657600" indent="0">
+            <a:lvl9pPr marL="3657646" indent="0">
               <a:buNone/>
               <a:defRPr sz="900"/>
             </a:lvl9pPr>
@@ -2240,7 +2241,7 @@
           <a:p>
             <a:pPr lvl="0"/>
             <a:r>
-              <a:rPr lang="en-US" smtClean="0"/>
+              <a:rPr lang="en-US"/>
               <a:t>Click to edit Master text styles</a:t>
             </a:r>
           </a:p>
@@ -2263,7 +2264,7 @@
           <a:p>
             <a:fld id="{5BCAD085-E8A6-8845-BD4E-CB4CCA059FC4}" type="datetimeFigureOut">
               <a:rPr lang="en-US" smtClean="0"/>
-              <a:t>1/27/13</a:t>
+              <a:t>6/17/2026</a:t>
             </a:fld>
             <a:endParaRPr lang="en-US"/>
           </a:p>
@@ -2353,8 +2354,8 @@
         </p:nvSpPr>
         <p:spPr>
           <a:xfrm>
-            <a:off x="1792288" y="4800600"/>
-            <a:ext cx="5486400" cy="566738"/>
+            <a:off x="1792288" y="6400800"/>
+            <a:ext cx="5486400" cy="755651"/>
           </a:xfrm>
         </p:spPr>
         <p:txBody>
@@ -2366,10 +2367,9 @@
           </a:lstStyle>
           <a:p>
             <a:r>
-              <a:rPr lang="en-US" smtClean="0"/>
+              <a:rPr lang="en-US"/>
               <a:t>Click to edit Master title style</a:t>
             </a:r>
-            <a:endParaRPr lang="en-US"/>
           </a:p>
         </p:txBody>
       </p:sp>
@@ -2385,8 +2385,8 @@
         </p:nvSpPr>
         <p:spPr>
           <a:xfrm>
-            <a:off x="1792288" y="612775"/>
-            <a:ext cx="5486400" cy="4114800"/>
+            <a:off x="1792288" y="817033"/>
+            <a:ext cx="5486400" cy="5486400"/>
           </a:xfrm>
         </p:spPr>
         <p:txBody>
@@ -2396,35 +2396,35 @@
               <a:buNone/>
               <a:defRPr sz="3200"/>
             </a:lvl1pPr>
-            <a:lvl2pPr marL="457200" indent="0">
+            <a:lvl2pPr marL="457206" indent="0">
               <a:buNone/>
               <a:defRPr sz="2800"/>
             </a:lvl2pPr>
-            <a:lvl3pPr marL="914400" indent="0">
+            <a:lvl3pPr marL="914411" indent="0">
               <a:buNone/>
               <a:defRPr sz="2400"/>
             </a:lvl3pPr>
-            <a:lvl4pPr marL="1371600" indent="0">
+            <a:lvl4pPr marL="1371617" indent="0">
               <a:buNone/>
               <a:defRPr sz="2000"/>
             </a:lvl4pPr>
-            <a:lvl5pPr marL="1828800" indent="0">
+            <a:lvl5pPr marL="1828823" indent="0">
               <a:buNone/>
               <a:defRPr sz="2000"/>
             </a:lvl5pPr>
-            <a:lvl6pPr marL="2286000" indent="0">
+            <a:lvl6pPr marL="2286029" indent="0">
               <a:buNone/>
               <a:defRPr sz="2000"/>
             </a:lvl6pPr>
-            <a:lvl7pPr marL="2743200" indent="0">
+            <a:lvl7pPr marL="2743234" indent="0">
               <a:buNone/>
               <a:defRPr sz="2000"/>
             </a:lvl7pPr>
-            <a:lvl8pPr marL="3200400" indent="0">
+            <a:lvl8pPr marL="3200440" indent="0">
               <a:buNone/>
               <a:defRPr sz="2000"/>
             </a:lvl8pPr>
-            <a:lvl9pPr marL="3657600" indent="0">
+            <a:lvl9pPr marL="3657646" indent="0">
               <a:buNone/>
               <a:defRPr sz="2000"/>
             </a:lvl9pPr>
@@ -2446,8 +2446,8 @@
         </p:nvSpPr>
         <p:spPr>
           <a:xfrm>
-            <a:off x="1792288" y="5367338"/>
-            <a:ext cx="5486400" cy="804862"/>
+            <a:off x="1792288" y="7156451"/>
+            <a:ext cx="5486400" cy="1073149"/>
           </a:xfrm>
         </p:spPr>
         <p:txBody>
@@ -2455,37 +2455,37 @@
           <a:lstStyle>
             <a:lvl1pPr marL="0" indent="0">
               <a:buNone/>
-              <a:defRPr sz="1400"/>
+              <a:defRPr sz="1401"/>
             </a:lvl1pPr>
-            <a:lvl2pPr marL="457200" indent="0">
+            <a:lvl2pPr marL="457206" indent="0">
               <a:buNone/>
               <a:defRPr sz="1200"/>
             </a:lvl2pPr>
-            <a:lvl3pPr marL="914400" indent="0">
+            <a:lvl3pPr marL="914411" indent="0">
               <a:buNone/>
-              <a:defRPr sz="1000"/>
+              <a:defRPr sz="1001"/>
             </a:lvl3pPr>
-            <a:lvl4pPr marL="1371600" indent="0">
+            <a:lvl4pPr marL="1371617" indent="0">
               <a:buNone/>
               <a:defRPr sz="900"/>
             </a:lvl4pPr>
-            <a:lvl5pPr marL="1828800" indent="0">
+            <a:lvl5pPr marL="1828823" indent="0">
               <a:buNone/>
               <a:defRPr sz="900"/>
             </a:lvl5pPr>
-            <a:lvl6pPr marL="2286000" indent="0">
+            <a:lvl6pPr marL="2286029" indent="0">
               <a:buNone/>
               <a:defRPr sz="900"/>
             </a:lvl6pPr>
-            <a:lvl7pPr marL="2743200" indent="0">
+            <a:lvl7pPr marL="2743234" indent="0">
               <a:buNone/>
               <a:defRPr sz="900"/>
             </a:lvl7pPr>
-            <a:lvl8pPr marL="3200400" indent="0">
+            <a:lvl8pPr marL="3200440" indent="0">
               <a:buNone/>
               <a:defRPr sz="900"/>
             </a:lvl8pPr>
-            <a:lvl9pPr marL="3657600" indent="0">
+            <a:lvl9pPr marL="3657646" indent="0">
               <a:buNone/>
               <a:defRPr sz="900"/>
             </a:lvl9pPr>
@@ -2493,7 +2493,7 @@
           <a:p>
             <a:pPr lvl="0"/>
             <a:r>
-              <a:rPr lang="en-US" smtClean="0"/>
+              <a:rPr lang="en-US"/>
               <a:t>Click to edit Master text styles</a:t>
             </a:r>
           </a:p>
@@ -2516,7 +2516,7 @@
           <a:p>
             <a:fld id="{5BCAD085-E8A6-8845-BD4E-CB4CCA059FC4}" type="datetimeFigureOut">
               <a:rPr lang="en-US" smtClean="0"/>
-              <a:t>1/27/13</a:t>
+              <a:t>6/17/2026</a:t>
             </a:fld>
             <a:endParaRPr lang="en-US"/>
           </a:p>
@@ -2611,8 +2611,8 @@
         </p:nvSpPr>
         <p:spPr>
           <a:xfrm>
-            <a:off x="457200" y="274638"/>
-            <a:ext cx="8229600" cy="1143000"/>
+            <a:off x="457200" y="366184"/>
+            <a:ext cx="8229600" cy="1524000"/>
           </a:xfrm>
           <a:prstGeom prst="rect">
             <a:avLst/>
@@ -2625,10 +2625,9 @@
           <a:lstStyle/>
           <a:p>
             <a:r>
-              <a:rPr lang="en-US" smtClean="0"/>
+              <a:rPr lang="en-US"/>
               <a:t>Click to edit Master title style</a:t>
             </a:r>
-            <a:endParaRPr lang="en-US"/>
           </a:p>
         </p:txBody>
       </p:sp>
@@ -2644,8 +2643,8 @@
         </p:nvSpPr>
         <p:spPr>
           <a:xfrm>
-            <a:off x="457200" y="1600200"/>
-            <a:ext cx="8229600" cy="4525963"/>
+            <a:off x="457200" y="2133602"/>
+            <a:ext cx="8229600" cy="6034618"/>
           </a:xfrm>
           <a:prstGeom prst="rect">
             <a:avLst/>
@@ -2659,38 +2658,37 @@
           <a:p>
             <a:pPr lvl="0"/>
             <a:r>
-              <a:rPr lang="en-US" smtClean="0"/>
+              <a:rPr lang="en-US"/>
               <a:t>Click to edit Master text styles</a:t>
             </a:r>
           </a:p>
           <a:p>
             <a:pPr lvl="1"/>
             <a:r>
-              <a:rPr lang="en-US" smtClean="0"/>
+              <a:rPr lang="en-US"/>
               <a:t>Second level</a:t>
             </a:r>
           </a:p>
           <a:p>
             <a:pPr lvl="2"/>
             <a:r>
-              <a:rPr lang="en-US" smtClean="0"/>
+              <a:rPr lang="en-US"/>
               <a:t>Third level</a:t>
             </a:r>
           </a:p>
           <a:p>
             <a:pPr lvl="3"/>
             <a:r>
-              <a:rPr lang="en-US" smtClean="0"/>
+              <a:rPr lang="en-US"/>
               <a:t>Fourth level</a:t>
             </a:r>
           </a:p>
           <a:p>
             <a:pPr lvl="4"/>
             <a:r>
-              <a:rPr lang="en-US" smtClean="0"/>
+              <a:rPr lang="en-US"/>
               <a:t>Fifth level</a:t>
             </a:r>
-            <a:endParaRPr lang="en-US"/>
           </a:p>
         </p:txBody>
       </p:sp>
@@ -2706,8 +2704,8 @@
         </p:nvSpPr>
         <p:spPr>
           <a:xfrm>
-            <a:off x="457200" y="6356350"/>
-            <a:ext cx="2133600" cy="365125"/>
+            <a:off x="457200" y="8475136"/>
+            <a:ext cx="2133600" cy="486833"/>
           </a:xfrm>
           <a:prstGeom prst="rect">
             <a:avLst/>
@@ -2729,7 +2727,7 @@
           <a:p>
             <a:fld id="{5BCAD085-E8A6-8845-BD4E-CB4CCA059FC4}" type="datetimeFigureOut">
               <a:rPr lang="en-US" smtClean="0"/>
-              <a:t>1/27/13</a:t>
+              <a:t>6/17/2026</a:t>
             </a:fld>
             <a:endParaRPr lang="en-US"/>
           </a:p>
@@ -2747,8 +2745,8 @@
         </p:nvSpPr>
         <p:spPr>
           <a:xfrm>
-            <a:off x="3124200" y="6356350"/>
-            <a:ext cx="2895600" cy="365125"/>
+            <a:off x="3124202" y="8475136"/>
+            <a:ext cx="2895600" cy="486833"/>
           </a:xfrm>
           <a:prstGeom prst="rect">
             <a:avLst/>
@@ -2784,8 +2782,8 @@
         </p:nvSpPr>
         <p:spPr>
           <a:xfrm>
-            <a:off x="6553200" y="6356350"/>
-            <a:ext cx="2133600" cy="365125"/>
+            <a:off x="6553200" y="8475136"/>
+            <a:ext cx="2133600" cy="486833"/>
           </a:xfrm>
           <a:prstGeom prst="rect">
             <a:avLst/>
@@ -2836,7 +2834,7 @@
   </p:sldLayoutIdLst>
   <p:txStyles>
     <p:titleStyle>
-      <a:lvl1pPr algn="ctr" defTabSz="457200" rtl="0" eaLnBrk="1" latinLnBrk="0" hangingPunct="1">
+      <a:lvl1pPr algn="ctr" defTabSz="457206" rtl="0" eaLnBrk="1" latinLnBrk="0" hangingPunct="1">
         <a:spcBef>
           <a:spcPct val="0"/>
         </a:spcBef>
@@ -2852,7 +2850,7 @@
       </a:lvl1pPr>
     </p:titleStyle>
     <p:bodyStyle>
-      <a:lvl1pPr marL="342900" indent="-342900" algn="l" defTabSz="457200" rtl="0" eaLnBrk="1" latinLnBrk="0" hangingPunct="1">
+      <a:lvl1pPr marL="342904" indent="-342904" algn="l" defTabSz="457206" rtl="0" eaLnBrk="1" latinLnBrk="0" hangingPunct="1">
         <a:spcBef>
           <a:spcPct val="20000"/>
         </a:spcBef>
@@ -2867,7 +2865,7 @@
           <a:cs typeface="+mn-cs"/>
         </a:defRPr>
       </a:lvl1pPr>
-      <a:lvl2pPr marL="742950" indent="-285750" algn="l" defTabSz="457200" rtl="0" eaLnBrk="1" latinLnBrk="0" hangingPunct="1">
+      <a:lvl2pPr marL="742959" indent="-285753" algn="l" defTabSz="457206" rtl="0" eaLnBrk="1" latinLnBrk="0" hangingPunct="1">
         <a:spcBef>
           <a:spcPct val="20000"/>
         </a:spcBef>
@@ -2882,7 +2880,7 @@
           <a:cs typeface="+mn-cs"/>
         </a:defRPr>
       </a:lvl2pPr>
-      <a:lvl3pPr marL="1143000" indent="-228600" algn="l" defTabSz="457200" rtl="0" eaLnBrk="1" latinLnBrk="0" hangingPunct="1">
+      <a:lvl3pPr marL="1143015" indent="-228604" algn="l" defTabSz="457206" rtl="0" eaLnBrk="1" latinLnBrk="0" hangingPunct="1">
         <a:spcBef>
           <a:spcPct val="20000"/>
         </a:spcBef>
@@ -2897,7 +2895,7 @@
           <a:cs typeface="+mn-cs"/>
         </a:defRPr>
       </a:lvl3pPr>
-      <a:lvl4pPr marL="1600200" indent="-228600" algn="l" defTabSz="457200" rtl="0" eaLnBrk="1" latinLnBrk="0" hangingPunct="1">
+      <a:lvl4pPr marL="1600221" indent="-228604" algn="l" defTabSz="457206" rtl="0" eaLnBrk="1" latinLnBrk="0" hangingPunct="1">
         <a:spcBef>
           <a:spcPct val="20000"/>
         </a:spcBef>
@@ -2912,7 +2910,7 @@
           <a:cs typeface="+mn-cs"/>
         </a:defRPr>
       </a:lvl4pPr>
-      <a:lvl5pPr marL="2057400" indent="-228600" algn="l" defTabSz="457200" rtl="0" eaLnBrk="1" latinLnBrk="0" hangingPunct="1">
+      <a:lvl5pPr marL="2057427" indent="-228604" algn="l" defTabSz="457206" rtl="0" eaLnBrk="1" latinLnBrk="0" hangingPunct="1">
         <a:spcBef>
           <a:spcPct val="20000"/>
         </a:spcBef>
@@ -2927,7 +2925,7 @@
           <a:cs typeface="+mn-cs"/>
         </a:defRPr>
       </a:lvl5pPr>
-      <a:lvl6pPr marL="2514600" indent="-228600" algn="l" defTabSz="457200" rtl="0" eaLnBrk="1" latinLnBrk="0" hangingPunct="1">
+      <a:lvl6pPr marL="2514632" indent="-228604" algn="l" defTabSz="457206" rtl="0" eaLnBrk="1" latinLnBrk="0" hangingPunct="1">
         <a:spcBef>
           <a:spcPct val="20000"/>
         </a:spcBef>
@@ -2942,7 +2940,7 @@
           <a:cs typeface="+mn-cs"/>
         </a:defRPr>
       </a:lvl6pPr>
-      <a:lvl7pPr marL="2971800" indent="-228600" algn="l" defTabSz="457200" rtl="0" eaLnBrk="1" latinLnBrk="0" hangingPunct="1">
+      <a:lvl7pPr marL="2971838" indent="-228604" algn="l" defTabSz="457206" rtl="0" eaLnBrk="1" latinLnBrk="0" hangingPunct="1">
         <a:spcBef>
           <a:spcPct val="20000"/>
         </a:spcBef>
@@ -2957,7 +2955,7 @@
           <a:cs typeface="+mn-cs"/>
         </a:defRPr>
       </a:lvl7pPr>
-      <a:lvl8pPr marL="3429000" indent="-228600" algn="l" defTabSz="457200" rtl="0" eaLnBrk="1" latinLnBrk="0" hangingPunct="1">
+      <a:lvl8pPr marL="3429044" indent="-228604" algn="l" defTabSz="457206" rtl="0" eaLnBrk="1" latinLnBrk="0" hangingPunct="1">
         <a:spcBef>
           <a:spcPct val="20000"/>
         </a:spcBef>
@@ -2972,7 +2970,7 @@
           <a:cs typeface="+mn-cs"/>
         </a:defRPr>
       </a:lvl8pPr>
-      <a:lvl9pPr marL="3886200" indent="-228600" algn="l" defTabSz="457200" rtl="0" eaLnBrk="1" latinLnBrk="0" hangingPunct="1">
+      <a:lvl9pPr marL="3886249" indent="-228604" algn="l" defTabSz="457206" rtl="0" eaLnBrk="1" latinLnBrk="0" hangingPunct="1">
         <a:spcBef>
           <a:spcPct val="20000"/>
         </a:spcBef>
@@ -2992,8 +2990,8 @@
       <a:defPPr>
         <a:defRPr lang="en-US"/>
       </a:defPPr>
-      <a:lvl1pPr marL="0" algn="l" defTabSz="457200" rtl="0" eaLnBrk="1" latinLnBrk="0" hangingPunct="1">
-        <a:defRPr sz="1800" kern="1200">
+      <a:lvl1pPr marL="0" algn="l" defTabSz="457206" rtl="0" eaLnBrk="1" latinLnBrk="0" hangingPunct="1">
+        <a:defRPr sz="1801" kern="1200">
           <a:solidFill>
             <a:schemeClr val="tx1"/>
           </a:solidFill>
@@ -3002,8 +3000,8 @@
           <a:cs typeface="+mn-cs"/>
         </a:defRPr>
       </a:lvl1pPr>
-      <a:lvl2pPr marL="457200" algn="l" defTabSz="457200" rtl="0" eaLnBrk="1" latinLnBrk="0" hangingPunct="1">
-        <a:defRPr sz="1800" kern="1200">
+      <a:lvl2pPr marL="457206" algn="l" defTabSz="457206" rtl="0" eaLnBrk="1" latinLnBrk="0" hangingPunct="1">
+        <a:defRPr sz="1801" kern="1200">
           <a:solidFill>
             <a:schemeClr val="tx1"/>
           </a:solidFill>
@@ -3012,8 +3010,8 @@
           <a:cs typeface="+mn-cs"/>
         </a:defRPr>
       </a:lvl2pPr>
-      <a:lvl3pPr marL="914400" algn="l" defTabSz="457200" rtl="0" eaLnBrk="1" latinLnBrk="0" hangingPunct="1">
-        <a:defRPr sz="1800" kern="1200">
+      <a:lvl3pPr marL="914411" algn="l" defTabSz="457206" rtl="0" eaLnBrk="1" latinLnBrk="0" hangingPunct="1">
+        <a:defRPr sz="1801" kern="1200">
           <a:solidFill>
             <a:schemeClr val="tx1"/>
           </a:solidFill>
@@ -3022,8 +3020,8 @@
           <a:cs typeface="+mn-cs"/>
         </a:defRPr>
       </a:lvl3pPr>
-      <a:lvl4pPr marL="1371600" algn="l" defTabSz="457200" rtl="0" eaLnBrk="1" latinLnBrk="0" hangingPunct="1">
-        <a:defRPr sz="1800" kern="1200">
+      <a:lvl4pPr marL="1371617" algn="l" defTabSz="457206" rtl="0" eaLnBrk="1" latinLnBrk="0" hangingPunct="1">
+        <a:defRPr sz="1801" kern="1200">
           <a:solidFill>
             <a:schemeClr val="tx1"/>
           </a:solidFill>
@@ -3032,8 +3030,8 @@
           <a:cs typeface="+mn-cs"/>
         </a:defRPr>
       </a:lvl4pPr>
-      <a:lvl5pPr marL="1828800" algn="l" defTabSz="457200" rtl="0" eaLnBrk="1" latinLnBrk="0" hangingPunct="1">
-        <a:defRPr sz="1800" kern="1200">
+      <a:lvl5pPr marL="1828823" algn="l" defTabSz="457206" rtl="0" eaLnBrk="1" latinLnBrk="0" hangingPunct="1">
+        <a:defRPr sz="1801" kern="1200">
           <a:solidFill>
             <a:schemeClr val="tx1"/>
           </a:solidFill>
@@ -3042,8 +3040,8 @@
           <a:cs typeface="+mn-cs"/>
         </a:defRPr>
       </a:lvl5pPr>
-      <a:lvl6pPr marL="2286000" algn="l" defTabSz="457200" rtl="0" eaLnBrk="1" latinLnBrk="0" hangingPunct="1">
-        <a:defRPr sz="1800" kern="1200">
+      <a:lvl6pPr marL="2286029" algn="l" defTabSz="457206" rtl="0" eaLnBrk="1" latinLnBrk="0" hangingPunct="1">
+        <a:defRPr sz="1801" kern="1200">
           <a:solidFill>
             <a:schemeClr val="tx1"/>
           </a:solidFill>
@@ -3052,8 +3050,8 @@
           <a:cs typeface="+mn-cs"/>
         </a:defRPr>
       </a:lvl6pPr>
-      <a:lvl7pPr marL="2743200" algn="l" defTabSz="457200" rtl="0" eaLnBrk="1" latinLnBrk="0" hangingPunct="1">
-        <a:defRPr sz="1800" kern="1200">
+      <a:lvl7pPr marL="2743234" algn="l" defTabSz="457206" rtl="0" eaLnBrk="1" latinLnBrk="0" hangingPunct="1">
+        <a:defRPr sz="1801" kern="1200">
           <a:solidFill>
             <a:schemeClr val="tx1"/>
           </a:solidFill>
@@ -3062,8 +3060,8 @@
           <a:cs typeface="+mn-cs"/>
         </a:defRPr>
       </a:lvl7pPr>
-      <a:lvl8pPr marL="3200400" algn="l" defTabSz="457200" rtl="0" eaLnBrk="1" latinLnBrk="0" hangingPunct="1">
-        <a:defRPr sz="1800" kern="1200">
+      <a:lvl8pPr marL="3200440" algn="l" defTabSz="457206" rtl="0" eaLnBrk="1" latinLnBrk="0" hangingPunct="1">
+        <a:defRPr sz="1801" kern="1200">
           <a:solidFill>
             <a:schemeClr val="tx1"/>
           </a:solidFill>
@@ -3072,8 +3070,8 @@
           <a:cs typeface="+mn-cs"/>
         </a:defRPr>
       </a:lvl8pPr>
-      <a:lvl9pPr marL="3657600" algn="l" defTabSz="457200" rtl="0" eaLnBrk="1" latinLnBrk="0" hangingPunct="1">
-        <a:defRPr sz="1800" kern="1200">
+      <a:lvl9pPr marL="3657646" algn="l" defTabSz="457206" rtl="0" eaLnBrk="1" latinLnBrk="0" hangingPunct="1">
+        <a:defRPr sz="1801" kern="1200">
           <a:solidFill>
             <a:schemeClr val="tx1"/>
           </a:solidFill>
@@ -3088,7 +3086,7 @@
 </file>
 
 <file path=ppt/slides/slide1.xml><?xml version="1.0" encoding="utf-8"?>
-<p:sld xmlns:a="http://schemas.openxmlformats.org/drawingml/2006/main" xmlns:p="http://schemas.openxmlformats.org/presentationml/2006/main" xmlns:r="http://schemas.openxmlformats.org/officeDocument/2006/relationships">
+<p:sld xmlns:a="http://schemas.openxmlformats.org/drawingml/2006/main" xmlns:r="http://schemas.openxmlformats.org/officeDocument/2006/relationships" xmlns:p="http://schemas.openxmlformats.org/presentationml/2006/main">
   <p:cSld>
     <p:bg>
       <p:bgPr>
@@ -3104,7 +3102,14 @@
         <p:cNvGrpSpPr/>
         <p:nvPr/>
       </p:nvGrpSpPr>
-      <p:grpSpPr/>
+      <p:grpSpPr>
+        <a:xfrm>
+          <a:off x="0" y="0"/>
+          <a:ext cx="0" cy="0"/>
+          <a:chOff x="0" y="0"/>
+          <a:chExt cx="0" cy="0"/>
+        </a:xfrm>
+      </p:grpSpPr>
       <p:sp>
         <p:nvSpPr>
           <p:cNvPr id="2" name="TextBox 1"/>
@@ -3113,8 +3118,8 @@
         </p:nvSpPr>
         <p:spPr>
           <a:xfrm>
-            <a:off x="914400" y="2011680"/>
-            <a:ext cx="10360152" cy="3200400"/>
+            <a:off x="914402" y="3154680"/>
+            <a:ext cx="10360153" cy="1292790"/>
           </a:xfrm>
           <a:prstGeom prst="rect">
             <a:avLst/>
@@ -3128,7 +3133,7 @@
           <a:lstStyle/>
           <a:p>
             <a:pPr algn="l">
-              <a:defRPr b="1" sz="4400">
+              <a:defRPr sz="4400" b="1">
                 <a:solidFill>
                   <a:srgbClr val="009688"/>
                 </a:solidFill>
@@ -3136,6 +3141,7 @@
               </a:defRPr>
             </a:pPr>
             <a:r>
+              <a:rPr sz="4400" dirty="0"/>
               <a:t>Next.js Frontend Deployment</a:t>
             </a:r>
           </a:p>
@@ -3143,6 +3149,7 @@
             <a:pPr>
               <a:defRPr sz="1400"/>
             </a:pPr>
+            <a:endParaRPr sz="1401" dirty="0"/>
           </a:p>
           <a:p>
             <a:pPr algn="l">
@@ -3154,6 +3161,7 @@
               </a:defRPr>
             </a:pPr>
             <a:r>
+              <a:rPr sz="2000" dirty="0"/>
               <a:t>Step-by-Step Production Guide on Ubuntu Server via PM2 &amp; Nginx</a:t>
             </a:r>
           </a:p>
@@ -3168,7 +3176,7 @@
 </file>
 
 <file path=ppt/slides/slide10.xml><?xml version="1.0" encoding="utf-8"?>
-<p:sld xmlns:a="http://schemas.openxmlformats.org/drawingml/2006/main" xmlns:p="http://schemas.openxmlformats.org/presentationml/2006/main" xmlns:r="http://schemas.openxmlformats.org/officeDocument/2006/relationships">
+<p:sld xmlns:a="http://schemas.openxmlformats.org/drawingml/2006/main" xmlns:r="http://schemas.openxmlformats.org/officeDocument/2006/relationships" xmlns:p="http://schemas.openxmlformats.org/presentationml/2006/main">
   <p:cSld>
     <p:bg>
       <p:bgPr>
@@ -3184,7 +3192,14 @@
         <p:cNvGrpSpPr/>
         <p:nvPr/>
       </p:nvGrpSpPr>
-      <p:grpSpPr/>
+      <p:grpSpPr>
+        <a:xfrm>
+          <a:off x="0" y="0"/>
+          <a:ext cx="0" cy="0"/>
+          <a:chOff x="0" y="0"/>
+          <a:chExt cx="0" cy="0"/>
+        </a:xfrm>
+      </p:grpSpPr>
       <p:sp>
         <p:nvSpPr>
           <p:cNvPr id="2" name="Rectangle 1"/>
@@ -3193,8 +3208,8 @@
         </p:nvSpPr>
         <p:spPr>
           <a:xfrm>
-            <a:off x="0" y="0"/>
-            <a:ext cx="12191695" cy="137160"/>
+            <a:off x="2" y="1143002"/>
+            <a:ext cx="12191694" cy="137161"/>
           </a:xfrm>
           <a:prstGeom prst="rect">
             <a:avLst/>
@@ -3227,6 +3242,7 @@
           <a:lstStyle/>
           <a:p>
             <a:pPr algn="ctr"/>
+            <a:endParaRPr sz="1801"/>
           </a:p>
         </p:txBody>
       </p:sp>
@@ -3238,8 +3254,8 @@
         </p:nvSpPr>
         <p:spPr>
           <a:xfrm>
-            <a:off x="914400" y="457200"/>
-            <a:ext cx="10360152" cy="457200"/>
+            <a:off x="914402" y="1600204"/>
+            <a:ext cx="10360153" cy="307905"/>
           </a:xfrm>
           <a:prstGeom prst="rect">
             <a:avLst/>
@@ -3253,7 +3269,7 @@
           <a:lstStyle/>
           <a:p>
             <a:pPr>
-              <a:defRPr b="1" sz="1400">
+              <a:defRPr sz="1400" b="1">
                 <a:solidFill>
                   <a:srgbClr val="009688"/>
                 </a:solidFill>
@@ -3261,7 +3277,8 @@
               </a:defRPr>
             </a:pPr>
             <a:r>
-              <a:t>STEP 08</a:t>
+              <a:rPr sz="1401"/>
+              <a:t>STEP 07</a:t>
             </a:r>
           </a:p>
         </p:txBody>
@@ -3274,8 +3291,8 @@
         </p:nvSpPr>
         <p:spPr>
           <a:xfrm>
-            <a:off x="914400" y="822960"/>
-            <a:ext cx="10360152" cy="731520"/>
+            <a:off x="914402" y="1965961"/>
+            <a:ext cx="10360153" cy="523220"/>
           </a:xfrm>
           <a:prstGeom prst="rect">
             <a:avLst/>
@@ -3289,7 +3306,7 @@
           <a:lstStyle/>
           <a:p>
             <a:pPr>
-              <a:defRPr b="1" sz="2800">
+              <a:defRPr sz="2800" b="1">
                 <a:solidFill>
                   <a:srgbClr val="142030"/>
                 </a:solidFill>
@@ -3297,7 +3314,8 @@
               </a:defRPr>
             </a:pPr>
             <a:r>
-              <a:t>Automate Deployment via GitHub Actions</a:t>
+              <a:rPr sz="2800"/>
+              <a:t>Enable SSL (HTTPS) with Certbot</a:t>
             </a:r>
           </a:p>
         </p:txBody>
@@ -3310,8 +3328,8 @@
         </p:nvSpPr>
         <p:spPr>
           <a:xfrm>
-            <a:off x="914400" y="1645920"/>
-            <a:ext cx="10360152" cy="4572000"/>
+            <a:off x="914402" y="2788922"/>
+            <a:ext cx="10360153" cy="2375394"/>
           </a:xfrm>
           <a:prstGeom prst="rect">
             <a:avLst/>
@@ -3326,7 +3344,7 @@
           <a:p>
             <a:pPr>
               <a:spcAft>
-                <a:spcPts val="1400"/>
+                <a:spcPts val="1401"/>
               </a:spcAft>
               <a:defRPr sz="1600">
                 <a:solidFill>
@@ -3336,13 +3354,55 @@
               </a:defRPr>
             </a:pPr>
             <a:r>
-              <a:t>•  Set up repository secrets in GitHub settings: SSH_HOST, SSH_USER, and SSH_KEY.</a:t>
+              <a:rPr sz="1600" dirty="0"/>
+              <a:t>•  Install </a:t>
+            </a:r>
+            <a:r>
+              <a:rPr sz="1600" dirty="0" err="1"/>
+              <a:t>Certbot</a:t>
+            </a:r>
+            <a:r>
+              <a:rPr sz="1600" dirty="0"/>
+              <a:t> and the Nginx helper package on the server:</a:t>
             </a:r>
           </a:p>
           <a:p>
             <a:pPr>
               <a:spcAft>
-                <a:spcPts val="1400"/>
+                <a:spcPts val="1401"/>
+              </a:spcAft>
+              <a:defRPr sz="1400">
+                <a:solidFill>
+                  <a:srgbClr val="1E293B"/>
+                </a:solidFill>
+                <a:latin typeface="Courier New"/>
+              </a:defRPr>
+            </a:pPr>
+            <a:r>
+              <a:rPr sz="1401" dirty="0"/>
+              <a:t>•    $ </a:t>
+            </a:r>
+            <a:r>
+              <a:rPr sz="1401" dirty="0" err="1"/>
+              <a:t>sudo</a:t>
+            </a:r>
+            <a:r>
+              <a:rPr sz="1401" dirty="0"/>
+              <a:t> apt install </a:t>
+            </a:r>
+            <a:r>
+              <a:rPr sz="1401" dirty="0" err="1"/>
+              <a:t>certbot</a:t>
+            </a:r>
+            <a:r>
+              <a:rPr sz="1401" dirty="0"/>
+              <a:t> python3-certbot-nginx -y</a:t>
+            </a:r>
+          </a:p>
+          <a:p>
+            <a:pPr>
+              <a:spcAft>
+                <a:spcPts val="1401"/>
               </a:spcAft>
               <a:defRPr sz="1600">
                 <a:solidFill>
@@ -3352,13 +3412,47 @@
               </a:defRPr>
             </a:pPr>
             <a:r>
-              <a:t>•  Create a workflow file in local project: .github/workflows/deploy.yml</a:t>
+              <a:rPr sz="1600" dirty="0"/>
+              <a:t>•  Generate Let's Encrypt certificates and auto-configure Nginx:</a:t>
             </a:r>
           </a:p>
           <a:p>
             <a:pPr>
               <a:spcAft>
-                <a:spcPts val="1400"/>
+                <a:spcPts val="1401"/>
+              </a:spcAft>
+              <a:defRPr sz="1400">
+                <a:solidFill>
+                  <a:srgbClr val="1E293B"/>
+                </a:solidFill>
+                <a:latin typeface="Courier New"/>
+              </a:defRPr>
+            </a:pPr>
+            <a:r>
+              <a:rPr sz="1401" dirty="0"/>
+              <a:t>•    $ </a:t>
+            </a:r>
+            <a:r>
+              <a:rPr sz="1401" dirty="0" err="1"/>
+              <a:t>sudo</a:t>
+            </a:r>
+            <a:r>
+              <a:rPr sz="1401" dirty="0"/>
+              <a:t> </a:t>
+            </a:r>
+            <a:r>
+              <a:rPr sz="1401" dirty="0" err="1"/>
+              <a:t>certbot</a:t>
+            </a:r>
+            <a:r>
+              <a:rPr sz="1401" dirty="0"/>
+              <a:t> --nginx -d frontend.example.com</a:t>
+            </a:r>
+          </a:p>
+          <a:p>
+            <a:pPr>
+              <a:spcAft>
+                <a:spcPts val="1401"/>
               </a:spcAft>
               <a:defRPr sz="1600">
                 <a:solidFill>
@@ -3368,13 +3462,14 @@
               </a:defRPr>
             </a:pPr>
             <a:r>
-              <a:t>•  Configure a push action workflow for the 'main' branch.</a:t>
+              <a:rPr sz="1600" dirty="0"/>
+              <a:t>•  Select options to redirect all traffic to HTTPS automatically.</a:t>
             </a:r>
           </a:p>
           <a:p>
             <a:pPr>
               <a:spcAft>
-                <a:spcPts val="1400"/>
+                <a:spcPts val="1401"/>
               </a:spcAft>
               <a:defRPr sz="1400">
                 <a:solidFill>
@@ -3384,23 +3479,24 @@
               </a:defRPr>
             </a:pPr>
             <a:r>
-              <a:t>•  Define deployment steps: SSH into server, git pull, npm install, npm run build, pm2 restart ecosystem.config.js.</a:t>
-            </a:r>
-          </a:p>
-          <a:p>
-            <a:pPr>
-              <a:spcAft>
-                <a:spcPts val="1400"/>
-              </a:spcAft>
-              <a:defRPr sz="1600">
-                <a:solidFill>
-                  <a:srgbClr val="142030"/>
-                </a:solidFill>
-                <a:latin typeface="Arial"/>
-              </a:defRPr>
-            </a:pPr>
-            <a:r>
-              <a:t>•  Commit and push deploy.yml to automatically trigger and verify deployment on push.</a:t>
+              <a:rPr sz="1401" dirty="0"/>
+              <a:t>•  Test automatic renewal configuration:   $ </a:t>
+            </a:r>
+            <a:r>
+              <a:rPr sz="1401" dirty="0" err="1"/>
+              <a:t>sudo</a:t>
+            </a:r>
+            <a:r>
+              <a:rPr sz="1401" dirty="0"/>
+              <a:t> </a:t>
+            </a:r>
+            <a:r>
+              <a:rPr sz="1401" dirty="0" err="1"/>
+              <a:t>certbot</a:t>
+            </a:r>
+            <a:r>
+              <a:rPr sz="1401" dirty="0"/>
+              <a:t> renew --dry-run</a:t>
             </a:r>
           </a:p>
         </p:txBody>
@@ -3413,8 +3509,8 @@
 </p:sld>
 </file>
 
-<file path=ppt/slides/slide2.xml><?xml version="1.0" encoding="utf-8"?>
-<p:sld xmlns:a="http://schemas.openxmlformats.org/drawingml/2006/main" xmlns:p="http://schemas.openxmlformats.org/presentationml/2006/main" xmlns:r="http://schemas.openxmlformats.org/officeDocument/2006/relationships">
+<file path=ppt/slides/slide11.xml><?xml version="1.0" encoding="utf-8"?>
+<p:sld xmlns:a="http://schemas.openxmlformats.org/drawingml/2006/main" xmlns:r="http://schemas.openxmlformats.org/officeDocument/2006/relationships" xmlns:p="http://schemas.openxmlformats.org/presentationml/2006/main">
   <p:cSld>
     <p:bg>
       <p:bgPr>
@@ -3430,7 +3526,14 @@
         <p:cNvGrpSpPr/>
         <p:nvPr/>
       </p:nvGrpSpPr>
-      <p:grpSpPr/>
+      <p:grpSpPr>
+        <a:xfrm>
+          <a:off x="0" y="0"/>
+          <a:ext cx="0" cy="0"/>
+          <a:chOff x="0" y="0"/>
+          <a:chExt cx="0" cy="0"/>
+        </a:xfrm>
+      </p:grpSpPr>
       <p:sp>
         <p:nvSpPr>
           <p:cNvPr id="2" name="Rectangle 1"/>
@@ -3439,8 +3542,8 @@
         </p:nvSpPr>
         <p:spPr>
           <a:xfrm>
-            <a:off x="0" y="0"/>
-            <a:ext cx="12191695" cy="137160"/>
+            <a:off x="2" y="1143002"/>
+            <a:ext cx="12191694" cy="137161"/>
           </a:xfrm>
           <a:prstGeom prst="rect">
             <a:avLst/>
@@ -3473,6 +3576,7 @@
           <a:lstStyle/>
           <a:p>
             <a:pPr algn="ctr"/>
+            <a:endParaRPr sz="1801"/>
           </a:p>
         </p:txBody>
       </p:sp>
@@ -3484,8 +3588,8 @@
         </p:nvSpPr>
         <p:spPr>
           <a:xfrm>
-            <a:off x="914400" y="457200"/>
-            <a:ext cx="10360152" cy="457200"/>
+            <a:off x="310899" y="1600204"/>
+            <a:ext cx="10963657" cy="307905"/>
           </a:xfrm>
           <a:prstGeom prst="rect">
             <a:avLst/>
@@ -3499,7 +3603,7 @@
           <a:lstStyle/>
           <a:p>
             <a:pPr>
-              <a:defRPr b="1" sz="1400">
+              <a:defRPr sz="1400" b="1">
                 <a:solidFill>
                   <a:srgbClr val="009688"/>
                 </a:solidFill>
@@ -3507,7 +3611,8 @@
               </a:defRPr>
             </a:pPr>
             <a:r>
-              <a:t>PREREQUISITES</a:t>
+              <a:rPr sz="1401"/>
+              <a:t>STEP 08</a:t>
             </a:r>
           </a:p>
         </p:txBody>
@@ -3520,8 +3625,8 @@
         </p:nvSpPr>
         <p:spPr>
           <a:xfrm>
-            <a:off x="914400" y="822960"/>
-            <a:ext cx="10360152" cy="731520"/>
+            <a:off x="310899" y="1965962"/>
+            <a:ext cx="10963657" cy="523220"/>
           </a:xfrm>
           <a:prstGeom prst="rect">
             <a:avLst/>
@@ -3535,7 +3640,7 @@
           <a:lstStyle/>
           <a:p>
             <a:pPr>
-              <a:defRPr b="1" sz="2800">
+              <a:defRPr sz="2800" b="1">
                 <a:solidFill>
                   <a:srgbClr val="142030"/>
                 </a:solidFill>
@@ -3543,7 +3648,8 @@
               </a:defRPr>
             </a:pPr>
             <a:r>
-              <a:t>Required Credentials &amp; Access Setup</a:t>
+              <a:rPr sz="2800" dirty="0"/>
+              <a:t>Automate Deployment via GitHub Actions</a:t>
             </a:r>
           </a:p>
         </p:txBody>
@@ -3556,8 +3662,8 @@
         </p:nvSpPr>
         <p:spPr>
           <a:xfrm>
-            <a:off x="914400" y="1645920"/>
-            <a:ext cx="10360152" cy="4572000"/>
+            <a:off x="246890" y="2788924"/>
+            <a:ext cx="11622025" cy="2226507"/>
           </a:xfrm>
           <a:prstGeom prst="rect">
             <a:avLst/>
@@ -3572,7 +3678,7 @@
           <a:p>
             <a:pPr>
               <a:spcAft>
-                <a:spcPts val="1400"/>
+                <a:spcPts val="1401"/>
               </a:spcAft>
               <a:defRPr sz="1600">
                 <a:solidFill>
@@ -3582,13 +3688,14 @@
               </a:defRPr>
             </a:pPr>
             <a:r>
-              <a:t>•  Ensure you have the server public IP address and the SSH login credential (private .pem key or root password).</a:t>
+              <a:rPr sz="1600" dirty="0"/>
+              <a:t>•  Set up repository secrets in GitHub settings: SSH_HOST, SSH_USER, and SSH_KEY.</a:t>
             </a:r>
           </a:p>
           <a:p>
             <a:pPr>
               <a:spcAft>
-                <a:spcPts val="1400"/>
+                <a:spcPts val="1401"/>
               </a:spcAft>
               <a:defRPr sz="1600">
                 <a:solidFill>
@@ -3598,13 +3705,27 @@
               </a:defRPr>
             </a:pPr>
             <a:r>
-              <a:t>•  Point your domain names (DNS A records) directly to your server's IP address.</a:t>
-            </a:r>
+              <a:rPr sz="1600" dirty="0"/>
+              <a:t>•  Create a workflow file in local project: .</a:t>
+            </a:r>
+            <a:r>
+              <a:rPr sz="1600" dirty="0" err="1"/>
+              <a:t>github</a:t>
+            </a:r>
+            <a:r>
+              <a:rPr sz="1600" dirty="0"/>
+              <a:t>/workflows/</a:t>
+            </a:r>
+            <a:r>
+              <a:rPr sz="1600" dirty="0" err="1"/>
+              <a:t>deploy.yml</a:t>
+            </a:r>
+            <a:endParaRPr sz="1600" dirty="0"/>
           </a:p>
           <a:p>
             <a:pPr>
               <a:spcAft>
-                <a:spcPts val="1400"/>
+                <a:spcPts val="1401"/>
               </a:spcAft>
               <a:defRPr sz="1600">
                 <a:solidFill>
@@ -3614,13 +3735,47 @@
               </a:defRPr>
             </a:pPr>
             <a:r>
-              <a:t>•  Verify you have access to pull the code from the Git repository on the server.</a:t>
+              <a:rPr sz="1600" dirty="0"/>
+              <a:t>•  Configure a push action workflow for the 'main' branch.</a:t>
             </a:r>
           </a:p>
           <a:p>
             <a:pPr>
               <a:spcAft>
-                <a:spcPts val="1400"/>
+                <a:spcPts val="1401"/>
+              </a:spcAft>
+              <a:defRPr sz="1400">
+                <a:solidFill>
+                  <a:srgbClr val="1E293B"/>
+                </a:solidFill>
+                <a:latin typeface="Courier New"/>
+              </a:defRPr>
+            </a:pPr>
+            <a:r>
+              <a:rPr sz="1401" dirty="0"/>
+              <a:t>•  Define deployment steps: SSH into server, git pull, </a:t>
+            </a:r>
+            <a:r>
+              <a:rPr sz="1401" dirty="0" err="1"/>
+              <a:t>npm</a:t>
+            </a:r>
+            <a:r>
+              <a:rPr sz="1401" dirty="0"/>
+              <a:t> install, </a:t>
+            </a:r>
+            <a:r>
+              <a:rPr sz="1401" dirty="0" err="1"/>
+              <a:t>npm</a:t>
+            </a:r>
+            <a:r>
+              <a:rPr sz="1401" dirty="0"/>
+              <a:t> run build, pm2 restart ecosystem.config.js.</a:t>
+            </a:r>
+          </a:p>
+          <a:p>
+            <a:pPr>
+              <a:spcAft>
+                <a:spcPts val="1401"/>
               </a:spcAft>
               <a:defRPr sz="1600">
                 <a:solidFill>
@@ -3630,7 +3785,16 @@
               </a:defRPr>
             </a:pPr>
             <a:r>
-              <a:t>•  Gather any frontend environment variables (like API endpoint URLs) to copy into your .env configuration file.</a:t>
+              <a:rPr sz="1600" dirty="0"/>
+              <a:t>•  Commit and push </a:t>
+            </a:r>
+            <a:r>
+              <a:rPr sz="1600" dirty="0" err="1"/>
+              <a:t>deploy.yml</a:t>
+            </a:r>
+            <a:r>
+              <a:rPr sz="1600" dirty="0"/>
+              <a:t> to automatically trigger and verify deployment on push.</a:t>
             </a:r>
           </a:p>
         </p:txBody>
@@ -3643,8 +3807,8 @@
 </p:sld>
 </file>
 
-<file path=ppt/slides/slide3.xml><?xml version="1.0" encoding="utf-8"?>
-<p:sld xmlns:a="http://schemas.openxmlformats.org/drawingml/2006/main" xmlns:p="http://schemas.openxmlformats.org/presentationml/2006/main" xmlns:r="http://schemas.openxmlformats.org/officeDocument/2006/relationships">
+<file path=ppt/slides/slide12.xml><?xml version="1.0" encoding="utf-8"?>
+<p:sld xmlns:a="http://schemas.openxmlformats.org/drawingml/2006/main" xmlns:r="http://schemas.openxmlformats.org/officeDocument/2006/relationships" xmlns:p="http://schemas.openxmlformats.org/presentationml/2006/main">
   <p:cSld>
     <p:bg>
       <p:bgPr>
@@ -3656,21 +3820,40 @@
     </p:bg>
     <p:spTree>
       <p:nvGrpSpPr>
-        <p:cNvPr id="1" name=""/>
+        <p:cNvPr id="1" name="">
+          <a:extLst>
+            <a:ext uri="{FF2B5EF4-FFF2-40B4-BE49-F238E27FC236}">
+              <a16:creationId xmlns:a16="http://schemas.microsoft.com/office/drawing/2014/main" id="{A2991FCA-51FE-B449-CB4A-76AA33BC9EB3}"/>
+            </a:ext>
+          </a:extLst>
+        </p:cNvPr>
         <p:cNvGrpSpPr/>
         <p:nvPr/>
       </p:nvGrpSpPr>
-      <p:grpSpPr/>
-      <p:sp>
-        <p:nvSpPr>
-          <p:cNvPr id="2" name="Rectangle 1"/>
+      <p:grpSpPr>
+        <a:xfrm>
+          <a:off x="0" y="0"/>
+          <a:ext cx="0" cy="0"/>
+          <a:chOff x="0" y="0"/>
+          <a:chExt cx="0" cy="0"/>
+        </a:xfrm>
+      </p:grpSpPr>
+      <p:sp>
+        <p:nvSpPr>
+          <p:cNvPr id="2" name="Rectangle 1">
+            <a:extLst>
+              <a:ext uri="{FF2B5EF4-FFF2-40B4-BE49-F238E27FC236}">
+                <a16:creationId xmlns:a16="http://schemas.microsoft.com/office/drawing/2014/main" id="{86280B1C-A91F-4933-8FF7-4AE86D3F4FC7}"/>
+              </a:ext>
+            </a:extLst>
+          </p:cNvPr>
           <p:cNvSpPr/>
           <p:nvPr/>
         </p:nvSpPr>
         <p:spPr>
           <a:xfrm>
-            <a:off x="0" y="0"/>
-            <a:ext cx="12191695" cy="137160"/>
+            <a:off x="2" y="1143002"/>
+            <a:ext cx="12191694" cy="137161"/>
           </a:xfrm>
           <a:prstGeom prst="rect">
             <a:avLst/>
@@ -3703,19 +3886,26 @@
           <a:lstStyle/>
           <a:p>
             <a:pPr algn="ctr"/>
-          </a:p>
-        </p:txBody>
-      </p:sp>
-      <p:sp>
-        <p:nvSpPr>
-          <p:cNvPr id="3" name="TextBox 2"/>
+            <a:endParaRPr sz="1801"/>
+          </a:p>
+        </p:txBody>
+      </p:sp>
+      <p:sp>
+        <p:nvSpPr>
+          <p:cNvPr id="3" name="TextBox 2">
+            <a:extLst>
+              <a:ext uri="{FF2B5EF4-FFF2-40B4-BE49-F238E27FC236}">
+                <a16:creationId xmlns:a16="http://schemas.microsoft.com/office/drawing/2014/main" id="{D4E289EE-7733-4863-2F40-0370A85679E3}"/>
+              </a:ext>
+            </a:extLst>
+          </p:cNvPr>
           <p:cNvSpPr txBox="1"/>
           <p:nvPr/>
         </p:nvSpPr>
         <p:spPr>
           <a:xfrm>
-            <a:off x="914400" y="457200"/>
-            <a:ext cx="10360152" cy="457200"/>
+            <a:off x="310899" y="1319788"/>
+            <a:ext cx="10963657" cy="307905"/>
           </a:xfrm>
           <a:prstGeom prst="rect">
             <a:avLst/>
@@ -3729,7 +3919,7 @@
           <a:lstStyle/>
           <a:p>
             <a:pPr>
-              <a:defRPr b="1" sz="1400">
+              <a:defRPr sz="1400" b="1">
                 <a:solidFill>
                   <a:srgbClr val="009688"/>
                 </a:solidFill>
@@ -3737,21 +3927,28 @@
               </a:defRPr>
             </a:pPr>
             <a:r>
-              <a:t>STEP 01</a:t>
-            </a:r>
-          </a:p>
-        </p:txBody>
-      </p:sp>
-      <p:sp>
-        <p:nvSpPr>
-          <p:cNvPr id="4" name="TextBox 3"/>
+              <a:rPr sz="1401" dirty="0"/>
+              <a:t>STEP 08</a:t>
+            </a:r>
+          </a:p>
+        </p:txBody>
+      </p:sp>
+      <p:sp>
+        <p:nvSpPr>
+          <p:cNvPr id="4" name="TextBox 3">
+            <a:extLst>
+              <a:ext uri="{FF2B5EF4-FFF2-40B4-BE49-F238E27FC236}">
+                <a16:creationId xmlns:a16="http://schemas.microsoft.com/office/drawing/2014/main" id="{7B13F10B-5394-2906-DCBD-513F811A3A18}"/>
+              </a:ext>
+            </a:extLst>
+          </p:cNvPr>
           <p:cNvSpPr txBox="1"/>
           <p:nvPr/>
         </p:nvSpPr>
         <p:spPr>
           <a:xfrm>
-            <a:off x="914400" y="822960"/>
-            <a:ext cx="10360152" cy="731520"/>
+            <a:off x="310899" y="1636778"/>
+            <a:ext cx="10963657" cy="523220"/>
           </a:xfrm>
           <a:prstGeom prst="rect">
             <a:avLst/>
@@ -3765,7 +3962,7 @@
           <a:lstStyle/>
           <a:p>
             <a:pPr>
-              <a:defRPr b="1" sz="2800">
+              <a:defRPr sz="2800" b="1">
                 <a:solidFill>
                   <a:srgbClr val="142030"/>
                 </a:solidFill>
@@ -3773,21 +3970,28 @@
               </a:defRPr>
             </a:pPr>
             <a:r>
-              <a:t>Establish SSH Connection &amp; Update Server Packages</a:t>
-            </a:r>
-          </a:p>
-        </p:txBody>
-      </p:sp>
-      <p:sp>
-        <p:nvSpPr>
-          <p:cNvPr id="5" name="TextBox 4"/>
+              <a:rPr sz="2800" dirty="0"/>
+              <a:t>Automate Deployment via GitHub Actions</a:t>
+            </a:r>
+          </a:p>
+        </p:txBody>
+      </p:sp>
+      <p:sp>
+        <p:nvSpPr>
+          <p:cNvPr id="5" name="TextBox 4">
+            <a:extLst>
+              <a:ext uri="{FF2B5EF4-FFF2-40B4-BE49-F238E27FC236}">
+                <a16:creationId xmlns:a16="http://schemas.microsoft.com/office/drawing/2014/main" id="{FBACA4B2-DB0C-AA94-6588-5DF6EB15FF20}"/>
+              </a:ext>
+            </a:extLst>
+          </p:cNvPr>
           <p:cNvSpPr txBox="1"/>
           <p:nvPr/>
         </p:nvSpPr>
         <p:spPr>
           <a:xfrm>
-            <a:off x="914400" y="1645920"/>
-            <a:ext cx="10360152" cy="4572000"/>
+            <a:off x="310898" y="2108125"/>
+            <a:ext cx="11686032" cy="7032694"/>
           </a:xfrm>
           <a:prstGeom prst="rect">
             <a:avLst/>
@@ -3800,88 +4004,292 @@
           </a:bodyPr>
           <a:lstStyle/>
           <a:p>
-            <a:pPr>
-              <a:spcAft>
-                <a:spcPts val="1400"/>
-              </a:spcAft>
-              <a:defRPr sz="1600">
-                <a:solidFill>
-                  <a:srgbClr val="142030"/>
-                </a:solidFill>
-                <a:latin typeface="Arial"/>
-              </a:defRPr>
-            </a:pPr>
-            <a:r>
-              <a:t>•  Open your local terminal (macOS/Linux) or PowerShell (Windows).</a:t>
-            </a:r>
-          </a:p>
-          <a:p>
-            <a:pPr>
-              <a:spcAft>
-                <a:spcPts val="1400"/>
-              </a:spcAft>
-              <a:defRPr sz="1600">
-                <a:solidFill>
-                  <a:srgbClr val="142030"/>
-                </a:solidFill>
-                <a:latin typeface="Arial"/>
-              </a:defRPr>
-            </a:pPr>
-            <a:r>
-              <a:t>•  Connect to the server using SSH:</a:t>
-            </a:r>
-          </a:p>
-          <a:p>
-            <a:pPr>
-              <a:spcAft>
-                <a:spcPts val="1400"/>
-              </a:spcAft>
-              <a:defRPr sz="1400">
-                <a:solidFill>
-                  <a:srgbClr val="1E293B"/>
-                </a:solidFill>
-                <a:latin typeface="Courier New"/>
-              </a:defRPr>
-            </a:pPr>
-            <a:r>
-              <a:t>•    $ ssh -i /path/to/key.pem ubuntu@your_server_ip</a:t>
-            </a:r>
-          </a:p>
-          <a:p>
-            <a:pPr>
-              <a:spcAft>
-                <a:spcPts val="1400"/>
-              </a:spcAft>
-              <a:defRPr sz="1600">
-                <a:solidFill>
-                  <a:srgbClr val="142030"/>
-                </a:solidFill>
-                <a:latin typeface="Arial"/>
-              </a:defRPr>
-            </a:pPr>
-            <a:r>
-              <a:t>•  Update system libraries to ensure security patches are applied:</a:t>
-            </a:r>
-          </a:p>
-          <a:p>
-            <a:pPr>
-              <a:spcAft>
-                <a:spcPts val="1400"/>
-              </a:spcAft>
-              <a:defRPr sz="1400">
-                <a:solidFill>
-                  <a:srgbClr val="1E293B"/>
-                </a:solidFill>
-                <a:latin typeface="Courier New"/>
-              </a:defRPr>
-            </a:pPr>
-            <a:r>
-              <a:t>•    $ sudo apt update &amp;&amp; sudo apt upgrade -y</a:t>
-            </a:r>
+            <a:r>
+              <a:rPr lang="en-US" sz="1100" dirty="0"/>
+              <a:t>name: Deploy Next.js Frontend</a:t>
+            </a:r>
+          </a:p>
+          <a:p>
+            <a:endParaRPr lang="en-US" sz="1100" dirty="0"/>
+          </a:p>
+          <a:p>
+            <a:r>
+              <a:rPr lang="en-US" sz="1100" dirty="0"/>
+              <a:t>on:</a:t>
+            </a:r>
+          </a:p>
+          <a:p>
+            <a:r>
+              <a:rPr lang="en-US" sz="1100" dirty="0"/>
+              <a:t>  push:</a:t>
+            </a:r>
+          </a:p>
+          <a:p>
+            <a:r>
+              <a:rPr lang="en-US" sz="1100" dirty="0"/>
+              <a:t>    branches:</a:t>
+            </a:r>
+          </a:p>
+          <a:p>
+            <a:r>
+              <a:rPr lang="en-US" sz="1100" dirty="0"/>
+              <a:t>      - main  # Trigger workflow when pushing to main branch</a:t>
+            </a:r>
+          </a:p>
+          <a:p>
+            <a:endParaRPr lang="en-US" sz="1100" dirty="0"/>
+          </a:p>
+          <a:p>
+            <a:r>
+              <a:rPr lang="en-US" sz="1100" dirty="0"/>
+              <a:t>jobs:</a:t>
+            </a:r>
+          </a:p>
+          <a:p>
+            <a:r>
+              <a:rPr lang="en-US" sz="1100" dirty="0"/>
+              <a:t>  deploy:</a:t>
+            </a:r>
+          </a:p>
+          <a:p>
+            <a:r>
+              <a:rPr lang="en-US" sz="1100" dirty="0"/>
+              <a:t>    runs-on: ubuntu-latest</a:t>
+            </a:r>
+          </a:p>
+          <a:p>
+            <a:endParaRPr lang="en-US" sz="1100" dirty="0"/>
+          </a:p>
+          <a:p>
+            <a:r>
+              <a:rPr lang="en-US" sz="1100" dirty="0"/>
+              <a:t>    steps:</a:t>
+            </a:r>
+          </a:p>
+          <a:p>
+            <a:r>
+              <a:rPr lang="en-US" sz="1100" dirty="0"/>
+              <a:t>      - name: Checkout Code</a:t>
+            </a:r>
+          </a:p>
+          <a:p>
+            <a:r>
+              <a:rPr lang="en-US" sz="1100" dirty="0"/>
+              <a:t>        uses: actions/checkout@v4</a:t>
+            </a:r>
+            <a:br>
+              <a:rPr lang="en-US" sz="1100" dirty="0"/>
+            </a:br>
+            <a:endParaRPr lang="en-US" sz="1100" dirty="0"/>
+          </a:p>
+          <a:p>
+            <a:r>
+              <a:rPr lang="en-US" sz="1100" dirty="0"/>
+              <a:t>      - name: Deploy to Ubuntu Server via SSH</a:t>
+            </a:r>
+          </a:p>
+          <a:p>
+            <a:r>
+              <a:rPr lang="en-US" sz="1100" dirty="0"/>
+              <a:t>        uses: </a:t>
+            </a:r>
+            <a:r>
+              <a:rPr lang="en-US" sz="1100" dirty="0" err="1"/>
+              <a:t>appleboy</a:t>
+            </a:r>
+            <a:r>
+              <a:rPr lang="en-US" sz="1100" dirty="0"/>
+              <a:t>/</a:t>
+            </a:r>
+            <a:r>
+              <a:rPr lang="en-US" sz="1100" dirty="0" err="1"/>
+              <a:t>ssh-action@master</a:t>
+            </a:r>
+            <a:endParaRPr lang="en-US" sz="1100" dirty="0"/>
+          </a:p>
+          <a:p>
+            <a:r>
+              <a:rPr lang="en-US" sz="1100" dirty="0"/>
+              <a:t>        with:</a:t>
+            </a:r>
+          </a:p>
+          <a:p>
+            <a:r>
+              <a:rPr lang="en-US" sz="1100" dirty="0"/>
+              <a:t>          host: ${{ </a:t>
+            </a:r>
+            <a:r>
+              <a:rPr lang="en-US" sz="1100" dirty="0" err="1"/>
+              <a:t>secrets.SSH_HOST</a:t>
+            </a:r>
+            <a:r>
+              <a:rPr lang="en-US" sz="1100" dirty="0"/>
+              <a:t> }}</a:t>
+            </a:r>
+          </a:p>
+          <a:p>
+            <a:r>
+              <a:rPr lang="en-US" sz="1100" dirty="0"/>
+              <a:t>          username: ${{ </a:t>
+            </a:r>
+            <a:r>
+              <a:rPr lang="en-US" sz="1100" dirty="0" err="1"/>
+              <a:t>secrets.SSH_USER</a:t>
+            </a:r>
+            <a:r>
+              <a:rPr lang="en-US" sz="1100" dirty="0"/>
+              <a:t> }}</a:t>
+            </a:r>
+          </a:p>
+          <a:p>
+            <a:r>
+              <a:rPr lang="en-US" sz="1100" dirty="0"/>
+              <a:t>          key: ${{ </a:t>
+            </a:r>
+            <a:r>
+              <a:rPr lang="en-US" sz="1100" dirty="0" err="1"/>
+              <a:t>secrets.SSH_KEY</a:t>
+            </a:r>
+            <a:r>
+              <a:rPr lang="en-US" sz="1100" dirty="0"/>
+              <a:t> }}</a:t>
+            </a:r>
+          </a:p>
+          <a:p>
+            <a:r>
+              <a:rPr lang="en-US" sz="1100" dirty="0"/>
+              <a:t>          script: |</a:t>
+            </a:r>
+          </a:p>
+          <a:p>
+            <a:r>
+              <a:rPr lang="en-US" sz="1100" dirty="0"/>
+              <a:t>            # Navigate to project directory</a:t>
+            </a:r>
+          </a:p>
+          <a:p>
+            <a:r>
+              <a:rPr lang="en-US" sz="1100" dirty="0"/>
+              <a:t>            cd /home/ubuntu/frontend/</a:t>
+            </a:r>
+            <a:r>
+              <a:rPr lang="en-US" sz="1100" dirty="0" err="1"/>
+              <a:t>projectname</a:t>
+            </a:r>
+            <a:endParaRPr lang="en-US" sz="1100" dirty="0"/>
+          </a:p>
+          <a:p>
+            <a:endParaRPr lang="en-US" sz="1100" dirty="0"/>
+          </a:p>
+          <a:p>
+            <a:r>
+              <a:rPr lang="en-US" sz="1100" dirty="0"/>
+              <a:t>            # Pull latest changes from the repository</a:t>
+            </a:r>
+          </a:p>
+          <a:p>
+            <a:r>
+              <a:rPr lang="en-US" sz="1100" dirty="0"/>
+              <a:t>            git pull origin main</a:t>
+            </a:r>
+            <a:br>
+              <a:rPr lang="en-US" sz="1100" dirty="0"/>
+            </a:br>
+            <a:endParaRPr lang="en-US" sz="1100" dirty="0"/>
+          </a:p>
+          <a:p>
+            <a:r>
+              <a:rPr lang="en-US" sz="1100" dirty="0"/>
+              <a:t>            # Install dependencies</a:t>
+            </a:r>
+          </a:p>
+          <a:p>
+            <a:r>
+              <a:rPr lang="en-US" sz="1100" dirty="0"/>
+              <a:t>            </a:t>
+            </a:r>
+            <a:r>
+              <a:rPr lang="en-US" sz="1100" dirty="0" err="1"/>
+              <a:t>npm</a:t>
+            </a:r>
+            <a:r>
+              <a:rPr lang="en-US" sz="1100" dirty="0"/>
+              <a:t> install</a:t>
+            </a:r>
+          </a:p>
+          <a:p>
+            <a:br>
+              <a:rPr lang="en-US" sz="1100" dirty="0"/>
+            </a:br>
+            <a:endParaRPr lang="en-US" sz="1100" dirty="0"/>
+          </a:p>
+          <a:p>
+            <a:r>
+              <a:rPr lang="en-US" sz="1100" dirty="0"/>
+              <a:t>            # Build production Next.js files</a:t>
+            </a:r>
+          </a:p>
+          <a:p>
+            <a:r>
+              <a:rPr lang="en-US" sz="1100" dirty="0"/>
+              <a:t>            </a:t>
+            </a:r>
+            <a:r>
+              <a:rPr lang="en-US" sz="1100" dirty="0" err="1"/>
+              <a:t>npm</a:t>
+            </a:r>
+            <a:r>
+              <a:rPr lang="en-US" sz="1100" dirty="0"/>
+              <a:t> run build</a:t>
+            </a:r>
+          </a:p>
+          <a:p>
+            <a:br>
+              <a:rPr lang="en-US" sz="1100" dirty="0"/>
+            </a:br>
+            <a:endParaRPr lang="en-US" sz="1100" dirty="0"/>
+          </a:p>
+          <a:p>
+            <a:r>
+              <a:rPr lang="en-US" sz="1100" dirty="0"/>
+              <a:t>            # Restart the application with PM2 using config</a:t>
+            </a:r>
+          </a:p>
+          <a:p>
+            <a:r>
+              <a:rPr lang="en-US" sz="1100" dirty="0"/>
+              <a:t>            pm2 restart ecosystem.config.js</a:t>
+            </a:r>
+          </a:p>
+          <a:p>
+            <a:r>
+              <a:rPr lang="en-US" sz="1100" dirty="0"/>
+              <a:t>```</a:t>
+            </a:r>
+          </a:p>
+          <a:p>
+            <a:r>
+              <a:rPr lang="en-US" sz="1100" i="1" dirty="0"/>
+              <a:t>*(Note: Replace `</a:t>
+            </a:r>
+            <a:r>
+              <a:rPr lang="en-US" sz="1100" i="1" dirty="0" err="1"/>
+              <a:t>projectname</a:t>
+            </a:r>
+            <a:r>
+              <a:rPr lang="en-US" sz="1100" i="1" dirty="0"/>
+              <a:t>` with your actual project directory name).*</a:t>
+            </a:r>
+            <a:endParaRPr lang="en-US" sz="1100" dirty="0"/>
           </a:p>
         </p:txBody>
       </p:sp>
     </p:spTree>
+    <p:extLst>
+      <p:ext uri="{BB962C8B-B14F-4D97-AF65-F5344CB8AC3E}">
+        <p14:creationId xmlns:p14="http://schemas.microsoft.com/office/powerpoint/2010/main" val="41511729"/>
+      </p:ext>
+    </p:extLst>
   </p:cSld>
   <p:clrMapOvr>
     <a:masterClrMapping/>
@@ -3889,8 +4297,8 @@
 </p:sld>
 </file>
 
-<file path=ppt/slides/slide4.xml><?xml version="1.0" encoding="utf-8"?>
-<p:sld xmlns:a="http://schemas.openxmlformats.org/drawingml/2006/main" xmlns:p="http://schemas.openxmlformats.org/presentationml/2006/main" xmlns:r="http://schemas.openxmlformats.org/officeDocument/2006/relationships">
+<file path=ppt/slides/slide13.xml><?xml version="1.0" encoding="utf-8"?>
+<p:sld xmlns:a="http://schemas.openxmlformats.org/drawingml/2006/main" xmlns:r="http://schemas.openxmlformats.org/officeDocument/2006/relationships" xmlns:p="http://schemas.openxmlformats.org/presentationml/2006/main">
   <p:cSld>
     <p:bg>
       <p:bgPr>
@@ -3902,21 +4310,40 @@
     </p:bg>
     <p:spTree>
       <p:nvGrpSpPr>
-        <p:cNvPr id="1" name=""/>
+        <p:cNvPr id="1" name="">
+          <a:extLst>
+            <a:ext uri="{FF2B5EF4-FFF2-40B4-BE49-F238E27FC236}">
+              <a16:creationId xmlns:a16="http://schemas.microsoft.com/office/drawing/2014/main" id="{EA82F2A6-A295-5A62-394D-F8F30E39B8DE}"/>
+            </a:ext>
+          </a:extLst>
+        </p:cNvPr>
         <p:cNvGrpSpPr/>
         <p:nvPr/>
       </p:nvGrpSpPr>
-      <p:grpSpPr/>
-      <p:sp>
-        <p:nvSpPr>
-          <p:cNvPr id="2" name="Rectangle 1"/>
+      <p:grpSpPr>
+        <a:xfrm>
+          <a:off x="0" y="0"/>
+          <a:ext cx="0" cy="0"/>
+          <a:chOff x="0" y="0"/>
+          <a:chExt cx="0" cy="0"/>
+        </a:xfrm>
+      </p:grpSpPr>
+      <p:sp>
+        <p:nvSpPr>
+          <p:cNvPr id="2" name="Rectangle 1">
+            <a:extLst>
+              <a:ext uri="{FF2B5EF4-FFF2-40B4-BE49-F238E27FC236}">
+                <a16:creationId xmlns:a16="http://schemas.microsoft.com/office/drawing/2014/main" id="{87C02AB7-54D0-4470-7106-0A7A0EAF48A4}"/>
+              </a:ext>
+            </a:extLst>
+          </p:cNvPr>
           <p:cNvSpPr/>
           <p:nvPr/>
         </p:nvSpPr>
         <p:spPr>
           <a:xfrm>
-            <a:off x="0" y="0"/>
-            <a:ext cx="12191695" cy="137160"/>
+            <a:off x="2" y="1143002"/>
+            <a:ext cx="12191694" cy="137161"/>
           </a:xfrm>
           <a:prstGeom prst="rect">
             <a:avLst/>
@@ -3949,19 +4376,26 @@
           <a:lstStyle/>
           <a:p>
             <a:pPr algn="ctr"/>
-          </a:p>
-        </p:txBody>
-      </p:sp>
-      <p:sp>
-        <p:nvSpPr>
-          <p:cNvPr id="3" name="TextBox 2"/>
+            <a:endParaRPr sz="1801"/>
+          </a:p>
+        </p:txBody>
+      </p:sp>
+      <p:sp>
+        <p:nvSpPr>
+          <p:cNvPr id="5" name="TextBox 4">
+            <a:extLst>
+              <a:ext uri="{FF2B5EF4-FFF2-40B4-BE49-F238E27FC236}">
+                <a16:creationId xmlns:a16="http://schemas.microsoft.com/office/drawing/2014/main" id="{F7646DBF-40D7-CE54-3438-EC112D66DEB5}"/>
+              </a:ext>
+            </a:extLst>
+          </p:cNvPr>
           <p:cNvSpPr txBox="1"/>
           <p:nvPr/>
         </p:nvSpPr>
         <p:spPr>
           <a:xfrm>
-            <a:off x="914400" y="457200"/>
-            <a:ext cx="10360152" cy="457200"/>
+            <a:off x="310898" y="2108125"/>
+            <a:ext cx="11686032" cy="1585049"/>
           </a:xfrm>
           <a:prstGeom prst="rect">
             <a:avLst/>
@@ -3974,192 +4408,66 @@
           </a:bodyPr>
           <a:lstStyle/>
           <a:p>
-            <a:pPr>
-              <a:defRPr b="1" sz="1400">
-                <a:solidFill>
-                  <a:srgbClr val="009688"/>
-                </a:solidFill>
-                <a:latin typeface="Arial"/>
-              </a:defRPr>
-            </a:pPr>
-            <a:r>
-              <a:t>STEP 02</a:t>
-            </a:r>
-          </a:p>
-        </p:txBody>
-      </p:sp>
-      <p:sp>
-        <p:nvSpPr>
-          <p:cNvPr id="4" name="TextBox 3"/>
-          <p:cNvSpPr txBox="1"/>
-          <p:nvPr/>
-        </p:nvSpPr>
-        <p:spPr>
-          <a:xfrm>
-            <a:off x="914400" y="822960"/>
-            <a:ext cx="10360152" cy="731520"/>
-          </a:xfrm>
-          <a:prstGeom prst="rect">
-            <a:avLst/>
-          </a:prstGeom>
-          <a:noFill/>
-        </p:spPr>
-        <p:txBody>
-          <a:bodyPr wrap="square">
-            <a:spAutoFit/>
-          </a:bodyPr>
-          <a:lstStyle/>
-          <a:p>
-            <a:pPr>
-              <a:defRPr b="1" sz="2800">
-                <a:solidFill>
-                  <a:srgbClr val="142030"/>
-                </a:solidFill>
-                <a:latin typeface="Arial"/>
-              </a:defRPr>
-            </a:pPr>
-            <a:r>
-              <a:t>Install Node.js Version Manager (NVM) &amp; Node.js</a:t>
-            </a:r>
-          </a:p>
-        </p:txBody>
-      </p:sp>
-      <p:sp>
-        <p:nvSpPr>
-          <p:cNvPr id="5" name="TextBox 4"/>
-          <p:cNvSpPr txBox="1"/>
-          <p:nvPr/>
-        </p:nvSpPr>
-        <p:spPr>
-          <a:xfrm>
-            <a:off x="914400" y="1645920"/>
-            <a:ext cx="10360152" cy="4572000"/>
-          </a:xfrm>
-          <a:prstGeom prst="rect">
-            <a:avLst/>
-          </a:prstGeom>
-          <a:noFill/>
-        </p:spPr>
-        <p:txBody>
-          <a:bodyPr wrap="square">
-            <a:spAutoFit/>
-          </a:bodyPr>
-          <a:lstStyle/>
-          <a:p>
-            <a:pPr>
-              <a:spcAft>
-                <a:spcPts val="1400"/>
-              </a:spcAft>
-              <a:defRPr sz="1600">
-                <a:solidFill>
-                  <a:srgbClr val="142030"/>
-                </a:solidFill>
-                <a:latin typeface="Arial"/>
-              </a:defRPr>
-            </a:pPr>
-            <a:r>
-              <a:t>•  Install NVM on the server to isolate and manage Node.js runtimes:</a:t>
-            </a:r>
-          </a:p>
-          <a:p>
-            <a:pPr>
-              <a:spcAft>
-                <a:spcPts val="1400"/>
-              </a:spcAft>
-              <a:defRPr sz="1400">
-                <a:solidFill>
-                  <a:srgbClr val="1E293B"/>
-                </a:solidFill>
-                <a:latin typeface="Courier New"/>
-              </a:defRPr>
-            </a:pPr>
-            <a:r>
-              <a:t>•    $ curl -o- https://raw.githubusercontent.com/nvm-sh/nvm/v0.39.7/install.sh | bash</a:t>
-            </a:r>
-          </a:p>
-          <a:p>
-            <a:pPr>
-              <a:spcAft>
-                <a:spcPts val="1400"/>
-              </a:spcAft>
-              <a:defRPr sz="1600">
-                <a:solidFill>
-                  <a:srgbClr val="142030"/>
-                </a:solidFill>
-                <a:latin typeface="Arial"/>
-              </a:defRPr>
-            </a:pPr>
-            <a:r>
-              <a:t>•  Reload environment settings to enable the nvm command:</a:t>
-            </a:r>
-          </a:p>
-          <a:p>
-            <a:pPr>
-              <a:spcAft>
-                <a:spcPts val="1400"/>
-              </a:spcAft>
-              <a:defRPr sz="1400">
-                <a:solidFill>
-                  <a:srgbClr val="1E293B"/>
-                </a:solidFill>
-                <a:latin typeface="Courier New"/>
-              </a:defRPr>
-            </a:pPr>
-            <a:r>
-              <a:t>•    $ source ~/.bashrc   (or export NVM variables directly in terminal)</a:t>
-            </a:r>
-          </a:p>
-          <a:p>
-            <a:pPr>
-              <a:spcAft>
-                <a:spcPts val="1400"/>
-              </a:spcAft>
-              <a:defRPr sz="1600">
-                <a:solidFill>
-                  <a:srgbClr val="142030"/>
-                </a:solidFill>
-                <a:latin typeface="Arial"/>
-              </a:defRPr>
-            </a:pPr>
-            <a:r>
-              <a:t>•  Install Node.js version 20 (LTS):</a:t>
-            </a:r>
-          </a:p>
-          <a:p>
-            <a:pPr>
-              <a:spcAft>
-                <a:spcPts val="1400"/>
-              </a:spcAft>
-              <a:defRPr sz="1400">
-                <a:solidFill>
-                  <a:srgbClr val="1E293B"/>
-                </a:solidFill>
-                <a:latin typeface="Courier New"/>
-              </a:defRPr>
-            </a:pPr>
-            <a:r>
-              <a:t>•    $ nvm install 20</a:t>
-            </a:r>
-          </a:p>
-          <a:p>
-            <a:pPr>
-              <a:spcAft>
-                <a:spcPts val="1400"/>
-              </a:spcAft>
-              <a:defRPr sz="1400">
-                <a:solidFill>
-                  <a:srgbClr val="1E293B"/>
-                </a:solidFill>
-                <a:latin typeface="Courier New"/>
-              </a:defRPr>
-            </a:pPr>
-            <a:r>
-              <a:t>•  Confirm node and npm installations using 'node -v' and 'npm -v'.</a:t>
+            <a:endParaRPr lang="en-US" sz="1100" dirty="0"/>
+          </a:p>
+          <a:p>
+            <a:r>
+              <a:rPr lang="en-US" sz="1600" b="1" dirty="0"/>
+              <a:t>### 9.3 Commit and Push</a:t>
+            </a:r>
+            <a:endParaRPr lang="en-US" sz="1600" dirty="0"/>
+          </a:p>
+          <a:p>
+            <a:r>
+              <a:rPr lang="en-US" sz="1400" dirty="0"/>
+              <a:t>Commit the new workflow file and push it:</a:t>
+            </a:r>
+          </a:p>
+          <a:p>
+            <a:r>
+              <a:rPr lang="en-US" sz="1400" dirty="0"/>
+              <a:t>```bash</a:t>
+            </a:r>
+          </a:p>
+          <a:p>
+            <a:r>
+              <a:rPr lang="en-US" sz="1400" dirty="0"/>
+              <a:t>git add .</a:t>
+            </a:r>
+            <a:r>
+              <a:rPr lang="en-US" sz="1400" dirty="0" err="1"/>
+              <a:t>github</a:t>
+            </a:r>
+            <a:r>
+              <a:rPr lang="en-US" sz="1400" dirty="0"/>
+              <a:t>/workflows/</a:t>
+            </a:r>
+            <a:r>
+              <a:rPr lang="en-US" sz="1400" dirty="0" err="1"/>
+              <a:t>deploy.yml</a:t>
+            </a:r>
+            <a:endParaRPr lang="en-US" sz="1400" dirty="0"/>
+          </a:p>
+          <a:p>
+            <a:r>
+              <a:rPr lang="en-US" sz="1400" dirty="0"/>
+              <a:t>git commit -m "Add GitHub Actions CD deployment workflow"</a:t>
+            </a:r>
+          </a:p>
+          <a:p>
+            <a:r>
+              <a:rPr lang="en-US" sz="1400" dirty="0"/>
+              <a:t>git push origin main</a:t>
             </a:r>
           </a:p>
         </p:txBody>
       </p:sp>
     </p:spTree>
+    <p:extLst>
+      <p:ext uri="{BB962C8B-B14F-4D97-AF65-F5344CB8AC3E}">
+        <p14:creationId xmlns:p14="http://schemas.microsoft.com/office/powerpoint/2010/main" val="1367217900"/>
+      </p:ext>
+    </p:extLst>
   </p:cSld>
   <p:clrMapOvr>
     <a:masterClrMapping/>
@@ -4167,8 +4475,8 @@
 </p:sld>
 </file>
 
-<file path=ppt/slides/slide5.xml><?xml version="1.0" encoding="utf-8"?>
-<p:sld xmlns:a="http://schemas.openxmlformats.org/drawingml/2006/main" xmlns:p="http://schemas.openxmlformats.org/presentationml/2006/main" xmlns:r="http://schemas.openxmlformats.org/officeDocument/2006/relationships">
+<file path=ppt/slides/slide2.xml><?xml version="1.0" encoding="utf-8"?>
+<p:sld xmlns:a="http://schemas.openxmlformats.org/drawingml/2006/main" xmlns:r="http://schemas.openxmlformats.org/officeDocument/2006/relationships" xmlns:p="http://schemas.openxmlformats.org/presentationml/2006/main">
   <p:cSld>
     <p:bg>
       <p:bgPr>
@@ -4184,7 +4492,14 @@
         <p:cNvGrpSpPr/>
         <p:nvPr/>
       </p:nvGrpSpPr>
-      <p:grpSpPr/>
+      <p:grpSpPr>
+        <a:xfrm>
+          <a:off x="0" y="0"/>
+          <a:ext cx="0" cy="0"/>
+          <a:chOff x="0" y="0"/>
+          <a:chExt cx="0" cy="0"/>
+        </a:xfrm>
+      </p:grpSpPr>
       <p:sp>
         <p:nvSpPr>
           <p:cNvPr id="2" name="Rectangle 1"/>
@@ -4193,8 +4508,8 @@
         </p:nvSpPr>
         <p:spPr>
           <a:xfrm>
-            <a:off x="0" y="0"/>
-            <a:ext cx="12191695" cy="137160"/>
+            <a:off x="2" y="1143002"/>
+            <a:ext cx="12191694" cy="137161"/>
           </a:xfrm>
           <a:prstGeom prst="rect">
             <a:avLst/>
@@ -4227,6 +4542,7 @@
           <a:lstStyle/>
           <a:p>
             <a:pPr algn="ctr"/>
+            <a:endParaRPr sz="1801"/>
           </a:p>
         </p:txBody>
       </p:sp>
@@ -4238,8 +4554,8 @@
         </p:nvSpPr>
         <p:spPr>
           <a:xfrm>
-            <a:off x="914400" y="457200"/>
-            <a:ext cx="10360152" cy="457200"/>
+            <a:off x="914402" y="1600204"/>
+            <a:ext cx="10360153" cy="307905"/>
           </a:xfrm>
           <a:prstGeom prst="rect">
             <a:avLst/>
@@ -4253,7 +4569,7 @@
           <a:lstStyle/>
           <a:p>
             <a:pPr>
-              <a:defRPr b="1" sz="1400">
+              <a:defRPr sz="1400" b="1">
                 <a:solidFill>
                   <a:srgbClr val="009688"/>
                 </a:solidFill>
@@ -4261,7 +4577,8 @@
               </a:defRPr>
             </a:pPr>
             <a:r>
-              <a:t>STEP 03</a:t>
+              <a:rPr sz="1401"/>
+              <a:t>PREREQUISITES</a:t>
             </a:r>
           </a:p>
         </p:txBody>
@@ -4274,8 +4591,8 @@
         </p:nvSpPr>
         <p:spPr>
           <a:xfrm>
-            <a:off x="914400" y="822960"/>
-            <a:ext cx="10360152" cy="731520"/>
+            <a:off x="914402" y="1965962"/>
+            <a:ext cx="10360153" cy="523220"/>
           </a:xfrm>
           <a:prstGeom prst="rect">
             <a:avLst/>
@@ -4289,7 +4606,7 @@
           <a:lstStyle/>
           <a:p>
             <a:pPr>
-              <a:defRPr b="1" sz="2800">
+              <a:defRPr sz="2800" b="1">
                 <a:solidFill>
                   <a:srgbClr val="142030"/>
                 </a:solidFill>
@@ -4297,7 +4614,8 @@
               </a:defRPr>
             </a:pPr>
             <a:r>
-              <a:t>Create Directory, Clone Repo, &amp; Setup Env Variables</a:t>
+              <a:rPr sz="2800"/>
+              <a:t>Required Credentials &amp; Access Setup</a:t>
             </a:r>
           </a:p>
         </p:txBody>
@@ -4310,8 +4628,8 @@
         </p:nvSpPr>
         <p:spPr>
           <a:xfrm>
-            <a:off x="914400" y="1645920"/>
-            <a:ext cx="10360152" cy="4572000"/>
+            <a:off x="914402" y="2788921"/>
+            <a:ext cx="10360153" cy="1862048"/>
           </a:xfrm>
           <a:prstGeom prst="rect">
             <a:avLst/>
@@ -4326,7 +4644,7 @@
           <a:p>
             <a:pPr>
               <a:spcAft>
-                <a:spcPts val="1400"/>
+                <a:spcPts val="1401"/>
               </a:spcAft>
               <a:defRPr sz="1600">
                 <a:solidFill>
@@ -4336,29 +4654,14 @@
               </a:defRPr>
             </a:pPr>
             <a:r>
-              <a:t>•  Create the deployment folder and adjust ownership rules to avoid permission errors:</a:t>
+              <a:rPr sz="1600"/>
+              <a:t>•  Ensure you have the server public IP address and the SSH login credential (private .pem key or root password).</a:t>
             </a:r>
           </a:p>
           <a:p>
             <a:pPr>
               <a:spcAft>
-                <a:spcPts val="1400"/>
-              </a:spcAft>
-              <a:defRPr sz="1400">
-                <a:solidFill>
-                  <a:srgbClr val="1E293B"/>
-                </a:solidFill>
-                <a:latin typeface="Courier New"/>
-              </a:defRPr>
-            </a:pPr>
-            <a:r>
-              <a:t>•    $ sudo mkdir -p /home/ubuntu/frontend &amp;&amp; sudo chown -R $USER:$USER /home/ubuntu/frontend</a:t>
-            </a:r>
-          </a:p>
-          <a:p>
-            <a:pPr>
-              <a:spcAft>
-                <a:spcPts val="1400"/>
+                <a:spcPts val="1401"/>
               </a:spcAft>
               <a:defRPr sz="1600">
                 <a:solidFill>
@@ -4368,29 +4671,14 @@
               </a:defRPr>
             </a:pPr>
             <a:r>
-              <a:t>•  Navigate into the folder and clone your repository:</a:t>
+              <a:rPr sz="1600"/>
+              <a:t>•  Point your domain names (DNS A records) directly to your server's IP address.</a:t>
             </a:r>
           </a:p>
           <a:p>
             <a:pPr>
               <a:spcAft>
-                <a:spcPts val="1400"/>
-              </a:spcAft>
-              <a:defRPr sz="1400">
-                <a:solidFill>
-                  <a:srgbClr val="1E293B"/>
-                </a:solidFill>
-                <a:latin typeface="Courier New"/>
-              </a:defRPr>
-            </a:pPr>
-            <a:r>
-              <a:t>•    $ cd /home/ubuntu/frontend &amp;&amp; git clone &lt;your_repository_url&gt; projectname</a:t>
-            </a:r>
-          </a:p>
-          <a:p>
-            <a:pPr>
-              <a:spcAft>
-                <a:spcPts val="1400"/>
+                <a:spcPts val="1401"/>
               </a:spcAft>
               <a:defRPr sz="1600">
                 <a:solidFill>
@@ -4400,29 +4688,14 @@
               </a:defRPr>
             </a:pPr>
             <a:r>
-              <a:t>•  Navigate to project root, create a production environment variables file:</a:t>
+              <a:rPr sz="1600"/>
+              <a:t>•  Verify you have access to pull the code from the Git repository on the server.</a:t>
             </a:r>
           </a:p>
           <a:p>
             <a:pPr>
               <a:spcAft>
-                <a:spcPts val="1400"/>
-              </a:spcAft>
-              <a:defRPr sz="1400">
-                <a:solidFill>
-                  <a:srgbClr val="1E293B"/>
-                </a:solidFill>
-                <a:latin typeface="Courier New"/>
-              </a:defRPr>
-            </a:pPr>
-            <a:r>
-              <a:t>•    $ cd projectname &amp;&amp; nano .env</a:t>
-            </a:r>
-          </a:p>
-          <a:p>
-            <a:pPr>
-              <a:spcAft>
-                <a:spcPts val="1400"/>
+                <a:spcPts val="1401"/>
               </a:spcAft>
               <a:defRPr sz="1600">
                 <a:solidFill>
@@ -4432,7 +4705,8 @@
               </a:defRPr>
             </a:pPr>
             <a:r>
-              <a:t>•  Add required configurations (e.g. NODE_ENV=production, NEXT_PUBLIC_API_URL=...) and save changes.</a:t>
+              <a:rPr sz="1600"/>
+              <a:t>•  Gather any frontend environment variables (like API endpoint URLs) to copy into your .env configuration file.</a:t>
             </a:r>
           </a:p>
         </p:txBody>
@@ -4445,8 +4719,8 @@
 </p:sld>
 </file>
 
-<file path=ppt/slides/slide6.xml><?xml version="1.0" encoding="utf-8"?>
-<p:sld xmlns:a="http://schemas.openxmlformats.org/drawingml/2006/main" xmlns:p="http://schemas.openxmlformats.org/presentationml/2006/main" xmlns:r="http://schemas.openxmlformats.org/officeDocument/2006/relationships">
+<file path=ppt/slides/slide3.xml><?xml version="1.0" encoding="utf-8"?>
+<p:sld xmlns:a="http://schemas.openxmlformats.org/drawingml/2006/main" xmlns:r="http://schemas.openxmlformats.org/officeDocument/2006/relationships" xmlns:p="http://schemas.openxmlformats.org/presentationml/2006/main">
   <p:cSld>
     <p:bg>
       <p:bgPr>
@@ -4462,7 +4736,14 @@
         <p:cNvGrpSpPr/>
         <p:nvPr/>
       </p:nvGrpSpPr>
-      <p:grpSpPr/>
+      <p:grpSpPr>
+        <a:xfrm>
+          <a:off x="0" y="0"/>
+          <a:ext cx="0" cy="0"/>
+          <a:chOff x="0" y="0"/>
+          <a:chExt cx="0" cy="0"/>
+        </a:xfrm>
+      </p:grpSpPr>
       <p:sp>
         <p:nvSpPr>
           <p:cNvPr id="2" name="Rectangle 1"/>
@@ -4471,8 +4752,8 @@
         </p:nvSpPr>
         <p:spPr>
           <a:xfrm>
-            <a:off x="0" y="0"/>
-            <a:ext cx="12191695" cy="137160"/>
+            <a:off x="2" y="1143002"/>
+            <a:ext cx="12191694" cy="137161"/>
           </a:xfrm>
           <a:prstGeom prst="rect">
             <a:avLst/>
@@ -4505,6 +4786,7 @@
           <a:lstStyle/>
           <a:p>
             <a:pPr algn="ctr"/>
+            <a:endParaRPr sz="1801"/>
           </a:p>
         </p:txBody>
       </p:sp>
@@ -4516,8 +4798,8 @@
         </p:nvSpPr>
         <p:spPr>
           <a:xfrm>
-            <a:off x="914400" y="457200"/>
-            <a:ext cx="10360152" cy="457200"/>
+            <a:off x="914402" y="1600204"/>
+            <a:ext cx="10360153" cy="307905"/>
           </a:xfrm>
           <a:prstGeom prst="rect">
             <a:avLst/>
@@ -4531,7 +4813,7 @@
           <a:lstStyle/>
           <a:p>
             <a:pPr>
-              <a:defRPr b="1" sz="1400">
+              <a:defRPr sz="1400" b="1">
                 <a:solidFill>
                   <a:srgbClr val="009688"/>
                 </a:solidFill>
@@ -4539,7 +4821,8 @@
               </a:defRPr>
             </a:pPr>
             <a:r>
-              <a:t>STEP 04</a:t>
+              <a:rPr sz="1401"/>
+              <a:t>STEP 01</a:t>
             </a:r>
           </a:p>
         </p:txBody>
@@ -4552,8 +4835,8 @@
         </p:nvSpPr>
         <p:spPr>
           <a:xfrm>
-            <a:off x="914400" y="822960"/>
-            <a:ext cx="10360152" cy="731520"/>
+            <a:off x="914402" y="1965962"/>
+            <a:ext cx="10360153" cy="523220"/>
           </a:xfrm>
           <a:prstGeom prst="rect">
             <a:avLst/>
@@ -4567,7 +4850,7 @@
           <a:lstStyle/>
           <a:p>
             <a:pPr>
-              <a:defRPr b="1" sz="2800">
+              <a:defRPr sz="2800" b="1">
                 <a:solidFill>
                   <a:srgbClr val="142030"/>
                 </a:solidFill>
@@ -4575,7 +4858,8 @@
               </a:defRPr>
             </a:pPr>
             <a:r>
-              <a:t>Install Project Dependencies &amp; Build Next.js</a:t>
+              <a:rPr sz="2800"/>
+              <a:t>Establish SSH Connection &amp; Update Server Packages</a:t>
             </a:r>
           </a:p>
         </p:txBody>
@@ -4588,8 +4872,8 @@
         </p:nvSpPr>
         <p:spPr>
           <a:xfrm>
-            <a:off x="914400" y="1645920"/>
-            <a:ext cx="10360152" cy="4572000"/>
+            <a:off x="914402" y="2788919"/>
+            <a:ext cx="10360153" cy="1980286"/>
           </a:xfrm>
           <a:prstGeom prst="rect">
             <a:avLst/>
@@ -4604,7 +4888,7 @@
           <a:p>
             <a:pPr>
               <a:spcAft>
-                <a:spcPts val="1400"/>
+                <a:spcPts val="1401"/>
               </a:spcAft>
               <a:defRPr sz="1600">
                 <a:solidFill>
@@ -4614,13 +4898,31 @@
               </a:defRPr>
             </a:pPr>
             <a:r>
-              <a:t>•  Install local dependencies including devDependencies needed to build the Next.js code:</a:t>
+              <a:rPr sz="1600"/>
+              <a:t>•  Open your local terminal (macOS/Linux) or PowerShell (Windows).</a:t>
             </a:r>
           </a:p>
           <a:p>
             <a:pPr>
               <a:spcAft>
-                <a:spcPts val="1400"/>
+                <a:spcPts val="1401"/>
+              </a:spcAft>
+              <a:defRPr sz="1600">
+                <a:solidFill>
+                  <a:srgbClr val="142030"/>
+                </a:solidFill>
+                <a:latin typeface="Arial"/>
+              </a:defRPr>
+            </a:pPr>
+            <a:r>
+              <a:rPr sz="1600"/>
+              <a:t>•  Connect to the server using SSH:</a:t>
+            </a:r>
+          </a:p>
+          <a:p>
+            <a:pPr>
+              <a:spcAft>
+                <a:spcPts val="1401"/>
               </a:spcAft>
               <a:defRPr sz="1400">
                 <a:solidFill>
@@ -4630,13 +4932,14 @@
               </a:defRPr>
             </a:pPr>
             <a:r>
-              <a:t>•    $ npm install</a:t>
+              <a:rPr sz="1401"/>
+              <a:t>•    $ ssh -i /path/to/key.pem ubuntu@your_server_ip</a:t>
             </a:r>
           </a:p>
           <a:p>
             <a:pPr>
               <a:spcAft>
-                <a:spcPts val="1400"/>
+                <a:spcPts val="1401"/>
               </a:spcAft>
               <a:defRPr sz="1600">
                 <a:solidFill>
@@ -4646,13 +4949,14 @@
               </a:defRPr>
             </a:pPr>
             <a:r>
-              <a:t>•  Build the Next.js production bundle:</a:t>
+              <a:rPr sz="1600"/>
+              <a:t>•  Update system libraries to ensure security patches are applied:</a:t>
             </a:r>
           </a:p>
           <a:p>
             <a:pPr>
               <a:spcAft>
-                <a:spcPts val="1400"/>
+                <a:spcPts val="1401"/>
               </a:spcAft>
               <a:defRPr sz="1400">
                 <a:solidFill>
@@ -4662,39 +4966,8 @@
               </a:defRPr>
             </a:pPr>
             <a:r>
-              <a:t>•    $ npm run build</a:t>
-            </a:r>
-          </a:p>
-          <a:p>
-            <a:pPr>
-              <a:spcAft>
-                <a:spcPts val="1400"/>
-              </a:spcAft>
-              <a:defRPr sz="1600">
-                <a:solidFill>
-                  <a:srgbClr val="142030"/>
-                </a:solidFill>
-                <a:latin typeface="Arial"/>
-              </a:defRPr>
-            </a:pPr>
-            <a:r>
-              <a:t>•  This compiles static pages, components, CSS styles, and templates inside the hidden '.next' directory.</a:t>
-            </a:r>
-          </a:p>
-          <a:p>
-            <a:pPr>
-              <a:spcAft>
-                <a:spcPts val="1400"/>
-              </a:spcAft>
-              <a:defRPr sz="1600">
-                <a:solidFill>
-                  <a:srgbClr val="142030"/>
-                </a:solidFill>
-                <a:latin typeface="Arial"/>
-              </a:defRPr>
-            </a:pPr>
-            <a:r>
-              <a:t>•  Verify build is completed successfully without errors.</a:t>
+              <a:rPr sz="1401"/>
+              <a:t>•    $ sudo apt update &amp;&amp; sudo apt upgrade -y</a:t>
             </a:r>
           </a:p>
         </p:txBody>
@@ -4707,8 +4980,8 @@
 </p:sld>
 </file>
 
-<file path=ppt/slides/slide7.xml><?xml version="1.0" encoding="utf-8"?>
-<p:sld xmlns:a="http://schemas.openxmlformats.org/drawingml/2006/main" xmlns:p="http://schemas.openxmlformats.org/presentationml/2006/main" xmlns:r="http://schemas.openxmlformats.org/officeDocument/2006/relationships">
+<file path=ppt/slides/slide4.xml><?xml version="1.0" encoding="utf-8"?>
+<p:sld xmlns:a="http://schemas.openxmlformats.org/drawingml/2006/main" xmlns:r="http://schemas.openxmlformats.org/officeDocument/2006/relationships" xmlns:p="http://schemas.openxmlformats.org/presentationml/2006/main">
   <p:cSld>
     <p:bg>
       <p:bgPr>
@@ -4724,7 +4997,14 @@
         <p:cNvGrpSpPr/>
         <p:nvPr/>
       </p:nvGrpSpPr>
-      <p:grpSpPr/>
+      <p:grpSpPr>
+        <a:xfrm>
+          <a:off x="0" y="0"/>
+          <a:ext cx="0" cy="0"/>
+          <a:chOff x="0" y="0"/>
+          <a:chExt cx="0" cy="0"/>
+        </a:xfrm>
+      </p:grpSpPr>
       <p:sp>
         <p:nvSpPr>
           <p:cNvPr id="2" name="Rectangle 1"/>
@@ -4733,8 +5013,8 @@
         </p:nvSpPr>
         <p:spPr>
           <a:xfrm>
-            <a:off x="0" y="0"/>
-            <a:ext cx="12191695" cy="137160"/>
+            <a:off x="2" y="1143002"/>
+            <a:ext cx="12191694" cy="137161"/>
           </a:xfrm>
           <a:prstGeom prst="rect">
             <a:avLst/>
@@ -4767,6 +5047,7 @@
           <a:lstStyle/>
           <a:p>
             <a:pPr algn="ctr"/>
+            <a:endParaRPr sz="1801"/>
           </a:p>
         </p:txBody>
       </p:sp>
@@ -4778,8 +5059,8 @@
         </p:nvSpPr>
         <p:spPr>
           <a:xfrm>
-            <a:off x="914400" y="457200"/>
-            <a:ext cx="10360152" cy="457200"/>
+            <a:off x="914402" y="1600204"/>
+            <a:ext cx="10360153" cy="307905"/>
           </a:xfrm>
           <a:prstGeom prst="rect">
             <a:avLst/>
@@ -4793,7 +5074,7 @@
           <a:lstStyle/>
           <a:p>
             <a:pPr>
-              <a:defRPr b="1" sz="1400">
+              <a:defRPr sz="1400" b="1">
                 <a:solidFill>
                   <a:srgbClr val="009688"/>
                 </a:solidFill>
@@ -4801,7 +5082,8 @@
               </a:defRPr>
             </a:pPr>
             <a:r>
-              <a:t>STEP 05</a:t>
+              <a:rPr sz="1401"/>
+              <a:t>STEP 02</a:t>
             </a:r>
           </a:p>
         </p:txBody>
@@ -4814,8 +5096,8 @@
         </p:nvSpPr>
         <p:spPr>
           <a:xfrm>
-            <a:off x="914400" y="822960"/>
-            <a:ext cx="10360152" cy="731520"/>
+            <a:off x="914402" y="1965962"/>
+            <a:ext cx="10360153" cy="523220"/>
           </a:xfrm>
           <a:prstGeom prst="rect">
             <a:avLst/>
@@ -4829,7 +5111,7 @@
           <a:lstStyle/>
           <a:p>
             <a:pPr>
-              <a:defRPr b="1" sz="2800">
+              <a:defRPr sz="2800" b="1">
                 <a:solidFill>
                   <a:srgbClr val="142030"/>
                 </a:solidFill>
@@ -4837,7 +5119,8 @@
               </a:defRPr>
             </a:pPr>
             <a:r>
-              <a:t>Configure PM2 Process Manager &amp; Ecosystem File</a:t>
+              <a:rPr sz="2800"/>
+              <a:t>Install Node.js Version Manager (NVM) &amp; Node.js</a:t>
             </a:r>
           </a:p>
         </p:txBody>
@@ -4850,8 +5133,8 @@
         </p:nvSpPr>
         <p:spPr>
           <a:xfrm>
-            <a:off x="914400" y="1645920"/>
-            <a:ext cx="10360152" cy="4572000"/>
+            <a:off x="914402" y="2788922"/>
+            <a:ext cx="10360153" cy="2770502"/>
           </a:xfrm>
           <a:prstGeom prst="rect">
             <a:avLst/>
@@ -4866,7 +5149,7 @@
           <a:p>
             <a:pPr>
               <a:spcAft>
-                <a:spcPts val="1400"/>
+                <a:spcPts val="1401"/>
               </a:spcAft>
               <a:defRPr sz="1600">
                 <a:solidFill>
@@ -4876,13 +5159,14 @@
               </a:defRPr>
             </a:pPr>
             <a:r>
-              <a:t>•  Install PM2 globally on the server to monitor processes:</a:t>
+              <a:rPr sz="1600"/>
+              <a:t>•  Install NVM on the server to isolate and manage Node.js runtimes:</a:t>
             </a:r>
           </a:p>
           <a:p>
             <a:pPr>
               <a:spcAft>
-                <a:spcPts val="1400"/>
+                <a:spcPts val="1401"/>
               </a:spcAft>
               <a:defRPr sz="1400">
                 <a:solidFill>
@@ -4892,13 +5176,14 @@
               </a:defRPr>
             </a:pPr>
             <a:r>
-              <a:t>•    $ sudo npm install pm2 -g</a:t>
+              <a:rPr sz="1401"/>
+              <a:t>•    $ curl -o- https://raw.githubusercontent.com/nvm-sh/nvm/v0.39.7/install.sh | bash</a:t>
             </a:r>
           </a:p>
           <a:p>
             <a:pPr>
               <a:spcAft>
-                <a:spcPts val="1400"/>
+                <a:spcPts val="1401"/>
               </a:spcAft>
               <a:defRPr sz="1600">
                 <a:solidFill>
@@ -4908,13 +5193,14 @@
               </a:defRPr>
             </a:pPr>
             <a:r>
-              <a:t>•  Create a configuration file 'ecosystem.config.js' at the root of the project:</a:t>
+              <a:rPr sz="1600"/>
+              <a:t>•  Reload environment settings to enable the nvm command:</a:t>
             </a:r>
           </a:p>
           <a:p>
             <a:pPr>
               <a:spcAft>
-                <a:spcPts val="1400"/>
+                <a:spcPts val="1401"/>
               </a:spcAft>
               <a:defRPr sz="1400">
                 <a:solidFill>
@@ -4924,13 +5210,31 @@
               </a:defRPr>
             </a:pPr>
             <a:r>
-              <a:t>•    $ nano ecosystem.config.js</a:t>
+              <a:rPr sz="1401"/>
+              <a:t>•    $ source ~/.bashrc   (or export NVM variables directly in terminal)</a:t>
             </a:r>
           </a:p>
           <a:p>
             <a:pPr>
               <a:spcAft>
-                <a:spcPts val="1400"/>
+                <a:spcPts val="1401"/>
+              </a:spcAft>
+              <a:defRPr sz="1600">
+                <a:solidFill>
+                  <a:srgbClr val="142030"/>
+                </a:solidFill>
+                <a:latin typeface="Arial"/>
+              </a:defRPr>
+            </a:pPr>
+            <a:r>
+              <a:rPr sz="1600"/>
+              <a:t>•  Install Node.js version 20 (LTS):</a:t>
+            </a:r>
+          </a:p>
+          <a:p>
+            <a:pPr>
+              <a:spcAft>
+                <a:spcPts val="1401"/>
               </a:spcAft>
               <a:defRPr sz="1400">
                 <a:solidFill>
@@ -4940,13 +5244,14 @@
               </a:defRPr>
             </a:pPr>
             <a:r>
-              <a:t>•  Add app configurations, specifying name as 'frontend', script as 'npm', and args as 'start'.</a:t>
+              <a:rPr sz="1401"/>
+              <a:t>•    $ nvm install 20</a:t>
             </a:r>
           </a:p>
           <a:p>
             <a:pPr>
               <a:spcAft>
-                <a:spcPts val="1400"/>
+                <a:spcPts val="1401"/>
               </a:spcAft>
               <a:defRPr sz="1400">
                 <a:solidFill>
@@ -4956,23 +5261,8 @@
               </a:defRPr>
             </a:pPr>
             <a:r>
-              <a:t>•  Start the frontend using the ecosystem file:   $ pm2 start ecosystem.config.js</a:t>
-            </a:r>
-          </a:p>
-          <a:p>
-            <a:pPr>
-              <a:spcAft>
-                <a:spcPts val="1400"/>
-              </a:spcAft>
-              <a:defRPr sz="1400">
-                <a:solidFill>
-                  <a:srgbClr val="1E293B"/>
-                </a:solidFill>
-                <a:latin typeface="Courier New"/>
-              </a:defRPr>
-            </a:pPr>
-            <a:r>
-              <a:t>•  Save the configuration and check status:   $ pm2 save &amp;&amp; pm2 status</a:t>
+              <a:rPr sz="1401"/>
+              <a:t>•  Confirm node and npm installations using 'node -v' and 'npm -v'.</a:t>
             </a:r>
           </a:p>
         </p:txBody>
@@ -4985,8 +5275,8 @@
 </p:sld>
 </file>
 
-<file path=ppt/slides/slide8.xml><?xml version="1.0" encoding="utf-8"?>
-<p:sld xmlns:a="http://schemas.openxmlformats.org/drawingml/2006/main" xmlns:p="http://schemas.openxmlformats.org/presentationml/2006/main" xmlns:r="http://schemas.openxmlformats.org/officeDocument/2006/relationships">
+<file path=ppt/slides/slide5.xml><?xml version="1.0" encoding="utf-8"?>
+<p:sld xmlns:a="http://schemas.openxmlformats.org/drawingml/2006/main" xmlns:r="http://schemas.openxmlformats.org/officeDocument/2006/relationships" xmlns:p="http://schemas.openxmlformats.org/presentationml/2006/main">
   <p:cSld>
     <p:bg>
       <p:bgPr>
@@ -5002,7 +5292,14 @@
         <p:cNvGrpSpPr/>
         <p:nvPr/>
       </p:nvGrpSpPr>
-      <p:grpSpPr/>
+      <p:grpSpPr>
+        <a:xfrm>
+          <a:off x="0" y="0"/>
+          <a:ext cx="0" cy="0"/>
+          <a:chOff x="0" y="0"/>
+          <a:chExt cx="0" cy="0"/>
+        </a:xfrm>
+      </p:grpSpPr>
       <p:sp>
         <p:nvSpPr>
           <p:cNvPr id="2" name="Rectangle 1"/>
@@ -5011,8 +5308,8 @@
         </p:nvSpPr>
         <p:spPr>
           <a:xfrm>
-            <a:off x="0" y="0"/>
-            <a:ext cx="12191695" cy="137160"/>
+            <a:off x="2" y="1143002"/>
+            <a:ext cx="12191694" cy="137161"/>
           </a:xfrm>
           <a:prstGeom prst="rect">
             <a:avLst/>
@@ -5045,6 +5342,7 @@
           <a:lstStyle/>
           <a:p>
             <a:pPr algn="ctr"/>
+            <a:endParaRPr sz="1801"/>
           </a:p>
         </p:txBody>
       </p:sp>
@@ -5056,8 +5354,8 @@
         </p:nvSpPr>
         <p:spPr>
           <a:xfrm>
-            <a:off x="914400" y="457200"/>
-            <a:ext cx="10360152" cy="457200"/>
+            <a:off x="914402" y="1600204"/>
+            <a:ext cx="10360153" cy="307905"/>
           </a:xfrm>
           <a:prstGeom prst="rect">
             <a:avLst/>
@@ -5071,7 +5369,7 @@
           <a:lstStyle/>
           <a:p>
             <a:pPr>
-              <a:defRPr b="1" sz="1400">
+              <a:defRPr sz="1400" b="1">
                 <a:solidFill>
                   <a:srgbClr val="009688"/>
                 </a:solidFill>
@@ -5079,7 +5377,8 @@
               </a:defRPr>
             </a:pPr>
             <a:r>
-              <a:t>STEP 06</a:t>
+              <a:rPr sz="1401"/>
+              <a:t>STEP 03</a:t>
             </a:r>
           </a:p>
         </p:txBody>
@@ -5092,8 +5391,8 @@
         </p:nvSpPr>
         <p:spPr>
           <a:xfrm>
-            <a:off x="914400" y="822960"/>
-            <a:ext cx="10360152" cy="731520"/>
+            <a:off x="914402" y="1965962"/>
+            <a:ext cx="10360153" cy="523220"/>
           </a:xfrm>
           <a:prstGeom prst="rect">
             <a:avLst/>
@@ -5107,7 +5406,7 @@
           <a:lstStyle/>
           <a:p>
             <a:pPr>
-              <a:defRPr b="1" sz="2800">
+              <a:defRPr sz="2800" b="1">
                 <a:solidFill>
                   <a:srgbClr val="142030"/>
                 </a:solidFill>
@@ -5115,7 +5414,8 @@
               </a:defRPr>
             </a:pPr>
             <a:r>
-              <a:t>Reverse Proxy Configuration (CloudPanel vs Nginx)</a:t>
+              <a:rPr sz="2800" dirty="0"/>
+              <a:t>Create Directory, Clone Repo, &amp; Setup Env Variables</a:t>
             </a:r>
           </a:p>
         </p:txBody>
@@ -5128,8 +5428,8 @@
         </p:nvSpPr>
         <p:spPr>
           <a:xfrm>
-            <a:off x="914400" y="1645920"/>
-            <a:ext cx="10360152" cy="4572000"/>
+            <a:off x="923545" y="2798067"/>
+            <a:ext cx="10360153" cy="2801151"/>
           </a:xfrm>
           <a:prstGeom prst="rect">
             <a:avLst/>
@@ -5144,7 +5444,7 @@
           <a:p>
             <a:pPr>
               <a:spcAft>
-                <a:spcPts val="1400"/>
+                <a:spcPts val="1401"/>
               </a:spcAft>
               <a:defRPr sz="1600">
                 <a:solidFill>
@@ -5154,13 +5454,63 @@
               </a:defRPr>
             </a:pPr>
             <a:r>
-              <a:t>•  Option A (CloudPanel): Add a Reverse Proxy site for your domain pointing to port 3000, and generate SSL.</a:t>
+              <a:rPr sz="1600" dirty="0"/>
+              <a:t>•  Create the deployment folder and adjust ownership rules to avoid permission errors:</a:t>
             </a:r>
           </a:p>
           <a:p>
             <a:pPr>
               <a:spcAft>
-                <a:spcPts val="1400"/>
+                <a:spcPts val="1401"/>
+              </a:spcAft>
+              <a:defRPr sz="1400">
+                <a:solidFill>
+                  <a:srgbClr val="1E293B"/>
+                </a:solidFill>
+                <a:latin typeface="Courier New"/>
+              </a:defRPr>
+            </a:pPr>
+            <a:r>
+              <a:rPr sz="1401" dirty="0"/>
+              <a:t>•    $ </a:t>
+            </a:r>
+            <a:r>
+              <a:rPr sz="1401" dirty="0" err="1"/>
+              <a:t>sudo</a:t>
+            </a:r>
+            <a:r>
+              <a:rPr sz="1401" dirty="0"/>
+              <a:t> </a:t>
+            </a:r>
+            <a:r>
+              <a:rPr sz="1401" dirty="0" err="1"/>
+              <a:t>mkdir</a:t>
+            </a:r>
+            <a:r>
+              <a:rPr sz="1401" dirty="0"/>
+              <a:t> -p /home/ubuntu/frontend &amp;&amp; </a:t>
+            </a:r>
+            <a:r>
+              <a:rPr sz="1401" dirty="0" err="1"/>
+              <a:t>sudo</a:t>
+            </a:r>
+            <a:r>
+              <a:rPr sz="1401" dirty="0"/>
+              <a:t> </a:t>
+            </a:r>
+            <a:r>
+              <a:rPr sz="1401" dirty="0" err="1"/>
+              <a:t>chown</a:t>
+            </a:r>
+            <a:r>
+              <a:rPr sz="1401" dirty="0"/>
+              <a:t> -R $USER:$USER /home/ubuntu/frontend</a:t>
+            </a:r>
+          </a:p>
+          <a:p>
+            <a:pPr>
+              <a:spcAft>
+                <a:spcPts val="1401"/>
               </a:spcAft>
               <a:defRPr sz="1600">
                 <a:solidFill>
@@ -5170,13 +5520,14 @@
               </a:defRPr>
             </a:pPr>
             <a:r>
-              <a:t>•  Option B (Manual Nginx): Verify or install Nginx:</a:t>
+              <a:rPr sz="1600" dirty="0"/>
+              <a:t>•  Navigate into the folder and clone your repository:</a:t>
             </a:r>
           </a:p>
           <a:p>
             <a:pPr>
               <a:spcAft>
-                <a:spcPts val="1400"/>
+                <a:spcPts val="1401"/>
               </a:spcAft>
               <a:defRPr sz="1400">
                 <a:solidFill>
@@ -5186,13 +5537,44 @@
               </a:defRPr>
             </a:pPr>
             <a:r>
-              <a:t>•    $ sudo apt update &amp;&amp; sudo apt install nginx -y</a:t>
-            </a:r>
+              <a:rPr sz="1401" dirty="0"/>
+              <a:t>•    $ cd /home/ubuntu/frontend &amp;&amp; git clone &lt;</a:t>
+            </a:r>
+            <a:r>
+              <a:rPr sz="1401" dirty="0" err="1"/>
+              <a:t>your_repository_url</a:t>
+            </a:r>
+            <a:r>
+              <a:rPr sz="1401" dirty="0"/>
+              <a:t>&gt; </a:t>
+            </a:r>
+            <a:r>
+              <a:rPr sz="1401" dirty="0" err="1"/>
+              <a:t>projectname</a:t>
+            </a:r>
+            <a:endParaRPr sz="1401" dirty="0"/>
           </a:p>
           <a:p>
             <a:pPr>
               <a:spcAft>
-                <a:spcPts val="1400"/>
+                <a:spcPts val="1401"/>
+              </a:spcAft>
+              <a:defRPr sz="1600">
+                <a:solidFill>
+                  <a:srgbClr val="142030"/>
+                </a:solidFill>
+                <a:latin typeface="Arial"/>
+              </a:defRPr>
+            </a:pPr>
+            <a:r>
+              <a:rPr sz="1600" dirty="0"/>
+              <a:t>•  Navigate to project root, create a production environment variables file:</a:t>
+            </a:r>
+          </a:p>
+          <a:p>
+            <a:pPr>
+              <a:spcAft>
+                <a:spcPts val="1401"/>
               </a:spcAft>
               <a:defRPr sz="1400">
                 <a:solidFill>
@@ -5202,13 +5584,22 @@
               </a:defRPr>
             </a:pPr>
             <a:r>
-              <a:t>•  Create a file in sites-available:   $ sudo nano /etc/nginx/sites-available/frontend.example.com</a:t>
+              <a:rPr sz="1401" dirty="0"/>
+              <a:t>•    $ cd </a:t>
+            </a:r>
+            <a:r>
+              <a:rPr sz="1401" dirty="0" err="1"/>
+              <a:t>projectname</a:t>
+            </a:r>
+            <a:r>
+              <a:rPr sz="1401" dirty="0"/>
+              <a:t> &amp;&amp; nano .env</a:t>
             </a:r>
           </a:p>
           <a:p>
             <a:pPr>
               <a:spcAft>
-                <a:spcPts val="1400"/>
+                <a:spcPts val="1401"/>
               </a:spcAft>
               <a:defRPr sz="1600">
                 <a:solidFill>
@@ -5218,39 +5609,8 @@
               </a:defRPr>
             </a:pPr>
             <a:r>
-              <a:t>•  Add a server block listening on port 80 proxying requests to http://localhost:3000.</a:t>
-            </a:r>
-          </a:p>
-          <a:p>
-            <a:pPr>
-              <a:spcAft>
-                <a:spcPts val="1400"/>
-              </a:spcAft>
-              <a:defRPr sz="1400">
-                <a:solidFill>
-                  <a:srgbClr val="1E293B"/>
-                </a:solidFill>
-                <a:latin typeface="Courier New"/>
-              </a:defRPr>
-            </a:pPr>
-            <a:r>
-              <a:t>•  Link config to sites-enabled:   $ sudo ln -s /etc/nginx/sites-available/... /etc/nginx/sites-enabled/</a:t>
-            </a:r>
-          </a:p>
-          <a:p>
-            <a:pPr>
-              <a:spcAft>
-                <a:spcPts val="1400"/>
-              </a:spcAft>
-              <a:defRPr sz="1400">
-                <a:solidFill>
-                  <a:srgbClr val="1E293B"/>
-                </a:solidFill>
-                <a:latin typeface="Courier New"/>
-              </a:defRPr>
-            </a:pPr>
-            <a:r>
-              <a:t>•  Test settings and restart Nginx:   $ sudo nginx -t &amp;&amp; sudo systemctl restart nginx</a:t>
+              <a:rPr sz="1600" dirty="0"/>
+              <a:t>•  Add required configurations (e.g. NODE_ENV=production, NEXT_PUBLIC_API_URL=...) and save changes.</a:t>
             </a:r>
           </a:p>
         </p:txBody>
@@ -5263,8 +5623,8 @@
 </p:sld>
 </file>
 
-<file path=ppt/slides/slide9.xml><?xml version="1.0" encoding="utf-8"?>
-<p:sld xmlns:a="http://schemas.openxmlformats.org/drawingml/2006/main" xmlns:p="http://schemas.openxmlformats.org/presentationml/2006/main" xmlns:r="http://schemas.openxmlformats.org/officeDocument/2006/relationships">
+<file path=ppt/slides/slide6.xml><?xml version="1.0" encoding="utf-8"?>
+<p:sld xmlns:a="http://schemas.openxmlformats.org/drawingml/2006/main" xmlns:r="http://schemas.openxmlformats.org/officeDocument/2006/relationships" xmlns:p="http://schemas.openxmlformats.org/presentationml/2006/main">
   <p:cSld>
     <p:bg>
       <p:bgPr>
@@ -5280,7 +5640,14 @@
         <p:cNvGrpSpPr/>
         <p:nvPr/>
       </p:nvGrpSpPr>
-      <p:grpSpPr/>
+      <p:grpSpPr>
+        <a:xfrm>
+          <a:off x="0" y="0"/>
+          <a:ext cx="0" cy="0"/>
+          <a:chOff x="0" y="0"/>
+          <a:chExt cx="0" cy="0"/>
+        </a:xfrm>
+      </p:grpSpPr>
       <p:sp>
         <p:nvSpPr>
           <p:cNvPr id="2" name="Rectangle 1"/>
@@ -5289,8 +5656,8 @@
         </p:nvSpPr>
         <p:spPr>
           <a:xfrm>
-            <a:off x="0" y="0"/>
-            <a:ext cx="12191695" cy="137160"/>
+            <a:off x="2" y="1143002"/>
+            <a:ext cx="12191694" cy="137161"/>
           </a:xfrm>
           <a:prstGeom prst="rect">
             <a:avLst/>
@@ -5323,6 +5690,7 @@
           <a:lstStyle/>
           <a:p>
             <a:pPr algn="ctr"/>
+            <a:endParaRPr sz="1801"/>
           </a:p>
         </p:txBody>
       </p:sp>
@@ -5334,8 +5702,8 @@
         </p:nvSpPr>
         <p:spPr>
           <a:xfrm>
-            <a:off x="914400" y="457200"/>
-            <a:ext cx="10360152" cy="457200"/>
+            <a:off x="914402" y="1600204"/>
+            <a:ext cx="10360153" cy="307905"/>
           </a:xfrm>
           <a:prstGeom prst="rect">
             <a:avLst/>
@@ -5349,7 +5717,7 @@
           <a:lstStyle/>
           <a:p>
             <a:pPr>
-              <a:defRPr b="1" sz="1400">
+              <a:defRPr sz="1400" b="1">
                 <a:solidFill>
                   <a:srgbClr val="009688"/>
                 </a:solidFill>
@@ -5357,7 +5725,8 @@
               </a:defRPr>
             </a:pPr>
             <a:r>
-              <a:t>STEP 07</a:t>
+              <a:rPr sz="1401"/>
+              <a:t>STEP 04</a:t>
             </a:r>
           </a:p>
         </p:txBody>
@@ -5370,8 +5739,8 @@
         </p:nvSpPr>
         <p:spPr>
           <a:xfrm>
-            <a:off x="914400" y="822960"/>
-            <a:ext cx="10360152" cy="731520"/>
+            <a:off x="914402" y="1965962"/>
+            <a:ext cx="10360153" cy="523220"/>
           </a:xfrm>
           <a:prstGeom prst="rect">
             <a:avLst/>
@@ -5385,7 +5754,7 @@
           <a:lstStyle/>
           <a:p>
             <a:pPr>
-              <a:defRPr b="1" sz="2800">
+              <a:defRPr sz="2800" b="1">
                 <a:solidFill>
                   <a:srgbClr val="142030"/>
                 </a:solidFill>
@@ -5393,7 +5762,8 @@
               </a:defRPr>
             </a:pPr>
             <a:r>
-              <a:t>Enable SSL (HTTPS) with Certbot</a:t>
+              <a:rPr sz="2800"/>
+              <a:t>Install Project Dependencies &amp; Build Next.js</a:t>
             </a:r>
           </a:p>
         </p:txBody>
@@ -5406,8 +5776,8 @@
         </p:nvSpPr>
         <p:spPr>
           <a:xfrm>
-            <a:off x="914400" y="1645920"/>
-            <a:ext cx="10360152" cy="4572000"/>
+            <a:off x="914402" y="2788923"/>
+            <a:ext cx="10360153" cy="2406043"/>
           </a:xfrm>
           <a:prstGeom prst="rect">
             <a:avLst/>
@@ -5422,7 +5792,7 @@
           <a:p>
             <a:pPr>
               <a:spcAft>
-                <a:spcPts val="1400"/>
+                <a:spcPts val="1401"/>
               </a:spcAft>
               <a:defRPr sz="1600">
                 <a:solidFill>
@@ -5432,13 +5802,14 @@
               </a:defRPr>
             </a:pPr>
             <a:r>
-              <a:t>•  Install Certbot and the Nginx helper package on the server:</a:t>
+              <a:rPr sz="1600"/>
+              <a:t>•  Install local dependencies including devDependencies needed to build the Next.js code:</a:t>
             </a:r>
           </a:p>
           <a:p>
             <a:pPr>
               <a:spcAft>
-                <a:spcPts val="1400"/>
+                <a:spcPts val="1401"/>
               </a:spcAft>
               <a:defRPr sz="1400">
                 <a:solidFill>
@@ -5448,13 +5819,14 @@
               </a:defRPr>
             </a:pPr>
             <a:r>
-              <a:t>•    $ sudo apt install certbot python3-certbot-nginx -y</a:t>
+              <a:rPr sz="1401"/>
+              <a:t>•    $ npm install</a:t>
             </a:r>
           </a:p>
           <a:p>
             <a:pPr>
               <a:spcAft>
-                <a:spcPts val="1400"/>
+                <a:spcPts val="1401"/>
               </a:spcAft>
               <a:defRPr sz="1600">
                 <a:solidFill>
@@ -5464,13 +5836,14 @@
               </a:defRPr>
             </a:pPr>
             <a:r>
-              <a:t>•  Generate Let's Encrypt certificates and auto-configure Nginx:</a:t>
+              <a:rPr sz="1600"/>
+              <a:t>•  Build the Next.js production bundle:</a:t>
             </a:r>
           </a:p>
           <a:p>
             <a:pPr>
               <a:spcAft>
-                <a:spcPts val="1400"/>
+                <a:spcPts val="1401"/>
               </a:spcAft>
               <a:defRPr sz="1400">
                 <a:solidFill>
@@ -5480,13 +5853,14 @@
               </a:defRPr>
             </a:pPr>
             <a:r>
-              <a:t>•    $ sudo certbot --nginx -d frontend.example.com</a:t>
+              <a:rPr sz="1401"/>
+              <a:t>•    $ npm run build</a:t>
             </a:r>
           </a:p>
           <a:p>
             <a:pPr>
               <a:spcAft>
-                <a:spcPts val="1400"/>
+                <a:spcPts val="1401"/>
               </a:spcAft>
               <a:defRPr sz="1600">
                 <a:solidFill>
@@ -5496,13 +5870,224 @@
               </a:defRPr>
             </a:pPr>
             <a:r>
-              <a:t>•  Select options to redirect all traffic to HTTPS automatically.</a:t>
+              <a:rPr sz="1600"/>
+              <a:t>•  This compiles static pages, components, CSS styles, and templates inside the hidden '.next' directory.</a:t>
             </a:r>
           </a:p>
           <a:p>
             <a:pPr>
               <a:spcAft>
-                <a:spcPts val="1400"/>
+                <a:spcPts val="1401"/>
+              </a:spcAft>
+              <a:defRPr sz="1600">
+                <a:solidFill>
+                  <a:srgbClr val="142030"/>
+                </a:solidFill>
+                <a:latin typeface="Arial"/>
+              </a:defRPr>
+            </a:pPr>
+            <a:r>
+              <a:rPr sz="1600"/>
+              <a:t>•  Verify build is completed successfully without errors.</a:t>
+            </a:r>
+          </a:p>
+        </p:txBody>
+      </p:sp>
+    </p:spTree>
+  </p:cSld>
+  <p:clrMapOvr>
+    <a:masterClrMapping/>
+  </p:clrMapOvr>
+</p:sld>
+</file>
+
+<file path=ppt/slides/slide7.xml><?xml version="1.0" encoding="utf-8"?>
+<p:sld xmlns:a="http://schemas.openxmlformats.org/drawingml/2006/main" xmlns:r="http://schemas.openxmlformats.org/officeDocument/2006/relationships" xmlns:p="http://schemas.openxmlformats.org/presentationml/2006/main">
+  <p:cSld>
+    <p:bg>
+      <p:bgPr>
+        <a:solidFill>
+          <a:srgbClr val="F5F7FA"/>
+        </a:solidFill>
+        <a:effectLst/>
+      </p:bgPr>
+    </p:bg>
+    <p:spTree>
+      <p:nvGrpSpPr>
+        <p:cNvPr id="1" name=""/>
+        <p:cNvGrpSpPr/>
+        <p:nvPr/>
+      </p:nvGrpSpPr>
+      <p:grpSpPr>
+        <a:xfrm>
+          <a:off x="0" y="0"/>
+          <a:ext cx="0" cy="0"/>
+          <a:chOff x="0" y="0"/>
+          <a:chExt cx="0" cy="0"/>
+        </a:xfrm>
+      </p:grpSpPr>
+      <p:sp>
+        <p:nvSpPr>
+          <p:cNvPr id="2" name="Rectangle 1"/>
+          <p:cNvSpPr/>
+          <p:nvPr/>
+        </p:nvSpPr>
+        <p:spPr>
+          <a:xfrm>
+            <a:off x="2" y="1143002"/>
+            <a:ext cx="12191694" cy="137161"/>
+          </a:xfrm>
+          <a:prstGeom prst="rect">
+            <a:avLst/>
+          </a:prstGeom>
+          <a:solidFill>
+            <a:srgbClr val="009688"/>
+          </a:solidFill>
+          <a:ln>
+            <a:solidFill>
+              <a:srgbClr val="009688"/>
+            </a:solidFill>
+          </a:ln>
+        </p:spPr>
+        <p:style>
+          <a:lnRef idx="1">
+            <a:schemeClr val="accent1"/>
+          </a:lnRef>
+          <a:fillRef idx="3">
+            <a:schemeClr val="accent1"/>
+          </a:fillRef>
+          <a:effectRef idx="2">
+            <a:schemeClr val="accent1"/>
+          </a:effectRef>
+          <a:fontRef idx="minor">
+            <a:schemeClr val="lt1"/>
+          </a:fontRef>
+        </p:style>
+        <p:txBody>
+          <a:bodyPr rtlCol="0" anchor="ctr"/>
+          <a:lstStyle/>
+          <a:p>
+            <a:pPr algn="ctr"/>
+            <a:endParaRPr sz="1801"/>
+          </a:p>
+        </p:txBody>
+      </p:sp>
+      <p:sp>
+        <p:nvSpPr>
+          <p:cNvPr id="3" name="TextBox 2"/>
+          <p:cNvSpPr txBox="1"/>
+          <p:nvPr/>
+        </p:nvSpPr>
+        <p:spPr>
+          <a:xfrm>
+            <a:off x="914402" y="1600204"/>
+            <a:ext cx="10360153" cy="307905"/>
+          </a:xfrm>
+          <a:prstGeom prst="rect">
+            <a:avLst/>
+          </a:prstGeom>
+          <a:noFill/>
+        </p:spPr>
+        <p:txBody>
+          <a:bodyPr wrap="square">
+            <a:spAutoFit/>
+          </a:bodyPr>
+          <a:lstStyle/>
+          <a:p>
+            <a:pPr>
+              <a:defRPr sz="1400" b="1">
+                <a:solidFill>
+                  <a:srgbClr val="009688"/>
+                </a:solidFill>
+                <a:latin typeface="Arial"/>
+              </a:defRPr>
+            </a:pPr>
+            <a:r>
+              <a:rPr sz="1401"/>
+              <a:t>STEP 05</a:t>
+            </a:r>
+          </a:p>
+        </p:txBody>
+      </p:sp>
+      <p:sp>
+        <p:nvSpPr>
+          <p:cNvPr id="4" name="TextBox 3"/>
+          <p:cNvSpPr txBox="1"/>
+          <p:nvPr/>
+        </p:nvSpPr>
+        <p:spPr>
+          <a:xfrm>
+            <a:off x="914402" y="1965962"/>
+            <a:ext cx="10360153" cy="523220"/>
+          </a:xfrm>
+          <a:prstGeom prst="rect">
+            <a:avLst/>
+          </a:prstGeom>
+          <a:noFill/>
+        </p:spPr>
+        <p:txBody>
+          <a:bodyPr wrap="square">
+            <a:spAutoFit/>
+          </a:bodyPr>
+          <a:lstStyle/>
+          <a:p>
+            <a:pPr>
+              <a:defRPr sz="2800" b="1">
+                <a:solidFill>
+                  <a:srgbClr val="142030"/>
+                </a:solidFill>
+                <a:latin typeface="Arial"/>
+              </a:defRPr>
+            </a:pPr>
+            <a:r>
+              <a:rPr sz="2800"/>
+              <a:t>Configure PM2 Process Manager &amp; Ecosystem File</a:t>
+            </a:r>
+          </a:p>
+        </p:txBody>
+      </p:sp>
+      <p:sp>
+        <p:nvSpPr>
+          <p:cNvPr id="5" name="TextBox 4"/>
+          <p:cNvSpPr txBox="1"/>
+          <p:nvPr/>
+        </p:nvSpPr>
+        <p:spPr>
+          <a:xfrm>
+            <a:off x="914402" y="2788922"/>
+            <a:ext cx="10360153" cy="5192832"/>
+          </a:xfrm>
+          <a:prstGeom prst="rect">
+            <a:avLst/>
+          </a:prstGeom>
+          <a:noFill/>
+        </p:spPr>
+        <p:txBody>
+          <a:bodyPr wrap="square">
+            <a:spAutoFit/>
+          </a:bodyPr>
+          <a:lstStyle/>
+          <a:p>
+            <a:pPr>
+              <a:spcAft>
+                <a:spcPts val="1401"/>
+              </a:spcAft>
+              <a:defRPr sz="1600">
+                <a:solidFill>
+                  <a:srgbClr val="142030"/>
+                </a:solidFill>
+                <a:latin typeface="Arial"/>
+              </a:defRPr>
+            </a:pPr>
+            <a:r>
+              <a:rPr sz="1600" dirty="0"/>
+              <a:t>•  Install PM2 globally on the server to monitor processes:</a:t>
+            </a:r>
+          </a:p>
+          <a:p>
+            <a:pPr>
+              <a:spcAft>
+                <a:spcPts val="1401"/>
               </a:spcAft>
               <a:defRPr sz="1400">
                 <a:solidFill>
@@ -5512,12 +6097,1113 @@
               </a:defRPr>
             </a:pPr>
             <a:r>
-              <a:t>•  Test automatic renewal configuration:   $ sudo certbot renew --dry-run</a:t>
+              <a:rPr sz="1401" dirty="0"/>
+              <a:t>•    $ </a:t>
+            </a:r>
+            <a:r>
+              <a:rPr sz="1401" dirty="0" err="1"/>
+              <a:t>sudo</a:t>
+            </a:r>
+            <a:r>
+              <a:rPr sz="1401" dirty="0"/>
+              <a:t> </a:t>
+            </a:r>
+            <a:r>
+              <a:rPr sz="1401" dirty="0" err="1"/>
+              <a:t>npm</a:t>
+            </a:r>
+            <a:r>
+              <a:rPr sz="1401" dirty="0"/>
+              <a:t> install pm2 -g</a:t>
+            </a:r>
+          </a:p>
+          <a:p>
+            <a:pPr>
+              <a:spcAft>
+                <a:spcPts val="1401"/>
+              </a:spcAft>
+              <a:defRPr sz="1600">
+                <a:solidFill>
+                  <a:srgbClr val="142030"/>
+                </a:solidFill>
+                <a:latin typeface="Arial"/>
+              </a:defRPr>
+            </a:pPr>
+            <a:r>
+              <a:rPr sz="1600" dirty="0"/>
+              <a:t>•  Create a configuration file 'ecosystem.config.js' at the root of the project:</a:t>
+            </a:r>
+          </a:p>
+          <a:p>
+            <a:pPr>
+              <a:spcAft>
+                <a:spcPts val="1401"/>
+              </a:spcAft>
+              <a:defRPr sz="1400">
+                <a:solidFill>
+                  <a:srgbClr val="1E293B"/>
+                </a:solidFill>
+                <a:latin typeface="Courier New"/>
+              </a:defRPr>
+            </a:pPr>
+            <a:r>
+              <a:rPr sz="1401" dirty="0"/>
+              <a:t>•    $ nano ecosystem.config.js</a:t>
+            </a:r>
+            <a:endParaRPr lang="en-US" sz="1401" dirty="0"/>
+          </a:p>
+          <a:p>
+            <a:pPr>
+              <a:spcAft>
+                <a:spcPts val="1401"/>
+              </a:spcAft>
+              <a:defRPr sz="1400">
+                <a:solidFill>
+                  <a:srgbClr val="1E293B"/>
+                </a:solidFill>
+                <a:latin typeface="Courier New"/>
+              </a:defRPr>
+            </a:pPr>
+            <a:r>
+              <a:rPr lang="en-US" sz="1401" dirty="0"/>
+              <a:t>===================================</a:t>
+            </a:r>
+          </a:p>
+          <a:p>
+            <a:r>
+              <a:rPr lang="en-US" sz="1801" dirty="0"/>
+              <a:t>  apps: [{</a:t>
+            </a:r>
+          </a:p>
+          <a:p>
+            <a:r>
+              <a:rPr lang="en-US" sz="1801" dirty="0"/>
+              <a:t>    name: "frontend",</a:t>
+            </a:r>
+          </a:p>
+          <a:p>
+            <a:r>
+              <a:rPr lang="en-US" sz="1801" dirty="0"/>
+              <a:t>    script: "</a:t>
+            </a:r>
+            <a:r>
+              <a:rPr lang="en-US" sz="1801" dirty="0" err="1"/>
+              <a:t>npm</a:t>
+            </a:r>
+            <a:r>
+              <a:rPr lang="en-US" sz="1801" dirty="0"/>
+              <a:t>",</a:t>
+            </a:r>
+          </a:p>
+          <a:p>
+            <a:r>
+              <a:rPr lang="en-US" sz="1801" dirty="0"/>
+              <a:t>    </a:t>
+            </a:r>
+            <a:r>
+              <a:rPr lang="en-US" sz="1801" dirty="0" err="1"/>
+              <a:t>args</a:t>
+            </a:r>
+            <a:r>
+              <a:rPr lang="en-US" sz="1801" dirty="0"/>
+              <a:t>: "start"</a:t>
+            </a:r>
+          </a:p>
+          <a:p>
+            <a:r>
+              <a:rPr lang="en-US" sz="1801" dirty="0"/>
+              <a:t>  }]</a:t>
+            </a:r>
+          </a:p>
+          <a:p>
+            <a:r>
+              <a:rPr lang="en-US" sz="1801" dirty="0"/>
+              <a:t>};</a:t>
+            </a:r>
+          </a:p>
+          <a:p>
+            <a:pPr>
+              <a:spcAft>
+                <a:spcPts val="1401"/>
+              </a:spcAft>
+              <a:defRPr sz="1400">
+                <a:solidFill>
+                  <a:srgbClr val="1E293B"/>
+                </a:solidFill>
+                <a:latin typeface="Courier New"/>
+              </a:defRPr>
+            </a:pPr>
+            <a:r>
+              <a:rPr lang="en-US" sz="1401" dirty="0"/>
+              <a:t>====================================</a:t>
+            </a:r>
+            <a:endParaRPr sz="1401" dirty="0"/>
+          </a:p>
+          <a:p>
+            <a:pPr>
+              <a:spcAft>
+                <a:spcPts val="1401"/>
+              </a:spcAft>
+              <a:defRPr sz="1400">
+                <a:solidFill>
+                  <a:srgbClr val="1E293B"/>
+                </a:solidFill>
+                <a:latin typeface="Courier New"/>
+              </a:defRPr>
+            </a:pPr>
+            <a:r>
+              <a:rPr sz="1401" dirty="0"/>
+              <a:t>•  Add app configurations, specifying name as 'frontend', script as '</a:t>
+            </a:r>
+            <a:r>
+              <a:rPr sz="1401" dirty="0" err="1"/>
+              <a:t>npm</a:t>
+            </a:r>
+            <a:r>
+              <a:rPr sz="1401" dirty="0"/>
+              <a:t>', and </a:t>
+            </a:r>
+            <a:r>
+              <a:rPr sz="1401" dirty="0" err="1"/>
+              <a:t>args</a:t>
+            </a:r>
+            <a:r>
+              <a:rPr sz="1401" dirty="0"/>
+              <a:t> as 'start'.</a:t>
+            </a:r>
+          </a:p>
+          <a:p>
+            <a:pPr>
+              <a:spcAft>
+                <a:spcPts val="1401"/>
+              </a:spcAft>
+              <a:defRPr sz="1400">
+                <a:solidFill>
+                  <a:srgbClr val="1E293B"/>
+                </a:solidFill>
+                <a:latin typeface="Courier New"/>
+              </a:defRPr>
+            </a:pPr>
+            <a:r>
+              <a:rPr sz="1401" dirty="0"/>
+              <a:t>•  Start the frontend using the ecosystem file:   $ pm2 start ecosystem.config.js</a:t>
+            </a:r>
+          </a:p>
+          <a:p>
+            <a:pPr>
+              <a:spcAft>
+                <a:spcPts val="1401"/>
+              </a:spcAft>
+              <a:defRPr sz="1400">
+                <a:solidFill>
+                  <a:srgbClr val="1E293B"/>
+                </a:solidFill>
+                <a:latin typeface="Courier New"/>
+              </a:defRPr>
+            </a:pPr>
+            <a:r>
+              <a:rPr sz="1401" dirty="0"/>
+              <a:t>•  Save the configuration and check status:   $ pm2 save &amp;&amp; pm2 status</a:t>
             </a:r>
           </a:p>
         </p:txBody>
       </p:sp>
     </p:spTree>
+  </p:cSld>
+  <p:clrMapOvr>
+    <a:masterClrMapping/>
+  </p:clrMapOvr>
+</p:sld>
+</file>
+
+<file path=ppt/slides/slide8.xml><?xml version="1.0" encoding="utf-8"?>
+<p:sld xmlns:a="http://schemas.openxmlformats.org/drawingml/2006/main" xmlns:r="http://schemas.openxmlformats.org/officeDocument/2006/relationships" xmlns:p="http://schemas.openxmlformats.org/presentationml/2006/main">
+  <p:cSld>
+    <p:bg>
+      <p:bgPr>
+        <a:solidFill>
+          <a:srgbClr val="F5F7FA"/>
+        </a:solidFill>
+        <a:effectLst/>
+      </p:bgPr>
+    </p:bg>
+    <p:spTree>
+      <p:nvGrpSpPr>
+        <p:cNvPr id="1" name=""/>
+        <p:cNvGrpSpPr/>
+        <p:nvPr/>
+      </p:nvGrpSpPr>
+      <p:grpSpPr>
+        <a:xfrm>
+          <a:off x="0" y="0"/>
+          <a:ext cx="0" cy="0"/>
+          <a:chOff x="0" y="0"/>
+          <a:chExt cx="0" cy="0"/>
+        </a:xfrm>
+      </p:grpSpPr>
+      <p:sp>
+        <p:nvSpPr>
+          <p:cNvPr id="2" name="Rectangle 1"/>
+          <p:cNvSpPr/>
+          <p:nvPr/>
+        </p:nvSpPr>
+        <p:spPr>
+          <a:xfrm>
+            <a:off x="2" y="1143002"/>
+            <a:ext cx="12191694" cy="137161"/>
+          </a:xfrm>
+          <a:prstGeom prst="rect">
+            <a:avLst/>
+          </a:prstGeom>
+          <a:solidFill>
+            <a:srgbClr val="009688"/>
+          </a:solidFill>
+          <a:ln>
+            <a:solidFill>
+              <a:srgbClr val="009688"/>
+            </a:solidFill>
+          </a:ln>
+        </p:spPr>
+        <p:style>
+          <a:lnRef idx="1">
+            <a:schemeClr val="accent1"/>
+          </a:lnRef>
+          <a:fillRef idx="3">
+            <a:schemeClr val="accent1"/>
+          </a:fillRef>
+          <a:effectRef idx="2">
+            <a:schemeClr val="accent1"/>
+          </a:effectRef>
+          <a:fontRef idx="minor">
+            <a:schemeClr val="lt1"/>
+          </a:fontRef>
+        </p:style>
+        <p:txBody>
+          <a:bodyPr rtlCol="0" anchor="ctr"/>
+          <a:lstStyle/>
+          <a:p>
+            <a:pPr algn="ctr"/>
+            <a:endParaRPr sz="1801"/>
+          </a:p>
+        </p:txBody>
+      </p:sp>
+      <p:sp>
+        <p:nvSpPr>
+          <p:cNvPr id="3" name="TextBox 2"/>
+          <p:cNvSpPr txBox="1"/>
+          <p:nvPr/>
+        </p:nvSpPr>
+        <p:spPr>
+          <a:xfrm>
+            <a:off x="466346" y="1600204"/>
+            <a:ext cx="10808208" cy="307905"/>
+          </a:xfrm>
+          <a:prstGeom prst="rect">
+            <a:avLst/>
+          </a:prstGeom>
+          <a:noFill/>
+        </p:spPr>
+        <p:txBody>
+          <a:bodyPr wrap="square">
+            <a:spAutoFit/>
+          </a:bodyPr>
+          <a:lstStyle/>
+          <a:p>
+            <a:pPr>
+              <a:defRPr sz="1400" b="1">
+                <a:solidFill>
+                  <a:srgbClr val="009688"/>
+                </a:solidFill>
+                <a:latin typeface="Arial"/>
+              </a:defRPr>
+            </a:pPr>
+            <a:r>
+              <a:rPr sz="1401" dirty="0"/>
+              <a:t>STEP 06</a:t>
+            </a:r>
+          </a:p>
+        </p:txBody>
+      </p:sp>
+      <p:sp>
+        <p:nvSpPr>
+          <p:cNvPr id="4" name="TextBox 3"/>
+          <p:cNvSpPr txBox="1"/>
+          <p:nvPr/>
+        </p:nvSpPr>
+        <p:spPr>
+          <a:xfrm>
+            <a:off x="347476" y="1965962"/>
+            <a:ext cx="10927079" cy="523220"/>
+          </a:xfrm>
+          <a:prstGeom prst="rect">
+            <a:avLst/>
+          </a:prstGeom>
+          <a:noFill/>
+        </p:spPr>
+        <p:txBody>
+          <a:bodyPr wrap="square">
+            <a:spAutoFit/>
+          </a:bodyPr>
+          <a:lstStyle/>
+          <a:p>
+            <a:pPr>
+              <a:defRPr sz="2800" b="1">
+                <a:solidFill>
+                  <a:srgbClr val="142030"/>
+                </a:solidFill>
+                <a:latin typeface="Arial"/>
+              </a:defRPr>
+            </a:pPr>
+            <a:r>
+              <a:rPr sz="2800" dirty="0"/>
+              <a:t>Reverse Proxy Configuration (</a:t>
+            </a:r>
+            <a:r>
+              <a:rPr sz="2800" dirty="0" err="1"/>
+              <a:t>CloudPanel</a:t>
+            </a:r>
+            <a:r>
+              <a:rPr sz="2800" dirty="0"/>
+              <a:t> vs Nginx)</a:t>
+            </a:r>
+          </a:p>
+        </p:txBody>
+      </p:sp>
+      <p:sp>
+        <p:nvSpPr>
+          <p:cNvPr id="5" name="TextBox 4"/>
+          <p:cNvSpPr txBox="1"/>
+          <p:nvPr/>
+        </p:nvSpPr>
+        <p:spPr>
+          <a:xfrm>
+            <a:off x="347475" y="2788921"/>
+            <a:ext cx="11844222" cy="6560899"/>
+          </a:xfrm>
+          <a:prstGeom prst="rect">
+            <a:avLst/>
+          </a:prstGeom>
+          <a:noFill/>
+        </p:spPr>
+        <p:txBody>
+          <a:bodyPr wrap="square">
+            <a:spAutoFit/>
+          </a:bodyPr>
+          <a:lstStyle/>
+          <a:p>
+            <a:pPr>
+              <a:spcAft>
+                <a:spcPts val="1401"/>
+              </a:spcAft>
+              <a:defRPr sz="1600">
+                <a:solidFill>
+                  <a:srgbClr val="142030"/>
+                </a:solidFill>
+                <a:latin typeface="Arial"/>
+              </a:defRPr>
+            </a:pPr>
+            <a:r>
+              <a:rPr dirty="0"/>
+              <a:t>•  Option A (</a:t>
+            </a:r>
+            <a:r>
+              <a:rPr dirty="0" err="1"/>
+              <a:t>CloudPanel</a:t>
+            </a:r>
+            <a:r>
+              <a:rPr dirty="0"/>
+              <a:t>): Add a Reverse Proxy site for your domain pointing to port 3000, and generate SSL.</a:t>
+            </a:r>
+          </a:p>
+          <a:p>
+            <a:pPr>
+              <a:spcAft>
+                <a:spcPts val="1401"/>
+              </a:spcAft>
+              <a:defRPr sz="1600">
+                <a:solidFill>
+                  <a:srgbClr val="142030"/>
+                </a:solidFill>
+                <a:latin typeface="Arial"/>
+              </a:defRPr>
+            </a:pPr>
+            <a:r>
+              <a:rPr dirty="0"/>
+              <a:t>•  Option B (Manual Nginx): Verify or install Nginx:</a:t>
+            </a:r>
+          </a:p>
+          <a:p>
+            <a:pPr>
+              <a:spcAft>
+                <a:spcPts val="1401"/>
+              </a:spcAft>
+              <a:defRPr sz="1400">
+                <a:solidFill>
+                  <a:srgbClr val="1E293B"/>
+                </a:solidFill>
+                <a:latin typeface="Courier New"/>
+              </a:defRPr>
+            </a:pPr>
+            <a:r>
+              <a:rPr sz="1600" dirty="0"/>
+              <a:t>•    $ </a:t>
+            </a:r>
+            <a:r>
+              <a:rPr sz="1600" dirty="0" err="1"/>
+              <a:t>sudo</a:t>
+            </a:r>
+            <a:r>
+              <a:rPr sz="1600" dirty="0"/>
+              <a:t> apt update &amp;&amp; </a:t>
+            </a:r>
+            <a:r>
+              <a:rPr sz="1600" dirty="0" err="1"/>
+              <a:t>sudo</a:t>
+            </a:r>
+            <a:r>
+              <a:rPr sz="1600" dirty="0"/>
+              <a:t> apt install nginx -y</a:t>
+            </a:r>
+          </a:p>
+          <a:p>
+            <a:pPr>
+              <a:spcAft>
+                <a:spcPts val="1401"/>
+              </a:spcAft>
+              <a:defRPr sz="1400">
+                <a:solidFill>
+                  <a:srgbClr val="1E293B"/>
+                </a:solidFill>
+                <a:latin typeface="Courier New"/>
+              </a:defRPr>
+            </a:pPr>
+            <a:r>
+              <a:rPr sz="1600" dirty="0"/>
+              <a:t>•  Create a file in sites-available:   $ </a:t>
+            </a:r>
+            <a:r>
+              <a:rPr sz="1600" dirty="0" err="1"/>
+              <a:t>sudo</a:t>
+            </a:r>
+            <a:r>
+              <a:rPr sz="1600" dirty="0"/>
+              <a:t> nano /etc/nginx/sites-available/frontend.example.com</a:t>
+            </a:r>
+            <a:endParaRPr lang="en-US" sz="1600" dirty="0"/>
+          </a:p>
+          <a:p>
+            <a:pPr>
+              <a:spcAft>
+                <a:spcPts val="1401"/>
+              </a:spcAft>
+              <a:defRPr sz="1400">
+                <a:solidFill>
+                  <a:srgbClr val="1E293B"/>
+                </a:solidFill>
+                <a:latin typeface="Courier New"/>
+              </a:defRPr>
+            </a:pPr>
+            <a:r>
+              <a:rPr lang="en-US" sz="1600" dirty="0"/>
+              <a:t>================</a:t>
+            </a:r>
+          </a:p>
+          <a:p>
+            <a:r>
+              <a:rPr lang="en-US" sz="1400" dirty="0">
+                <a:latin typeface="Times New Roman" panose="02020603050405020304" pitchFamily="18" charset="0"/>
+                <a:cs typeface="Times New Roman" panose="02020603050405020304" pitchFamily="18" charset="0"/>
+              </a:rPr>
+              <a:t>server {</a:t>
+            </a:r>
+          </a:p>
+          <a:p>
+            <a:r>
+              <a:rPr lang="en-US" sz="1400" dirty="0">
+                <a:latin typeface="Times New Roman" panose="02020603050405020304" pitchFamily="18" charset="0"/>
+                <a:cs typeface="Times New Roman" panose="02020603050405020304" pitchFamily="18" charset="0"/>
+              </a:rPr>
+              <a:t>    listen 80;</a:t>
+            </a:r>
+          </a:p>
+          <a:p>
+            <a:r>
+              <a:rPr lang="en-US" sz="1400" dirty="0">
+                <a:latin typeface="Times New Roman" panose="02020603050405020304" pitchFamily="18" charset="0"/>
+                <a:cs typeface="Times New Roman" panose="02020603050405020304" pitchFamily="18" charset="0"/>
+              </a:rPr>
+              <a:t>    </a:t>
+            </a:r>
+            <a:r>
+              <a:rPr lang="en-US" sz="1400" dirty="0" err="1">
+                <a:latin typeface="Times New Roman" panose="02020603050405020304" pitchFamily="18" charset="0"/>
+                <a:cs typeface="Times New Roman" panose="02020603050405020304" pitchFamily="18" charset="0"/>
+              </a:rPr>
+              <a:t>server_name</a:t>
+            </a:r>
+            <a:r>
+              <a:rPr lang="en-US" sz="1400" dirty="0">
+                <a:latin typeface="Times New Roman" panose="02020603050405020304" pitchFamily="18" charset="0"/>
+                <a:cs typeface="Times New Roman" panose="02020603050405020304" pitchFamily="18" charset="0"/>
+              </a:rPr>
+              <a:t> frontend.example.com;</a:t>
+            </a:r>
+          </a:p>
+          <a:p>
+            <a:endParaRPr lang="en-US" sz="1400" dirty="0">
+              <a:latin typeface="Times New Roman" panose="02020603050405020304" pitchFamily="18" charset="0"/>
+              <a:cs typeface="Times New Roman" panose="02020603050405020304" pitchFamily="18" charset="0"/>
+            </a:endParaRPr>
+          </a:p>
+          <a:p>
+            <a:r>
+              <a:rPr lang="en-US" sz="1400" dirty="0">
+                <a:latin typeface="Times New Roman" panose="02020603050405020304" pitchFamily="18" charset="0"/>
+                <a:cs typeface="Times New Roman" panose="02020603050405020304" pitchFamily="18" charset="0"/>
+              </a:rPr>
+              <a:t>    location / {</a:t>
+            </a:r>
+          </a:p>
+          <a:p>
+            <a:r>
+              <a:rPr lang="en-US" sz="1400" dirty="0">
+                <a:latin typeface="Times New Roman" panose="02020603050405020304" pitchFamily="18" charset="0"/>
+                <a:cs typeface="Times New Roman" panose="02020603050405020304" pitchFamily="18" charset="0"/>
+              </a:rPr>
+              <a:t>        </a:t>
+            </a:r>
+            <a:r>
+              <a:rPr lang="en-US" sz="1400" dirty="0" err="1">
+                <a:latin typeface="Times New Roman" panose="02020603050405020304" pitchFamily="18" charset="0"/>
+                <a:cs typeface="Times New Roman" panose="02020603050405020304" pitchFamily="18" charset="0"/>
+              </a:rPr>
+              <a:t>proxy_pass</a:t>
+            </a:r>
+            <a:r>
+              <a:rPr lang="en-US" sz="1400" dirty="0">
+                <a:latin typeface="Times New Roman" panose="02020603050405020304" pitchFamily="18" charset="0"/>
+                <a:cs typeface="Times New Roman" panose="02020603050405020304" pitchFamily="18" charset="0"/>
+              </a:rPr>
+              <a:t> http://localhost:3000;</a:t>
+            </a:r>
+          </a:p>
+          <a:p>
+            <a:r>
+              <a:rPr lang="en-US" sz="1400" dirty="0">
+                <a:latin typeface="Times New Roman" panose="02020603050405020304" pitchFamily="18" charset="0"/>
+                <a:cs typeface="Times New Roman" panose="02020603050405020304" pitchFamily="18" charset="0"/>
+              </a:rPr>
+              <a:t>        </a:t>
+            </a:r>
+            <a:r>
+              <a:rPr lang="en-US" sz="1400" dirty="0" err="1">
+                <a:latin typeface="Times New Roman" panose="02020603050405020304" pitchFamily="18" charset="0"/>
+                <a:cs typeface="Times New Roman" panose="02020603050405020304" pitchFamily="18" charset="0"/>
+              </a:rPr>
+              <a:t>proxy_http_version</a:t>
+            </a:r>
+            <a:r>
+              <a:rPr lang="en-US" sz="1400" dirty="0">
+                <a:latin typeface="Times New Roman" panose="02020603050405020304" pitchFamily="18" charset="0"/>
+                <a:cs typeface="Times New Roman" panose="02020603050405020304" pitchFamily="18" charset="0"/>
+              </a:rPr>
+              <a:t> 1.1;</a:t>
+            </a:r>
+          </a:p>
+          <a:p>
+            <a:r>
+              <a:rPr lang="en-US" sz="1400" dirty="0">
+                <a:latin typeface="Times New Roman" panose="02020603050405020304" pitchFamily="18" charset="0"/>
+                <a:cs typeface="Times New Roman" panose="02020603050405020304" pitchFamily="18" charset="0"/>
+              </a:rPr>
+              <a:t>        </a:t>
+            </a:r>
+            <a:r>
+              <a:rPr lang="en-US" sz="1400" dirty="0" err="1">
+                <a:latin typeface="Times New Roman" panose="02020603050405020304" pitchFamily="18" charset="0"/>
+                <a:cs typeface="Times New Roman" panose="02020603050405020304" pitchFamily="18" charset="0"/>
+              </a:rPr>
+              <a:t>proxy_set_header</a:t>
+            </a:r>
+            <a:r>
+              <a:rPr lang="en-US" sz="1400" dirty="0">
+                <a:latin typeface="Times New Roman" panose="02020603050405020304" pitchFamily="18" charset="0"/>
+                <a:cs typeface="Times New Roman" panose="02020603050405020304" pitchFamily="18" charset="0"/>
+              </a:rPr>
+              <a:t> Upgrade $</a:t>
+            </a:r>
+            <a:r>
+              <a:rPr lang="en-US" sz="1400" dirty="0" err="1">
+                <a:latin typeface="Times New Roman" panose="02020603050405020304" pitchFamily="18" charset="0"/>
+                <a:cs typeface="Times New Roman" panose="02020603050405020304" pitchFamily="18" charset="0"/>
+              </a:rPr>
+              <a:t>http_upgrade</a:t>
+            </a:r>
+            <a:r>
+              <a:rPr lang="en-US" sz="1400" dirty="0">
+                <a:latin typeface="Times New Roman" panose="02020603050405020304" pitchFamily="18" charset="0"/>
+                <a:cs typeface="Times New Roman" panose="02020603050405020304" pitchFamily="18" charset="0"/>
+              </a:rPr>
+              <a:t>;</a:t>
+            </a:r>
+          </a:p>
+          <a:p>
+            <a:r>
+              <a:rPr lang="en-US" sz="1400" dirty="0">
+                <a:latin typeface="Times New Roman" panose="02020603050405020304" pitchFamily="18" charset="0"/>
+                <a:cs typeface="Times New Roman" panose="02020603050405020304" pitchFamily="18" charset="0"/>
+              </a:rPr>
+              <a:t>        </a:t>
+            </a:r>
+            <a:r>
+              <a:rPr lang="en-US" sz="1400" dirty="0" err="1">
+                <a:latin typeface="Times New Roman" panose="02020603050405020304" pitchFamily="18" charset="0"/>
+                <a:cs typeface="Times New Roman" panose="02020603050405020304" pitchFamily="18" charset="0"/>
+              </a:rPr>
+              <a:t>proxy_set_header</a:t>
+            </a:r>
+            <a:r>
+              <a:rPr lang="en-US" sz="1400" dirty="0">
+                <a:latin typeface="Times New Roman" panose="02020603050405020304" pitchFamily="18" charset="0"/>
+                <a:cs typeface="Times New Roman" panose="02020603050405020304" pitchFamily="18" charset="0"/>
+              </a:rPr>
+              <a:t> Connection 'upgrade';</a:t>
+            </a:r>
+          </a:p>
+          <a:p>
+            <a:r>
+              <a:rPr lang="en-US" sz="1400" dirty="0">
+                <a:latin typeface="Times New Roman" panose="02020603050405020304" pitchFamily="18" charset="0"/>
+                <a:cs typeface="Times New Roman" panose="02020603050405020304" pitchFamily="18" charset="0"/>
+              </a:rPr>
+              <a:t>        </a:t>
+            </a:r>
+            <a:r>
+              <a:rPr lang="en-US" sz="1400" dirty="0" err="1">
+                <a:latin typeface="Times New Roman" panose="02020603050405020304" pitchFamily="18" charset="0"/>
+                <a:cs typeface="Times New Roman" panose="02020603050405020304" pitchFamily="18" charset="0"/>
+              </a:rPr>
+              <a:t>proxy_set_header</a:t>
+            </a:r>
+            <a:r>
+              <a:rPr lang="en-US" sz="1400" dirty="0">
+                <a:latin typeface="Times New Roman" panose="02020603050405020304" pitchFamily="18" charset="0"/>
+                <a:cs typeface="Times New Roman" panose="02020603050405020304" pitchFamily="18" charset="0"/>
+              </a:rPr>
+              <a:t> Host $host;</a:t>
+            </a:r>
+          </a:p>
+          <a:p>
+            <a:r>
+              <a:rPr lang="en-US" sz="1400" dirty="0">
+                <a:latin typeface="Times New Roman" panose="02020603050405020304" pitchFamily="18" charset="0"/>
+                <a:cs typeface="Times New Roman" panose="02020603050405020304" pitchFamily="18" charset="0"/>
+              </a:rPr>
+              <a:t>        </a:t>
+            </a:r>
+            <a:r>
+              <a:rPr lang="en-US" sz="1400" dirty="0" err="1">
+                <a:latin typeface="Times New Roman" panose="02020603050405020304" pitchFamily="18" charset="0"/>
+                <a:cs typeface="Times New Roman" panose="02020603050405020304" pitchFamily="18" charset="0"/>
+              </a:rPr>
+              <a:t>proxy_cache_bypass</a:t>
+            </a:r>
+            <a:r>
+              <a:rPr lang="en-US" sz="1400" dirty="0">
+                <a:latin typeface="Times New Roman" panose="02020603050405020304" pitchFamily="18" charset="0"/>
+                <a:cs typeface="Times New Roman" panose="02020603050405020304" pitchFamily="18" charset="0"/>
+              </a:rPr>
+              <a:t> $</a:t>
+            </a:r>
+            <a:r>
+              <a:rPr lang="en-US" sz="1400" dirty="0" err="1">
+                <a:latin typeface="Times New Roman" panose="02020603050405020304" pitchFamily="18" charset="0"/>
+                <a:cs typeface="Times New Roman" panose="02020603050405020304" pitchFamily="18" charset="0"/>
+              </a:rPr>
+              <a:t>http_upgrade</a:t>
+            </a:r>
+            <a:r>
+              <a:rPr lang="en-US" sz="1400" dirty="0">
+                <a:latin typeface="Times New Roman" panose="02020603050405020304" pitchFamily="18" charset="0"/>
+                <a:cs typeface="Times New Roman" panose="02020603050405020304" pitchFamily="18" charset="0"/>
+              </a:rPr>
+              <a:t>;</a:t>
+            </a:r>
+          </a:p>
+          <a:p>
+            <a:r>
+              <a:rPr lang="en-US" sz="1400" dirty="0">
+                <a:latin typeface="Times New Roman" panose="02020603050405020304" pitchFamily="18" charset="0"/>
+                <a:cs typeface="Times New Roman" panose="02020603050405020304" pitchFamily="18" charset="0"/>
+              </a:rPr>
+              <a:t>        </a:t>
+            </a:r>
+          </a:p>
+          <a:p>
+            <a:r>
+              <a:rPr lang="en-US" sz="1400" dirty="0">
+                <a:latin typeface="Times New Roman" panose="02020603050405020304" pitchFamily="18" charset="0"/>
+                <a:cs typeface="Times New Roman" panose="02020603050405020304" pitchFamily="18" charset="0"/>
+              </a:rPr>
+              <a:t>        # Real IP headers</a:t>
+            </a:r>
+          </a:p>
+          <a:p>
+            <a:r>
+              <a:rPr lang="en-US" sz="1400" dirty="0">
+                <a:latin typeface="Times New Roman" panose="02020603050405020304" pitchFamily="18" charset="0"/>
+                <a:cs typeface="Times New Roman" panose="02020603050405020304" pitchFamily="18" charset="0"/>
+              </a:rPr>
+              <a:t>        </a:t>
+            </a:r>
+            <a:r>
+              <a:rPr lang="en-US" sz="1400" dirty="0" err="1">
+                <a:latin typeface="Times New Roman" panose="02020603050405020304" pitchFamily="18" charset="0"/>
+                <a:cs typeface="Times New Roman" panose="02020603050405020304" pitchFamily="18" charset="0"/>
+              </a:rPr>
+              <a:t>proxy_set_header</a:t>
+            </a:r>
+            <a:r>
+              <a:rPr lang="en-US" sz="1400" dirty="0">
+                <a:latin typeface="Times New Roman" panose="02020603050405020304" pitchFamily="18" charset="0"/>
+                <a:cs typeface="Times New Roman" panose="02020603050405020304" pitchFamily="18" charset="0"/>
+              </a:rPr>
+              <a:t> X-Real-IP $</a:t>
+            </a:r>
+            <a:r>
+              <a:rPr lang="en-US" sz="1400" dirty="0" err="1">
+                <a:latin typeface="Times New Roman" panose="02020603050405020304" pitchFamily="18" charset="0"/>
+                <a:cs typeface="Times New Roman" panose="02020603050405020304" pitchFamily="18" charset="0"/>
+              </a:rPr>
+              <a:t>remote_addr</a:t>
+            </a:r>
+            <a:r>
+              <a:rPr lang="en-US" sz="1400" dirty="0">
+                <a:latin typeface="Times New Roman" panose="02020603050405020304" pitchFamily="18" charset="0"/>
+                <a:cs typeface="Times New Roman" panose="02020603050405020304" pitchFamily="18" charset="0"/>
+              </a:rPr>
+              <a:t>;</a:t>
+            </a:r>
+          </a:p>
+          <a:p>
+            <a:r>
+              <a:rPr lang="en-US" sz="1400" dirty="0">
+                <a:latin typeface="Times New Roman" panose="02020603050405020304" pitchFamily="18" charset="0"/>
+                <a:cs typeface="Times New Roman" panose="02020603050405020304" pitchFamily="18" charset="0"/>
+              </a:rPr>
+              <a:t>        </a:t>
+            </a:r>
+            <a:r>
+              <a:rPr lang="en-US" sz="1400" dirty="0" err="1">
+                <a:latin typeface="Times New Roman" panose="02020603050405020304" pitchFamily="18" charset="0"/>
+                <a:cs typeface="Times New Roman" panose="02020603050405020304" pitchFamily="18" charset="0"/>
+              </a:rPr>
+              <a:t>proxy_set_header</a:t>
+            </a:r>
+            <a:r>
+              <a:rPr lang="en-US" sz="1400" dirty="0">
+                <a:latin typeface="Times New Roman" panose="02020603050405020304" pitchFamily="18" charset="0"/>
+                <a:cs typeface="Times New Roman" panose="02020603050405020304" pitchFamily="18" charset="0"/>
+              </a:rPr>
+              <a:t> X-Forwarded-For $</a:t>
+            </a:r>
+            <a:r>
+              <a:rPr lang="en-US" sz="1400" dirty="0" err="1">
+                <a:latin typeface="Times New Roman" panose="02020603050405020304" pitchFamily="18" charset="0"/>
+                <a:cs typeface="Times New Roman" panose="02020603050405020304" pitchFamily="18" charset="0"/>
+              </a:rPr>
+              <a:t>proxy_add_x_forwarded_for</a:t>
+            </a:r>
+            <a:r>
+              <a:rPr lang="en-US" sz="1400" dirty="0">
+                <a:latin typeface="Times New Roman" panose="02020603050405020304" pitchFamily="18" charset="0"/>
+                <a:cs typeface="Times New Roman" panose="02020603050405020304" pitchFamily="18" charset="0"/>
+              </a:rPr>
+              <a:t>;</a:t>
+            </a:r>
+          </a:p>
+          <a:p>
+            <a:r>
+              <a:rPr lang="en-US" sz="1400" dirty="0">
+                <a:latin typeface="Times New Roman" panose="02020603050405020304" pitchFamily="18" charset="0"/>
+                <a:cs typeface="Times New Roman" panose="02020603050405020304" pitchFamily="18" charset="0"/>
+              </a:rPr>
+              <a:t>        </a:t>
+            </a:r>
+            <a:r>
+              <a:rPr lang="en-US" sz="1400" dirty="0" err="1">
+                <a:latin typeface="Times New Roman" panose="02020603050405020304" pitchFamily="18" charset="0"/>
+                <a:cs typeface="Times New Roman" panose="02020603050405020304" pitchFamily="18" charset="0"/>
+              </a:rPr>
+              <a:t>proxy_set_header</a:t>
+            </a:r>
+            <a:r>
+              <a:rPr lang="en-US" sz="1400" dirty="0">
+                <a:latin typeface="Times New Roman" panose="02020603050405020304" pitchFamily="18" charset="0"/>
+                <a:cs typeface="Times New Roman" panose="02020603050405020304" pitchFamily="18" charset="0"/>
+              </a:rPr>
+              <a:t> X-Forwarded-Proto $scheme;</a:t>
+            </a:r>
+          </a:p>
+          <a:p>
+            <a:r>
+              <a:rPr lang="en-US" sz="1400" dirty="0">
+                <a:latin typeface="Times New Roman" panose="02020603050405020304" pitchFamily="18" charset="0"/>
+                <a:cs typeface="Times New Roman" panose="02020603050405020304" pitchFamily="18" charset="0"/>
+              </a:rPr>
+              <a:t>    }</a:t>
+            </a:r>
+          </a:p>
+          <a:p>
+            <a:r>
+              <a:rPr lang="en-US" sz="1400" dirty="0">
+                <a:latin typeface="Times New Roman" panose="02020603050405020304" pitchFamily="18" charset="0"/>
+                <a:cs typeface="Times New Roman" panose="02020603050405020304" pitchFamily="18" charset="0"/>
+              </a:rPr>
+              <a:t>}</a:t>
+            </a:r>
+          </a:p>
+          <a:p>
+            <a:pPr>
+              <a:spcAft>
+                <a:spcPts val="1401"/>
+              </a:spcAft>
+              <a:defRPr sz="1400">
+                <a:solidFill>
+                  <a:srgbClr val="1E293B"/>
+                </a:solidFill>
+                <a:latin typeface="Courier New"/>
+              </a:defRPr>
+            </a:pPr>
+            <a:endParaRPr sz="1600" dirty="0"/>
+          </a:p>
+        </p:txBody>
+      </p:sp>
+    </p:spTree>
+  </p:cSld>
+  <p:clrMapOvr>
+    <a:masterClrMapping/>
+  </p:clrMapOvr>
+</p:sld>
+</file>
+
+<file path=ppt/slides/slide9.xml><?xml version="1.0" encoding="utf-8"?>
+<p:sld xmlns:a="http://schemas.openxmlformats.org/drawingml/2006/main" xmlns:r="http://schemas.openxmlformats.org/officeDocument/2006/relationships" xmlns:p="http://schemas.openxmlformats.org/presentationml/2006/main">
+  <p:cSld>
+    <p:bg>
+      <p:bgPr>
+        <a:solidFill>
+          <a:srgbClr val="F5F7FA"/>
+        </a:solidFill>
+        <a:effectLst/>
+      </p:bgPr>
+    </p:bg>
+    <p:spTree>
+      <p:nvGrpSpPr>
+        <p:cNvPr id="1" name="">
+          <a:extLst>
+            <a:ext uri="{FF2B5EF4-FFF2-40B4-BE49-F238E27FC236}">
+              <a16:creationId xmlns:a16="http://schemas.microsoft.com/office/drawing/2014/main" id="{B70924E3-715A-D6E1-E36C-7133447F19C1}"/>
+            </a:ext>
+          </a:extLst>
+        </p:cNvPr>
+        <p:cNvGrpSpPr/>
+        <p:nvPr/>
+      </p:nvGrpSpPr>
+      <p:grpSpPr>
+        <a:xfrm>
+          <a:off x="0" y="0"/>
+          <a:ext cx="0" cy="0"/>
+          <a:chOff x="0" y="0"/>
+          <a:chExt cx="0" cy="0"/>
+        </a:xfrm>
+      </p:grpSpPr>
+      <p:sp>
+        <p:nvSpPr>
+          <p:cNvPr id="2" name="Rectangle 1">
+            <a:extLst>
+              <a:ext uri="{FF2B5EF4-FFF2-40B4-BE49-F238E27FC236}">
+                <a16:creationId xmlns:a16="http://schemas.microsoft.com/office/drawing/2014/main" id="{9B87A3E0-3ACD-B35C-F17E-09A674D70D3E}"/>
+              </a:ext>
+            </a:extLst>
+          </p:cNvPr>
+          <p:cNvSpPr/>
+          <p:nvPr/>
+        </p:nvSpPr>
+        <p:spPr>
+          <a:xfrm>
+            <a:off x="2" y="1143002"/>
+            <a:ext cx="12191694" cy="137161"/>
+          </a:xfrm>
+          <a:prstGeom prst="rect">
+            <a:avLst/>
+          </a:prstGeom>
+          <a:solidFill>
+            <a:srgbClr val="009688"/>
+          </a:solidFill>
+          <a:ln>
+            <a:solidFill>
+              <a:srgbClr val="009688"/>
+            </a:solidFill>
+          </a:ln>
+        </p:spPr>
+        <p:style>
+          <a:lnRef idx="1">
+            <a:schemeClr val="accent1"/>
+          </a:lnRef>
+          <a:fillRef idx="3">
+            <a:schemeClr val="accent1"/>
+          </a:fillRef>
+          <a:effectRef idx="2">
+            <a:schemeClr val="accent1"/>
+          </a:effectRef>
+          <a:fontRef idx="minor">
+            <a:schemeClr val="lt1"/>
+          </a:fontRef>
+        </p:style>
+        <p:txBody>
+          <a:bodyPr rtlCol="0" anchor="ctr"/>
+          <a:lstStyle/>
+          <a:p>
+            <a:pPr algn="ctr"/>
+            <a:endParaRPr sz="1801"/>
+          </a:p>
+        </p:txBody>
+      </p:sp>
+      <p:sp>
+        <p:nvSpPr>
+          <p:cNvPr id="5" name="TextBox 4">
+            <a:extLst>
+              <a:ext uri="{FF2B5EF4-FFF2-40B4-BE49-F238E27FC236}">
+                <a16:creationId xmlns:a16="http://schemas.microsoft.com/office/drawing/2014/main" id="{784951A8-8E61-4DE2-6918-EA1F10864F10}"/>
+              </a:ext>
+            </a:extLst>
+          </p:cNvPr>
+          <p:cNvSpPr txBox="1"/>
+          <p:nvPr/>
+        </p:nvSpPr>
+        <p:spPr>
+          <a:xfrm>
+            <a:off x="316995" y="1532182"/>
+            <a:ext cx="11844222" cy="1374735"/>
+          </a:xfrm>
+          <a:prstGeom prst="rect">
+            <a:avLst/>
+          </a:prstGeom>
+          <a:noFill/>
+        </p:spPr>
+        <p:txBody>
+          <a:bodyPr wrap="square">
+            <a:spAutoFit/>
+          </a:bodyPr>
+          <a:lstStyle/>
+          <a:p>
+            <a:pPr>
+              <a:spcAft>
+                <a:spcPts val="1401"/>
+              </a:spcAft>
+              <a:defRPr sz="1600">
+                <a:solidFill>
+                  <a:srgbClr val="142030"/>
+                </a:solidFill>
+                <a:latin typeface="Arial"/>
+              </a:defRPr>
+            </a:pPr>
+            <a:r>
+              <a:rPr lang="en-US" dirty="0"/>
+              <a:t>•  Add a server block listening on port 80 proxying requests to http://localhost:3000.</a:t>
+            </a:r>
+          </a:p>
+          <a:p>
+            <a:pPr>
+              <a:spcAft>
+                <a:spcPts val="1401"/>
+              </a:spcAft>
+              <a:defRPr sz="1400">
+                <a:solidFill>
+                  <a:srgbClr val="1E293B"/>
+                </a:solidFill>
+                <a:latin typeface="Courier New"/>
+              </a:defRPr>
+            </a:pPr>
+            <a:r>
+              <a:rPr lang="en-US" sz="1400" dirty="0"/>
+              <a:t>•  Link config to sites-enabled:   $ </a:t>
+            </a:r>
+            <a:r>
+              <a:rPr lang="en-US" sz="1400" dirty="0" err="1"/>
+              <a:t>sudo</a:t>
+            </a:r>
+            <a:r>
+              <a:rPr lang="en-US" sz="1400" dirty="0"/>
+              <a:t> ln -s /</a:t>
+            </a:r>
+            <a:r>
+              <a:rPr lang="en-US" sz="1400" dirty="0" err="1"/>
+              <a:t>etc</a:t>
+            </a:r>
+            <a:r>
+              <a:rPr lang="en-US" sz="1400" dirty="0"/>
+              <a:t>/nginx/sites-available/ frontend.example.com /</a:t>
+            </a:r>
+            <a:r>
+              <a:rPr lang="en-US" sz="1400" dirty="0" err="1"/>
+              <a:t>etc</a:t>
+            </a:r>
+            <a:r>
+              <a:rPr lang="en-US" sz="1400" dirty="0"/>
+              <a:t>/nginx/sites-enabled/</a:t>
+            </a:r>
+          </a:p>
+          <a:p>
+            <a:pPr>
+              <a:spcAft>
+                <a:spcPts val="1401"/>
+              </a:spcAft>
+              <a:defRPr sz="1400">
+                <a:solidFill>
+                  <a:srgbClr val="1E293B"/>
+                </a:solidFill>
+                <a:latin typeface="Courier New"/>
+              </a:defRPr>
+            </a:pPr>
+            <a:r>
+              <a:rPr lang="en-US" sz="1600" dirty="0"/>
+              <a:t>•  Test settings and restart Nginx:   $ </a:t>
+            </a:r>
+            <a:r>
+              <a:rPr lang="en-US" sz="1600" dirty="0" err="1"/>
+              <a:t>sudo</a:t>
+            </a:r>
+            <a:r>
+              <a:rPr lang="en-US" sz="1600" dirty="0"/>
+              <a:t> nginx -t &amp;&amp; </a:t>
+            </a:r>
+            <a:r>
+              <a:rPr lang="en-US" sz="1600" dirty="0" err="1"/>
+              <a:t>sudo</a:t>
+            </a:r>
+            <a:r>
+              <a:rPr lang="en-US" sz="1600" dirty="0"/>
+              <a:t> </a:t>
+            </a:r>
+            <a:r>
+              <a:rPr lang="en-US" sz="1600" dirty="0" err="1"/>
+              <a:t>systemctl</a:t>
+            </a:r>
+            <a:r>
+              <a:rPr lang="en-US" sz="1600" dirty="0"/>
+              <a:t> restart nginx</a:t>
+            </a:r>
+          </a:p>
+        </p:txBody>
+      </p:sp>
+    </p:spTree>
+    <p:extLst>
+      <p:ext uri="{BB962C8B-B14F-4D97-AF65-F5344CB8AC3E}">
+        <p14:creationId xmlns:p14="http://schemas.microsoft.com/office/powerpoint/2010/main" val="1743210322"/>
+      </p:ext>
+    </p:extLst>
   </p:cSld>
   <p:clrMapOvr>
     <a:masterClrMapping/>
